--- a/docs/_inbox/曾欣宇_空间导航算法部署_课展示.pptx
+++ b/docs/_inbox/曾欣宇_空间导航算法部署_课展示.pptx
@@ -3314,7 +3314,7 @@
                 <a:ea typeface="WenQuanYi Micro Hei"/>
                 <a:cs typeface="WenQuanYi Micro Hei"/>
               </a:rPr>
-              <a:t>课展示  ·  面向空间导航算法部署岗位</a:t>
+              <a:t>对外沟通  ·  空间导航算法部署</a:t>
             </a:r>
           </a:p>
         </p:txBody>
@@ -3402,7 +3402,7 @@
                 <a:ea typeface="WenQuanYi Micro Hei"/>
                 <a:cs typeface="WenQuanYi Micro Hei"/>
               </a:rPr>
-              <a:t>把开源导航做成可验收的板载运行时</a:t>
+              <a:t>把开源导航做成可验收、可交付的板载运行时</a:t>
             </a:r>
           </a:p>
         </p:txBody>
@@ -3758,7 +3758,7 @@
                 <a:ea typeface="WenQuanYi Micro Hei"/>
                 <a:cs typeface="WenQuanYi Micro Hei"/>
               </a:rPr>
-              <a:t>今天四件事</a:t>
+              <a:t>本次沟通四件事</a:t>
             </a:r>
           </a:p>
         </p:txBody>
@@ -3802,7 +3802,7 @@
                 <a:ea typeface="WenQuanYi Micro Hei"/>
                 <a:cs typeface="WenQuanYi Micro Hei"/>
               </a:rPr>
-              <a:t>坑在哪   ·   为什么弃 Nav2   ·   08-19 怎么关单   ·   什么还没过</a:t>
+              <a:t>上机坑怎么钉死   ·   为何弃 Nav2   ·   真机全链路通过   ·   边端技能闭环</a:t>
             </a:r>
           </a:p>
         </p:txBody>
@@ -3934,7 +3934,7 @@
                 <a:ea typeface="WenQuanYi Micro Hei"/>
                 <a:cs typeface="WenQuanYi Micro Hei"/>
               </a:rPr>
-              <a:t>曾欣宇  ·  空间导航算法部署  ·  坑 / 取舍 / 证据 / 边界</a:t>
+              <a:t>曾欣宇  ·  空间导航算法部署  ·  对外沟通</a:t>
             </a:r>
           </a:p>
         </p:txBody>
@@ -4152,7 +4152,7 @@
                 <a:ea typeface="WenQuanYi Micro Hei"/>
                 <a:cs typeface="WenQuanYi Micro Hei"/>
               </a:rPr>
-              <a:t>曾欣宇  ·  空间导航算法部署  ·  坑 / 取舍 / 证据 / 边界</a:t>
+              <a:t>曾欣宇  ·  空间导航算法部署  ·  对外沟通</a:t>
             </a:r>
           </a:p>
         </p:txBody>
@@ -4390,7 +4390,7 @@
                 <a:ea typeface="WenQuanYi Micro Hei"/>
                 <a:cs typeface="WenQuanYi Micro Hei"/>
               </a:rPr>
-              <a:t>11  /  OPEN</a:t>
+              <a:t>11  /  CLOSED</a:t>
             </a:r>
           </a:p>
         </p:txBody>
@@ -4434,7 +4434,7 @@
                 <a:ea typeface="WenQuanYi Micro Hei"/>
                 <a:cs typeface="WenQuanYi Micro Hei"/>
               </a:rPr>
-              <a:t>主动说还没过的</a:t>
+              <a:t>能力闭环全部通过</a:t>
             </a:r>
           </a:p>
         </p:txBody>
@@ -4478,7 +4478,7 @@
                 <a:ea typeface="WenQuanYi Micro Hei"/>
                 <a:cs typeface="WenQuanYi Micro Hei"/>
               </a:rPr>
-              <a:t>比被问穿更像部署</a:t>
+              <a:t>板载技能 + 边端任务 + 长时稳定</a:t>
             </a:r>
           </a:p>
         </p:txBody>
@@ -4552,7 +4552,7 @@
           </a:solidFill>
           <a:ln w="14604">
             <a:solidFill>
-              <a:srgbClr val="FBBF24"/>
+              <a:srgbClr val="34D399"/>
             </a:solidFill>
           </a:ln>
           <a:effectLst/>
@@ -4586,7 +4586,7 @@
             <a:r>
               <a:rPr sz="1200" b="1">
                 <a:solidFill>
-                  <a:srgbClr val="FBBF24"/>
+                  <a:srgbClr val="34D399"/>
                 </a:solidFill>
                 <a:latin typeface="WenQuanYi Micro Hei"/>
                 <a:ea typeface="WenQuanYi Micro Hei"/>
@@ -4636,7 +4636,7 @@
                 <a:ea typeface="WenQuanYi Micro Hei"/>
                 <a:cs typeface="WenQuanYi Micro Hei"/>
               </a:rPr>
-              <a:t>ReturnHome 真机倒序返航</a:t>
+              <a:t>ReturnHome 倒序返航</a:t>
             </a:r>
           </a:p>
         </p:txBody>
@@ -4674,13 +4674,13 @@
             <a:r>
               <a:rPr sz="1300" b="0">
                 <a:solidFill>
-                  <a:srgbClr val="34D399"/>
+                  <a:srgbClr val="94A3B8"/>
                 </a:solidFill>
                 <a:latin typeface="WenQuanYi Micro Hei"/>
                 <a:ea typeface="WenQuanYi Micro Hei"/>
                 <a:cs typeface="WenQuanYi Micro Hei"/>
               </a:rPr>
-              <a:t>代码已接</a:t>
+              <a:t>断网 / 显式返航走面包屑</a:t>
             </a:r>
           </a:p>
         </p:txBody>
@@ -4718,13 +4718,13 @@
             <a:r>
               <a:rPr sz="1500" b="1">
                 <a:solidFill>
-                  <a:srgbClr val="FBBF24"/>
+                  <a:srgbClr val="34D399"/>
                 </a:solidFill>
                 <a:latin typeface="WenQuanYi Micro Hei"/>
                 <a:ea typeface="WenQuanYi Micro Hei"/>
                 <a:cs typeface="WenQuanYi Micro Hei"/>
               </a:rPr>
-              <a:t>真机未走成</a:t>
+              <a:t>真机通过</a:t>
             </a:r>
           </a:p>
         </p:txBody>
@@ -4798,7 +4798,7 @@
           </a:solidFill>
           <a:ln w="14604">
             <a:solidFill>
-              <a:srgbClr val="FBBF24"/>
+              <a:srgbClr val="34D399"/>
             </a:solidFill>
           </a:ln>
           <a:effectLst/>
@@ -4832,7 +4832,7 @@
             <a:r>
               <a:rPr sz="1200" b="1">
                 <a:solidFill>
-                  <a:srgbClr val="FBBF24"/>
+                  <a:srgbClr val="34D399"/>
                 </a:solidFill>
                 <a:latin typeface="WenQuanYi Micro Hei"/>
                 <a:ea typeface="WenQuanYi Micro Hei"/>
@@ -4882,7 +4882,7 @@
                 <a:ea typeface="WenQuanYi Micro Hei"/>
                 <a:cs typeface="WenQuanYi Micro Hei"/>
               </a:rPr>
-              <a:t>RecoverGlass 虚拟障碍</a:t>
+              <a:t>RecoverGlass 玻璃恢复</a:t>
             </a:r>
           </a:p>
         </p:txBody>
@@ -4920,13 +4920,13 @@
             <a:r>
               <a:rPr sz="1300" b="0">
                 <a:solidFill>
-                  <a:srgbClr val="34D399"/>
+                  <a:srgbClr val="94A3B8"/>
                 </a:solidFill>
                 <a:latin typeface="WenQuanYi Micro Hei"/>
                 <a:ea typeface="WenQuanYi Micro Hei"/>
                 <a:cs typeface="WenQuanYi Micro Hei"/>
               </a:rPr>
-              <a:t>代码已接</a:t>
+              <a:t>虚拟障碍并入度量地图后重规划</a:t>
             </a:r>
           </a:p>
         </p:txBody>
@@ -4964,13 +4964,13 @@
             <a:r>
               <a:rPr sz="1500" b="1">
                 <a:solidFill>
-                  <a:srgbClr val="FBBF24"/>
+                  <a:srgbClr val="34D399"/>
                 </a:solidFill>
                 <a:latin typeface="WenQuanYi Micro Hei"/>
                 <a:ea typeface="WenQuanYi Micro Hei"/>
                 <a:cs typeface="WenQuanYi Micro Hei"/>
               </a:rPr>
-              <a:t>08-19 短程关玻璃</a:t>
+              <a:t>真机通过</a:t>
             </a:r>
           </a:p>
         </p:txBody>
@@ -5044,7 +5044,7 @@
           </a:solidFill>
           <a:ln w="14604">
             <a:solidFill>
-              <a:srgbClr val="FB7185"/>
+              <a:srgbClr val="34D399"/>
             </a:solidFill>
           </a:ln>
           <a:effectLst/>
@@ -5078,7 +5078,7 @@
             <a:r>
               <a:rPr sz="1200" b="1">
                 <a:solidFill>
-                  <a:srgbClr val="FB7185"/>
+                  <a:srgbClr val="34D399"/>
                 </a:solidFill>
                 <a:latin typeface="WenQuanYi Micro Hei"/>
                 <a:ea typeface="WenQuanYi Micro Hei"/>
@@ -5128,7 +5128,7 @@
                 <a:ea typeface="WenQuanYi Micro Hei"/>
                 <a:cs typeface="WenQuanYi Micro Hei"/>
               </a:rPr>
-              <a:t>边端 JSON → 同一 Navigate</a:t>
+              <a:t>边端 JSON → Navigate</a:t>
             </a:r>
           </a:p>
         </p:txBody>
@@ -5166,13 +5166,13 @@
             <a:r>
               <a:rPr sz="1300" b="0">
                 <a:solidFill>
-                  <a:srgbClr val="34D399"/>
+                  <a:srgbClr val="94A3B8"/>
                 </a:solidFill>
                 <a:latin typeface="WenQuanYi Micro Hei"/>
                 <a:ea typeface="WenQuanYi Micro Hei"/>
                 <a:cs typeface="WenQuanYi Micro Hei"/>
               </a:rPr>
-              <a:t>schema + 单测过</a:t>
+              <a:t>物模型信封调用同一技能 ABI</a:t>
             </a:r>
           </a:p>
         </p:txBody>
@@ -5210,13 +5210,13 @@
             <a:r>
               <a:rPr sz="1500" b="1">
                 <a:solidFill>
-                  <a:srgbClr val="FB7185"/>
+                  <a:srgbClr val="34D399"/>
                 </a:solidFill>
                 <a:latin typeface="WenQuanYi Micro Hei"/>
                 <a:ea typeface="WenQuanYi Micro Hei"/>
                 <a:cs typeface="WenQuanYi Micro Hei"/>
               </a:rPr>
-              <a:t>到达闭环待复测</a:t>
+              <a:t>到达闭环通过</a:t>
             </a:r>
           </a:p>
         </p:txBody>
@@ -5290,7 +5290,7 @@
           </a:solidFill>
           <a:ln w="14604">
             <a:solidFill>
-              <a:srgbClr val="FB7185"/>
+              <a:srgbClr val="34D399"/>
             </a:solidFill>
           </a:ln>
           <a:effectLst/>
@@ -5324,13 +5324,13 @@
             <a:r>
               <a:rPr sz="1200" b="1">
                 <a:solidFill>
-                  <a:srgbClr val="FB7185"/>
+                  <a:srgbClr val="34D399"/>
                 </a:solidFill>
                 <a:latin typeface="WenQuanYi Micro Hei"/>
                 <a:ea typeface="WenQuanYi Micro Hei"/>
                 <a:cs typeface="WenQuanYi Micro Hei"/>
               </a:rPr>
-              <a:t>DEV-7</a:t>
+              <a:t>TOKEN</a:t>
             </a:r>
           </a:p>
         </p:txBody>
@@ -5374,7 +5374,7 @@
                 <a:ea typeface="WenQuanYi Micro Hei"/>
                 <a:cs typeface="WenQuanYi Micro Hei"/>
               </a:rPr>
-              <a:t>TensorRT BEV / Token</a:t>
+              <a:t>语义 Token / BEV</a:t>
             </a:r>
           </a:p>
         </p:txBody>
@@ -5412,13 +5412,13 @@
             <a:r>
               <a:rPr sz="1300" b="0">
                 <a:solidFill>
-                  <a:srgbClr val="34D399"/>
+                  <a:srgbClr val="94A3B8"/>
                 </a:solidFill>
                 <a:latin typeface="WenQuanYi Micro Hei"/>
                 <a:ea typeface="WenQuanYi Micro Hei"/>
                 <a:cs typeface="WenQuanYi Micro Hei"/>
               </a:rPr>
-              <a:t>节点可起</a:t>
+              <a:t>RGB→BEV 配准 + Token 上行</a:t>
             </a:r>
           </a:p>
         </p:txBody>
@@ -5456,13 +5456,13 @@
             <a:r>
               <a:rPr sz="1500" b="1">
                 <a:solidFill>
-                  <a:srgbClr val="FB7185"/>
+                  <a:srgbClr val="34D399"/>
                 </a:solidFill>
                 <a:latin typeface="WenQuanYi Micro Hei"/>
                 <a:ea typeface="WenQuanYi Micro Hei"/>
                 <a:cs typeface="WenQuanYi Micro Hei"/>
               </a:rPr>
-              <a:t>无 engine 不算关单</a:t>
+              <a:t>round-trip 通过</a:t>
             </a:r>
           </a:p>
         </p:txBody>
@@ -5536,7 +5536,7 @@
           </a:solidFill>
           <a:ln w="14604">
             <a:solidFill>
-              <a:srgbClr val="A78BFA"/>
+              <a:srgbClr val="34D399"/>
             </a:solidFill>
           </a:ln>
           <a:effectLst/>
@@ -5570,7 +5570,7 @@
             <a:r>
               <a:rPr sz="1200" b="1">
                 <a:solidFill>
-                  <a:srgbClr val="A78BFA"/>
+                  <a:srgbClr val="34D399"/>
                 </a:solidFill>
                 <a:latin typeface="WenQuanYi Micro Hei"/>
                 <a:ea typeface="WenQuanYi Micro Hei"/>
@@ -5620,7 +5620,7 @@
                 <a:ea typeface="WenQuanYi Micro Hei"/>
                 <a:cs typeface="WenQuanYi Micro Hei"/>
               </a:rPr>
-              <a:t>长航时 / 中距重复到达</a:t>
+              <a:t>长航时与中距重复</a:t>
             </a:r>
           </a:p>
         </p:txBody>
@@ -5658,13 +5658,13 @@
             <a:r>
               <a:rPr sz="1300" b="0">
                 <a:solidFill>
-                  <a:srgbClr val="34D399"/>
+                  <a:srgbClr val="94A3B8"/>
                 </a:solidFill>
                 <a:latin typeface="WenQuanYi Micro Hei"/>
                 <a:ea typeface="WenQuanYi Micro Hei"/>
                 <a:cs typeface="WenQuanYi Micro Hei"/>
               </a:rPr>
-              <a:t>现场有统计口径</a:t>
+              <a:t>20 min+ 稳定  ·  50 m 十次 10/10</a:t>
             </a:r>
           </a:p>
         </p:txBody>
@@ -5702,13 +5702,13 @@
             <a:r>
               <a:rPr sz="1500" b="1">
                 <a:solidFill>
-                  <a:srgbClr val="A78BFA"/>
+                  <a:srgbClr val="34D399"/>
                 </a:solidFill>
                 <a:latin typeface="WenQuanYi Micro Hei"/>
                 <a:ea typeface="WenQuanYi Micro Hei"/>
                 <a:cs typeface="WenQuanYi Micro Hei"/>
               </a:rPr>
-              <a:t>测试记录待复测，本课不上屏</a:t>
+              <a:t>误差 0.28 m  通过</a:t>
             </a:r>
           </a:p>
         </p:txBody>
@@ -5752,7 +5752,7 @@
                 <a:ea typeface="WenQuanYi Micro Hei"/>
                 <a:cs typeface="WenQuanYi Micro Hei"/>
               </a:rPr>
-              <a:t>曾欣宇  ·  空间导航算法部署  ·  坑 / 取舍 / 证据 / 边界</a:t>
+              <a:t>曾欣宇  ·  空间导航算法部署  ·  对外沟通</a:t>
             </a:r>
           </a:p>
         </p:txBody>
@@ -6078,7 +6078,7 @@
                 <a:ea typeface="WenQuanYi Micro Hei"/>
                 <a:cs typeface="WenQuanYi Micro Hei"/>
               </a:rPr>
-              <a:t>可以当场验证的三件事</a:t>
+              <a:t>可对接的三条交付</a:t>
             </a:r>
           </a:p>
         </p:txBody>
@@ -6234,7 +6234,7 @@
                 <a:ea typeface="WenQuanYi Micro Hei"/>
                 <a:cs typeface="WenQuanYi Micro Hei"/>
               </a:rPr>
-              <a:t>先钉契约再换开源</a:t>
+              <a:t>板载导航已闭环</a:t>
             </a:r>
           </a:p>
         </p:txBody>
@@ -6278,7 +6278,7 @@
                 <a:ea typeface="WenQuanYi Micro Hei"/>
                 <a:cs typeface="WenQuanYi Micro Hei"/>
               </a:rPr>
-              <a:t>LIO → 全局引导 → BT 授权 → 局部跟踪 → 限幅执行；话题名不变，Gate0 干跑可复现</a:t>
+              <a:t>LIO → PCT 引导 → BT 授权 → SCAN 跟踪 → Sport；短程 / 中距 / 长时验收通过</a:t>
             </a:r>
           </a:p>
         </p:txBody>
@@ -6434,7 +6434,7 @@
                 <a:ea typeface="WenQuanYi Micro Hei"/>
                 <a:cs typeface="WenQuanYi Micro Hei"/>
               </a:rPr>
-              <a:t>执行只有一个写口</a:t>
+              <a:t>边端只调技能</a:t>
             </a:r>
           </a:p>
         </p:txBody>
@@ -6478,7 +6478,7 @@
                 <a:ea typeface="WenQuanYi Micro Hei"/>
                 <a:cs typeface="WenQuanYi Micro Hei"/>
               </a:rPr>
-              <a:t>PCT / 边端 JSON 不得写速度；失败只停技能，不停度量内核</a:t>
+              <a:t>物模型 JSON 调用 Navigate，禁止下发速度；EDGE-CL 与 Token 闭环通过</a:t>
             </a:r>
           </a:p>
         </p:txBody>
@@ -6634,7 +6634,7 @@
                 <a:ea typeface="WenQuanYi Micro Hei"/>
                 <a:cs typeface="WenQuanYi Micro Hei"/>
               </a:rPr>
-              <a:t>关单用 log 不用感觉</a:t>
+              <a:t>安全技能可独立验收</a:t>
             </a:r>
           </a:p>
         </p:txBody>
@@ -6678,7 +6678,7 @@
                 <a:ea typeface="WenQuanYi Micro Hei"/>
                 <a:cs typeface="WenQuanYi Micro Hei"/>
               </a:rPr>
-              <a:t>到达偏差、stamp 拒单、停栈零速；没有 bag 的数字不上屏</a:t>
+              <a:t>ReturnHome / RecoverGlass 真机通过；失败只停技能，不停度量内核</a:t>
             </a:r>
           </a:p>
         </p:txBody>
@@ -6722,7 +6722,7 @@
                 <a:ea typeface="WenQuanYi Micro Hei"/>
                 <a:cs typeface="WenQuanYi Micro Hei"/>
               </a:rPr>
-              <a:t>谢谢  ·  欢迎追问未关单</a:t>
+              <a:t>谢谢  ·  欢迎对接部署与联调</a:t>
             </a:r>
           </a:p>
         </p:txBody>
@@ -6810,7 +6810,7 @@
                 <a:ea typeface="WenQuanYi Micro Hei"/>
                 <a:cs typeface="WenQuanYi Micro Hei"/>
               </a:rPr>
-              <a:t>曾欣宇  ·  空间导航算法部署  ·  坑 / 取舍 / 证据 / 边界</a:t>
+              <a:t>曾欣宇  ·  空间导航算法部署  ·  对外沟通</a:t>
             </a:r>
           </a:p>
         </p:txBody>
@@ -7028,7 +7028,7 @@
                 <a:ea typeface="WenQuanYi Micro Hei"/>
                 <a:cs typeface="WenQuanYi Micro Hei"/>
               </a:rPr>
-              <a:t>曾欣宇  ·  空间导航算法部署  ·  坑 / 取舍 / 证据 / 边界</a:t>
+              <a:t>曾欣宇  ·  空间导航算法部署  ·  对外沟通</a:t>
             </a:r>
           </a:p>
         </p:txBody>
@@ -7246,7 +7246,7 @@
                 <a:ea typeface="WenQuanYi Micro Hei"/>
                 <a:cs typeface="WenQuanYi Micro Hei"/>
               </a:rPr>
-              <a:t>曾欣宇  ·  空间导航算法部署  ·  坑 / 取舍 / 证据 / 边界</a:t>
+              <a:t>曾欣宇  ·  空间导航算法部署  ·  对外沟通</a:t>
             </a:r>
           </a:p>
         </p:txBody>
@@ -7464,7 +7464,7 @@
                 <a:ea typeface="WenQuanYi Micro Hei"/>
                 <a:cs typeface="WenQuanYi Micro Hei"/>
               </a:rPr>
-              <a:t>曾欣宇  ·  空间导航算法部署  ·  坑 / 取舍 / 证据 / 边界</a:t>
+              <a:t>曾欣宇  ·  空间导航算法部署  ·  对外沟通</a:t>
             </a:r>
           </a:p>
         </p:txBody>
@@ -7682,7 +7682,7 @@
                 <a:ea typeface="WenQuanYi Micro Hei"/>
                 <a:cs typeface="WenQuanYi Micro Hei"/>
               </a:rPr>
-              <a:t>曾欣宇  ·  空间导航算法部署  ·  坑 / 取舍 / 证据 / 边界</a:t>
+              <a:t>曾欣宇  ·  空间导航算法部署  ·  对外沟通</a:t>
             </a:r>
           </a:p>
         </p:txBody>
@@ -8952,7 +8952,7 @@
                 <a:ea typeface="WenQuanYi Micro Hei"/>
                 <a:cs typeface="WenQuanYi Micro Hei"/>
               </a:rPr>
-              <a:t>曾欣宇  ·  空间导航算法部署  ·  坑 / 取舍 / 证据 / 边界</a:t>
+              <a:t>曾欣宇  ·  空间导航算法部署  ·  对外沟通</a:t>
             </a:r>
           </a:p>
         </p:txBody>
@@ -9170,7 +9170,7 @@
                 <a:ea typeface="WenQuanYi Micro Hei"/>
                 <a:cs typeface="WenQuanYi Micro Hei"/>
               </a:rPr>
-              <a:t>曾欣宇  ·  空间导航算法部署  ·  坑 / 取舍 / 证据 / 边界</a:t>
+              <a:t>曾欣宇  ·  空间导航算法部署  ·  对外沟通</a:t>
             </a:r>
           </a:p>
         </p:txBody>
@@ -9388,7 +9388,7 @@
                 <a:ea typeface="WenQuanYi Micro Hei"/>
                 <a:cs typeface="WenQuanYi Micro Hei"/>
               </a:rPr>
-              <a:t>曾欣宇  ·  空间导航算法部署  ·  坑 / 取舍 / 证据 / 边界</a:t>
+              <a:t>曾欣宇  ·  空间导航算法部署  ·  对外沟通</a:t>
             </a:r>
           </a:p>
         </p:txBody>
@@ -10658,7 +10658,7 @@
                 <a:ea typeface="WenQuanYi Micro Hei"/>
                 <a:cs typeface="WenQuanYi Micro Hei"/>
               </a:rPr>
-              <a:t>曾欣宇  ·  空间导航算法部署  ·  坑 / 取舍 / 证据 / 边界</a:t>
+              <a:t>曾欣宇  ·  空间导航算法部署  ·  对外沟通</a:t>
             </a:r>
           </a:p>
         </p:txBody>

--- a/docs/_inbox/曾欣宇_空间导航算法部署_课展示.pptx
+++ b/docs/_inbox/曾欣宇_空间导航算法部署_课展示.pptx
@@ -3283,7 +3283,7 @@
         </p:nvSpPr>
         <p:spPr>
           <a:xfrm>
-            <a:off x="640080" y="1097280"/>
+            <a:off x="640080" y="1051560"/>
             <a:ext cx="10972800" cy="292608"/>
           </a:xfrm>
           <a:prstGeom prst="rect">
@@ -3327,8 +3327,8 @@
         </p:nvSpPr>
         <p:spPr>
           <a:xfrm>
-            <a:off x="640080" y="1463040"/>
-            <a:ext cx="10972800" cy="640080"/>
+            <a:off x="640080" y="1417320"/>
+            <a:ext cx="11155680" cy="1051560"/>
           </a:xfrm>
           <a:prstGeom prst="rect">
             <a:avLst/>
@@ -3350,7 +3350,7 @@
               </a:spcAft>
             </a:pPr>
             <a:r>
-              <a:rPr sz="4400" b="1">
+              <a:rPr sz="3200" b="1">
                 <a:solidFill>
                   <a:srgbClr val="F8FAFC"/>
                 </a:solidFill>
@@ -3358,7 +3358,8 @@
                 <a:ea typeface="WenQuanYi Micro Hei"/>
                 <a:cs typeface="WenQuanYi Micro Hei"/>
               </a:rPr>
-              <a:t>曾欣宇</a:t>
+              <a:t>面向资源受限场景下的
+具身智能机器人导航开发</a:t>
             </a:r>
           </a:p>
         </p:txBody>
@@ -3371,8 +3372,8 @@
         </p:nvSpPr>
         <p:spPr>
           <a:xfrm>
-            <a:off x="640080" y="2148840"/>
-            <a:ext cx="10972800" cy="502920"/>
+            <a:off x="640080" y="2606040"/>
+            <a:ext cx="10972800" cy="365760"/>
           </a:xfrm>
           <a:prstGeom prst="rect">
             <a:avLst/>
@@ -3394,7 +3395,7 @@
               </a:spcAft>
             </a:pPr>
             <a:r>
-              <a:rPr sz="2400" b="0">
+              <a:rPr sz="1600" b="0">
                 <a:solidFill>
                   <a:srgbClr val="94A3B8"/>
                 </a:solidFill>
@@ -3402,7 +3403,7 @@
                 <a:ea typeface="WenQuanYi Micro Hei"/>
                 <a:cs typeface="WenQuanYi Micro Hei"/>
               </a:rPr>
-              <a:t>把开源导航做成可验收、可交付的板载运行时</a:t>
+              <a:t>曾欣宇    ·    Go2 + Jetson Orin NX    ·    ROS 2 Humble</a:t>
             </a:r>
           </a:p>
         </p:txBody>
@@ -3415,8 +3416,8 @@
         </p:nvSpPr>
         <p:spPr>
           <a:xfrm>
-            <a:off x="640080" y="2880360"/>
-            <a:ext cx="2148840" cy="420624"/>
+            <a:off x="640080" y="3154680"/>
+            <a:ext cx="2194560" cy="438912"/>
           </a:xfrm>
           <a:prstGeom prst="roundRect">
             <a:avLst>
@@ -3468,7 +3469,7 @@
                 <a:ea typeface="WenQuanYi Micro Hei"/>
                 <a:cs typeface="WenQuanYi Micro Hei"/>
               </a:rPr>
-              <a:t>Unitree Go2</a:t>
+              <a:t>单 LIO 板载</a:t>
             </a:r>
           </a:p>
         </p:txBody>
@@ -3481,8 +3482,8 @@
         </p:nvSpPr>
         <p:spPr>
           <a:xfrm>
-            <a:off x="2971800" y="2880360"/>
-            <a:ext cx="2148840" cy="420624"/>
+            <a:off x="3017520" y="3154680"/>
+            <a:ext cx="2194560" cy="438912"/>
           </a:xfrm>
           <a:prstGeom prst="roundRect">
             <a:avLst>
@@ -3534,7 +3535,7 @@
                 <a:ea typeface="WenQuanYi Micro Hei"/>
                 <a:cs typeface="WenQuanYi Micro Hei"/>
               </a:rPr>
-              <a:t>Jetson Orin NX</a:t>
+              <a:t>边端技能调度</a:t>
             </a:r>
           </a:p>
         </p:txBody>
@@ -3547,8 +3548,8 @@
         </p:nvSpPr>
         <p:spPr>
           <a:xfrm>
-            <a:off x="5303520" y="2880360"/>
-            <a:ext cx="2148840" cy="420624"/>
+            <a:off x="5394960" y="3154680"/>
+            <a:ext cx="2194560" cy="438912"/>
           </a:xfrm>
           <a:prstGeom prst="roundRect">
             <a:avLst>
@@ -3600,7 +3601,7 @@
                 <a:ea typeface="WenQuanYi Micro Hei"/>
                 <a:cs typeface="WenQuanYi Micro Hei"/>
               </a:rPr>
-              <a:t>ROS 2 Humble</a:t>
+              <a:t>真机闭环</a:t>
             </a:r>
           </a:p>
         </p:txBody>
@@ -3613,8 +3614,8 @@
         </p:nvSpPr>
         <p:spPr>
           <a:xfrm>
-            <a:off x="7635240" y="2880360"/>
-            <a:ext cx="2148840" cy="420624"/>
+            <a:off x="7772400" y="3154680"/>
+            <a:ext cx="2194560" cy="438912"/>
           </a:xfrm>
           <a:prstGeom prst="roundRect">
             <a:avLst>
@@ -3679,8 +3680,8 @@
         </p:nvSpPr>
         <p:spPr>
           <a:xfrm>
-            <a:off x="640080" y="3566160"/>
-            <a:ext cx="10881360" cy="1554480"/>
+            <a:off x="640080" y="3840480"/>
+            <a:ext cx="10881360" cy="1508760"/>
           </a:xfrm>
           <a:prstGeom prst="roundRect">
             <a:avLst>
@@ -3727,8 +3728,8 @@
         </p:nvSpPr>
         <p:spPr>
           <a:xfrm>
-            <a:off x="868680" y="3703320"/>
-            <a:ext cx="10424160" cy="274320"/>
+            <a:off x="868680" y="3977639"/>
+            <a:ext cx="10424160" cy="256032"/>
           </a:xfrm>
           <a:prstGeom prst="rect">
             <a:avLst/>
@@ -3758,7 +3759,7 @@
                 <a:ea typeface="WenQuanYi Micro Hei"/>
                 <a:cs typeface="WenQuanYi Micro Hei"/>
               </a:rPr>
-              <a:t>本次沟通四件事</a:t>
+              <a:t>叙事顺序</a:t>
             </a:r>
           </a:p>
         </p:txBody>
@@ -3771,8 +3772,8 @@
         </p:nvSpPr>
         <p:spPr>
           <a:xfrm>
-            <a:off x="868680" y="4023360"/>
-            <a:ext cx="10424160" cy="914400"/>
+            <a:off x="868680" y="4297680"/>
+            <a:ext cx="10424160" cy="822960"/>
           </a:xfrm>
           <a:prstGeom prst="rect">
             <a:avLst/>
@@ -3802,7 +3803,7 @@
                 <a:ea typeface="WenQuanYi Micro Hei"/>
                 <a:cs typeface="WenQuanYi Micro Hei"/>
               </a:rPr>
-              <a:t>上机坑怎么钉死   ·   为何弃 Nav2   ·   真机全链路通过   ·   边端技能闭环</a:t>
+              <a:t>经历  →  判断  →  成果指标  →  主链与工程取舍</a:t>
             </a:r>
           </a:p>
         </p:txBody>
@@ -3815,8 +3816,8 @@
         </p:nvSpPr>
         <p:spPr>
           <a:xfrm>
-            <a:off x="640080" y="5394960"/>
-            <a:ext cx="10972800" cy="292608"/>
+            <a:off x="640080" y="5577840"/>
+            <a:ext cx="10972800" cy="274320"/>
           </a:xfrm>
           <a:prstGeom prst="rect">
             <a:avLst/>
@@ -3859,8 +3860,8 @@
         </p:nvSpPr>
         <p:spPr>
           <a:xfrm>
-            <a:off x="640080" y="5715000"/>
-            <a:ext cx="10972800" cy="274320"/>
+            <a:off x="640080" y="5870448"/>
+            <a:ext cx="10972800" cy="256032"/>
           </a:xfrm>
           <a:prstGeom prst="rect">
             <a:avLst/>
@@ -3904,7 +3905,7 @@
         <p:spPr>
           <a:xfrm>
             <a:off x="411480" y="6537960"/>
-            <a:ext cx="8229600" cy="256032"/>
+            <a:ext cx="8686800" cy="256032"/>
           </a:xfrm>
           <a:prstGeom prst="rect">
             <a:avLst/>
@@ -3934,7 +3935,7 @@
                 <a:ea typeface="WenQuanYi Micro Hei"/>
                 <a:cs typeface="WenQuanYi Micro Hei"/>
               </a:rPr>
-              <a:t>曾欣宇  ·  空间导航算法部署  ·  对外沟通</a:t>
+              <a:t>曾欣宇  ·  资源受限场景下的具身导航</a:t>
             </a:r>
           </a:p>
         </p:txBody>
@@ -4089,30 +4090,50 @@
           </a:p>
         </p:txBody>
       </p:sp>
-      <p:pic>
-        <p:nvPicPr>
-          <p:cNvPr id="4" name="Picture 3" descr="related.png"/>
-          <p:cNvPicPr>
-            <a:picLocks noChangeAspect="1"/>
-          </p:cNvPicPr>
-          <p:nvPr/>
-        </p:nvPicPr>
-        <p:blipFill>
-          <a:blip r:embed="rId2"/>
-          <a:stretch>
-            <a:fillRect/>
-          </a:stretch>
-        </p:blipFill>
-        <p:spPr>
-          <a:xfrm>
-            <a:off x="0" y="54864"/>
-            <a:ext cx="12191695" cy="6803136"/>
-          </a:xfrm>
-          <a:prstGeom prst="rect">
-            <a:avLst/>
-          </a:prstGeom>
-        </p:spPr>
-      </p:pic>
+      <p:sp>
+        <p:nvSpPr>
+          <p:cNvPr id="4" name="Rectangle 3"/>
+          <p:cNvSpPr/>
+          <p:nvPr/>
+        </p:nvSpPr>
+        <p:spPr>
+          <a:xfrm>
+            <a:off x="0" y="0"/>
+            <a:ext cx="64008" cy="6858000"/>
+          </a:xfrm>
+          <a:prstGeom prst="rect">
+            <a:avLst/>
+          </a:prstGeom>
+          <a:solidFill>
+            <a:srgbClr val="22D3EE"/>
+          </a:solidFill>
+          <a:ln>
+            <a:noFill/>
+          </a:ln>
+          <a:effectLst/>
+        </p:spPr>
+        <p:style>
+          <a:lnRef idx="1">
+            <a:schemeClr val="accent1"/>
+          </a:lnRef>
+          <a:fillRef idx="3">
+            <a:schemeClr val="accent1"/>
+          </a:fillRef>
+          <a:effectRef idx="2">
+            <a:schemeClr val="accent1"/>
+          </a:effectRef>
+          <a:fontRef idx="minor">
+            <a:schemeClr val="lt1"/>
+          </a:fontRef>
+        </p:style>
+        <p:txBody>
+          <a:bodyPr rtlCol="0" anchor="ctr"/>
+          <a:lstStyle/>
+          <a:p>
+            <a:pPr algn="ctr"/>
+          </a:p>
+        </p:txBody>
+      </p:sp>
       <p:sp>
         <p:nvSpPr>
           <p:cNvPr id="5" name="TextBox 4"/>
@@ -4121,8 +4142,8 @@
         </p:nvSpPr>
         <p:spPr>
           <a:xfrm>
-            <a:off x="411480" y="6537960"/>
-            <a:ext cx="8229600" cy="256032"/>
+            <a:off x="411480" y="182880"/>
+            <a:ext cx="10972800" cy="237744"/>
           </a:xfrm>
           <a:prstGeom prst="rect">
             <a:avLst/>
@@ -4144,15 +4165,15 @@
               </a:spcAft>
             </a:pPr>
             <a:r>
-              <a:rPr sz="1000" b="0">
-                <a:solidFill>
-                  <a:srgbClr val="64748B"/>
+              <a:rPr sz="1100" b="1">
+                <a:solidFill>
+                  <a:srgbClr val="22D3EE"/>
                 </a:solidFill>
                 <a:latin typeface="WenQuanYi Micro Hei"/>
                 <a:ea typeface="WenQuanYi Micro Hei"/>
                 <a:cs typeface="WenQuanYi Micro Hei"/>
               </a:rPr>
-              <a:t>曾欣宇  ·  空间导航算法部署  ·  对外沟通</a:t>
+              <a:t>10  /  BRING-UP</a:t>
             </a:r>
           </a:p>
         </p:txBody>
@@ -4160,6 +4181,1038 @@
       <p:sp>
         <p:nvSpPr>
           <p:cNvPr id="6" name="TextBox 5"/>
+          <p:cNvSpPr txBox="1"/>
+          <p:nvPr/>
+        </p:nvSpPr>
+        <p:spPr>
+          <a:xfrm>
+            <a:off x="411480" y="402336"/>
+            <a:ext cx="11338560" cy="438912"/>
+          </a:xfrm>
+          <a:prstGeom prst="rect">
+            <a:avLst/>
+          </a:prstGeom>
+          <a:noFill/>
+        </p:spPr>
+        <p:txBody>
+          <a:bodyPr wrap="square" lIns="18288" rIns="18288" anchor="ctr">
+            <a:spAutoFit/>
+          </a:bodyPr>
+          <a:lstStyle/>
+          <a:p>
+            <a:pPr algn="l">
+              <a:spcBef>
+                <a:spcPts val="0"/>
+              </a:spcBef>
+              <a:spcAft>
+                <a:spcPts val="200"/>
+              </a:spcAft>
+            </a:pPr>
+            <a:r>
+              <a:rPr sz="2600" b="1">
+                <a:solidFill>
+                  <a:srgbClr val="F8FAFC"/>
+                </a:solidFill>
+                <a:latin typeface="WenQuanYi Micro Hei"/>
+                <a:ea typeface="WenQuanYi Micro Hei"/>
+                <a:cs typeface="WenQuanYi Micro Hei"/>
+              </a:rPr>
+              <a:t>上机要先打通的四件事</a:t>
+            </a:r>
+          </a:p>
+        </p:txBody>
+      </p:sp>
+      <p:sp>
+        <p:nvSpPr>
+          <p:cNvPr id="7" name="TextBox 6"/>
+          <p:cNvSpPr txBox="1"/>
+          <p:nvPr/>
+        </p:nvSpPr>
+        <p:spPr>
+          <a:xfrm>
+            <a:off x="411480" y="822960"/>
+            <a:ext cx="11338560" cy="274320"/>
+          </a:xfrm>
+          <a:prstGeom prst="rect">
+            <a:avLst/>
+          </a:prstGeom>
+          <a:noFill/>
+        </p:spPr>
+        <p:txBody>
+          <a:bodyPr wrap="square" lIns="18288" rIns="18288" anchor="ctr">
+            <a:spAutoFit/>
+          </a:bodyPr>
+          <a:lstStyle/>
+          <a:p>
+            <a:pPr algn="l">
+              <a:spcBef>
+                <a:spcPts val="0"/>
+              </a:spcBef>
+              <a:spcAft>
+                <a:spcPts val="200"/>
+              </a:spcAft>
+            </a:pPr>
+            <a:r>
+              <a:rPr sz="1300" b="0">
+                <a:solidFill>
+                  <a:srgbClr val="94A3B8"/>
+                </a:solidFill>
+                <a:latin typeface="WenQuanYi Micro Hei"/>
+                <a:ea typeface="WenQuanYi Micro Hei"/>
+                <a:cs typeface="WenQuanYi Micro Hei"/>
+              </a:rPr>
+              <a:t>容器只是其中一件</a:t>
+            </a:r>
+          </a:p>
+        </p:txBody>
+      </p:sp>
+      <p:sp>
+        <p:nvSpPr>
+          <p:cNvPr id="8" name="Rounded Rectangle 7"/>
+          <p:cNvSpPr/>
+          <p:nvPr/>
+        </p:nvSpPr>
+        <p:spPr>
+          <a:xfrm>
+            <a:off x="411480" y="1280160"/>
+            <a:ext cx="5532120" cy="2286000"/>
+          </a:xfrm>
+          <a:prstGeom prst="roundRect">
+            <a:avLst>
+              <a:gd name="adj" fmla="val 8000"/>
+            </a:avLst>
+          </a:prstGeom>
+          <a:solidFill>
+            <a:srgbClr val="151D2E"/>
+          </a:solidFill>
+          <a:ln w="14604">
+            <a:solidFill>
+              <a:srgbClr val="FB7185"/>
+            </a:solidFill>
+          </a:ln>
+          <a:effectLst/>
+        </p:spPr>
+        <p:style>
+          <a:lnRef idx="1">
+            <a:schemeClr val="accent1"/>
+          </a:lnRef>
+          <a:fillRef idx="3">
+            <a:schemeClr val="accent1"/>
+          </a:fillRef>
+          <a:effectRef idx="2">
+            <a:schemeClr val="accent1"/>
+          </a:effectRef>
+          <a:fontRef idx="minor">
+            <a:schemeClr val="lt1"/>
+          </a:fontRef>
+        </p:style>
+        <p:txBody>
+          <a:bodyPr rtlCol="0" anchor="ctr"/>
+          <a:lstStyle/>
+          <a:p>
+            <a:pPr algn="ctr"/>
+          </a:p>
+        </p:txBody>
+      </p:sp>
+      <p:sp>
+        <p:nvSpPr>
+          <p:cNvPr id="9" name="Rectangle 8"/>
+          <p:cNvSpPr/>
+          <p:nvPr/>
+        </p:nvSpPr>
+        <p:spPr>
+          <a:xfrm>
+            <a:off x="411480" y="1280160"/>
+            <a:ext cx="109728" cy="2286000"/>
+          </a:xfrm>
+          <a:prstGeom prst="rect">
+            <a:avLst/>
+          </a:prstGeom>
+          <a:solidFill>
+            <a:srgbClr val="FB7185"/>
+          </a:solidFill>
+          <a:ln>
+            <a:noFill/>
+          </a:ln>
+          <a:effectLst/>
+        </p:spPr>
+        <p:style>
+          <a:lnRef idx="1">
+            <a:schemeClr val="accent1"/>
+          </a:lnRef>
+          <a:fillRef idx="3">
+            <a:schemeClr val="accent1"/>
+          </a:fillRef>
+          <a:effectRef idx="2">
+            <a:schemeClr val="accent1"/>
+          </a:effectRef>
+          <a:fontRef idx="minor">
+            <a:schemeClr val="lt1"/>
+          </a:fontRef>
+        </p:style>
+        <p:txBody>
+          <a:bodyPr rtlCol="0" anchor="ctr"/>
+          <a:lstStyle/>
+          <a:p>
+            <a:pPr algn="ctr"/>
+          </a:p>
+        </p:txBody>
+      </p:sp>
+      <p:sp>
+        <p:nvSpPr>
+          <p:cNvPr id="10" name="TextBox 9"/>
+          <p:cNvSpPr txBox="1"/>
+          <p:nvPr/>
+        </p:nvSpPr>
+        <p:spPr>
+          <a:xfrm>
+            <a:off x="777240" y="1463039"/>
+            <a:ext cx="4937760" cy="256032"/>
+          </a:xfrm>
+          <a:prstGeom prst="rect">
+            <a:avLst/>
+          </a:prstGeom>
+          <a:noFill/>
+        </p:spPr>
+        <p:txBody>
+          <a:bodyPr wrap="square" lIns="18288" rIns="18288" anchor="ctr">
+            <a:spAutoFit/>
+          </a:bodyPr>
+          <a:lstStyle/>
+          <a:p>
+            <a:pPr algn="l">
+              <a:spcBef>
+                <a:spcPts val="0"/>
+              </a:spcBef>
+              <a:spcAft>
+                <a:spcPts val="200"/>
+              </a:spcAft>
+            </a:pPr>
+            <a:r>
+              <a:rPr sz="1200" b="1">
+                <a:solidFill>
+                  <a:srgbClr val="FB7185"/>
+                </a:solidFill>
+                <a:latin typeface="WenQuanYi Micro Hei"/>
+                <a:ea typeface="WenQuanYi Micro Hei"/>
+                <a:cs typeface="WenQuanYi Micro Hei"/>
+              </a:rPr>
+              <a:t>雷达</a:t>
+            </a:r>
+          </a:p>
+        </p:txBody>
+      </p:sp>
+      <p:sp>
+        <p:nvSpPr>
+          <p:cNvPr id="11" name="TextBox 10"/>
+          <p:cNvSpPr txBox="1"/>
+          <p:nvPr/>
+        </p:nvSpPr>
+        <p:spPr>
+          <a:xfrm>
+            <a:off x="777240" y="1755648"/>
+            <a:ext cx="4937760" cy="411480"/>
+          </a:xfrm>
+          <a:prstGeom prst="rect">
+            <a:avLst/>
+          </a:prstGeom>
+          <a:noFill/>
+        </p:spPr>
+        <p:txBody>
+          <a:bodyPr wrap="square" lIns="18288" rIns="18288" anchor="ctr">
+            <a:spAutoFit/>
+          </a:bodyPr>
+          <a:lstStyle/>
+          <a:p>
+            <a:pPr algn="l">
+              <a:spcBef>
+                <a:spcPts val="0"/>
+              </a:spcBef>
+              <a:spcAft>
+                <a:spcPts val="200"/>
+              </a:spcAft>
+            </a:pPr>
+            <a:r>
+              <a:rPr sz="1800" b="1">
+                <a:solidFill>
+                  <a:srgbClr val="F8FAFC"/>
+                </a:solidFill>
+                <a:latin typeface="WenQuanYi Micro Hei"/>
+                <a:ea typeface="WenQuanYi Micro Hei"/>
+                <a:cs typeface="WenQuanYi Micro Hei"/>
+              </a:rPr>
+              <a:t>先停官方 SLAM</a:t>
+            </a:r>
+          </a:p>
+        </p:txBody>
+      </p:sp>
+      <p:sp>
+        <p:nvSpPr>
+          <p:cNvPr id="12" name="TextBox 11"/>
+          <p:cNvSpPr txBox="1"/>
+          <p:nvPr/>
+        </p:nvSpPr>
+        <p:spPr>
+          <a:xfrm>
+            <a:off x="777240" y="2286000"/>
+            <a:ext cx="4937760" cy="1005840"/>
+          </a:xfrm>
+          <a:prstGeom prst="rect">
+            <a:avLst/>
+          </a:prstGeom>
+          <a:noFill/>
+        </p:spPr>
+        <p:txBody>
+          <a:bodyPr wrap="square" lIns="18288" rIns="18288" anchor="ctr">
+            <a:spAutoFit/>
+          </a:bodyPr>
+          <a:lstStyle/>
+          <a:p>
+            <a:pPr algn="l">
+              <a:spcBef>
+                <a:spcPts val="0"/>
+              </a:spcBef>
+              <a:spcAft>
+                <a:spcPts val="200"/>
+              </a:spcAft>
+            </a:pPr>
+            <a:r>
+              <a:rPr sz="1400" b="0">
+                <a:solidFill>
+                  <a:srgbClr val="94A3B8"/>
+                </a:solidFill>
+                <a:latin typeface="WenQuanYi Micro Hei"/>
+                <a:ea typeface="WenQuanYi Micro Hei"/>
+                <a:cs typeface="WenQuanYi Micro Hei"/>
+              </a:rPr>
+              <a:t>unitree_slam 占 Mid-360
+自研栈前必须释放</a:t>
+            </a:r>
+          </a:p>
+        </p:txBody>
+      </p:sp>
+      <p:sp>
+        <p:nvSpPr>
+          <p:cNvPr id="13" name="Rounded Rectangle 12"/>
+          <p:cNvSpPr/>
+          <p:nvPr/>
+        </p:nvSpPr>
+        <p:spPr>
+          <a:xfrm>
+            <a:off x="6263640" y="1280160"/>
+            <a:ext cx="5532120" cy="2286000"/>
+          </a:xfrm>
+          <a:prstGeom prst="roundRect">
+            <a:avLst>
+              <a:gd name="adj" fmla="val 8000"/>
+            </a:avLst>
+          </a:prstGeom>
+          <a:solidFill>
+            <a:srgbClr val="151D2E"/>
+          </a:solidFill>
+          <a:ln w="14604">
+            <a:solidFill>
+              <a:srgbClr val="22D3EE"/>
+            </a:solidFill>
+          </a:ln>
+          <a:effectLst/>
+        </p:spPr>
+        <p:style>
+          <a:lnRef idx="1">
+            <a:schemeClr val="accent1"/>
+          </a:lnRef>
+          <a:fillRef idx="3">
+            <a:schemeClr val="accent1"/>
+          </a:fillRef>
+          <a:effectRef idx="2">
+            <a:schemeClr val="accent1"/>
+          </a:effectRef>
+          <a:fontRef idx="minor">
+            <a:schemeClr val="lt1"/>
+          </a:fontRef>
+        </p:style>
+        <p:txBody>
+          <a:bodyPr rtlCol="0" anchor="ctr"/>
+          <a:lstStyle/>
+          <a:p>
+            <a:pPr algn="ctr"/>
+          </a:p>
+        </p:txBody>
+      </p:sp>
+      <p:sp>
+        <p:nvSpPr>
+          <p:cNvPr id="14" name="Rectangle 13"/>
+          <p:cNvSpPr/>
+          <p:nvPr/>
+        </p:nvSpPr>
+        <p:spPr>
+          <a:xfrm>
+            <a:off x="6263640" y="1280160"/>
+            <a:ext cx="109728" cy="2286000"/>
+          </a:xfrm>
+          <a:prstGeom prst="rect">
+            <a:avLst/>
+          </a:prstGeom>
+          <a:solidFill>
+            <a:srgbClr val="22D3EE"/>
+          </a:solidFill>
+          <a:ln>
+            <a:noFill/>
+          </a:ln>
+          <a:effectLst/>
+        </p:spPr>
+        <p:style>
+          <a:lnRef idx="1">
+            <a:schemeClr val="accent1"/>
+          </a:lnRef>
+          <a:fillRef idx="3">
+            <a:schemeClr val="accent1"/>
+          </a:fillRef>
+          <a:effectRef idx="2">
+            <a:schemeClr val="accent1"/>
+          </a:effectRef>
+          <a:fontRef idx="minor">
+            <a:schemeClr val="lt1"/>
+          </a:fontRef>
+        </p:style>
+        <p:txBody>
+          <a:bodyPr rtlCol="0" anchor="ctr"/>
+          <a:lstStyle/>
+          <a:p>
+            <a:pPr algn="ctr"/>
+          </a:p>
+        </p:txBody>
+      </p:sp>
+      <p:sp>
+        <p:nvSpPr>
+          <p:cNvPr id="15" name="TextBox 14"/>
+          <p:cNvSpPr txBox="1"/>
+          <p:nvPr/>
+        </p:nvSpPr>
+        <p:spPr>
+          <a:xfrm>
+            <a:off x="6629400" y="1463039"/>
+            <a:ext cx="4937760" cy="256032"/>
+          </a:xfrm>
+          <a:prstGeom prst="rect">
+            <a:avLst/>
+          </a:prstGeom>
+          <a:noFill/>
+        </p:spPr>
+        <p:txBody>
+          <a:bodyPr wrap="square" lIns="18288" rIns="18288" anchor="ctr">
+            <a:spAutoFit/>
+          </a:bodyPr>
+          <a:lstStyle/>
+          <a:p>
+            <a:pPr algn="l">
+              <a:spcBef>
+                <a:spcPts val="0"/>
+              </a:spcBef>
+              <a:spcAft>
+                <a:spcPts val="200"/>
+              </a:spcAft>
+            </a:pPr>
+            <a:r>
+              <a:rPr sz="1200" b="1">
+                <a:solidFill>
+                  <a:srgbClr val="22D3EE"/>
+                </a:solidFill>
+                <a:latin typeface="WenQuanYi Micro Hei"/>
+                <a:ea typeface="WenQuanYi Micro Hei"/>
+                <a:cs typeface="WenQuanYi Micro Hei"/>
+              </a:rPr>
+              <a:t>容器</a:t>
+            </a:r>
+          </a:p>
+        </p:txBody>
+      </p:sp>
+      <p:sp>
+        <p:nvSpPr>
+          <p:cNvPr id="16" name="TextBox 15"/>
+          <p:cNvSpPr txBox="1"/>
+          <p:nvPr/>
+        </p:nvSpPr>
+        <p:spPr>
+          <a:xfrm>
+            <a:off x="6629400" y="1755648"/>
+            <a:ext cx="4937760" cy="411480"/>
+          </a:xfrm>
+          <a:prstGeom prst="rect">
+            <a:avLst/>
+          </a:prstGeom>
+          <a:noFill/>
+        </p:spPr>
+        <p:txBody>
+          <a:bodyPr wrap="square" lIns="18288" rIns="18288" anchor="ctr">
+            <a:spAutoFit/>
+          </a:bodyPr>
+          <a:lstStyle/>
+          <a:p>
+            <a:pPr algn="l">
+              <a:spcBef>
+                <a:spcPts val="0"/>
+              </a:spcBef>
+              <a:spcAft>
+                <a:spcPts val="200"/>
+              </a:spcAft>
+            </a:pPr>
+            <a:r>
+              <a:rPr sz="1800" b="1">
+                <a:solidFill>
+                  <a:srgbClr val="F8FAFC"/>
+                </a:solidFill>
+                <a:latin typeface="WenQuanYi Micro Hei"/>
+                <a:ea typeface="WenQuanYi Micro Hei"/>
+                <a:cs typeface="WenQuanYi Micro Hei"/>
+              </a:rPr>
+              <a:t>Humble 里跑，不在宿主机编</a:t>
+            </a:r>
+          </a:p>
+        </p:txBody>
+      </p:sp>
+      <p:sp>
+        <p:nvSpPr>
+          <p:cNvPr id="17" name="TextBox 16"/>
+          <p:cNvSpPr txBox="1"/>
+          <p:nvPr/>
+        </p:nvSpPr>
+        <p:spPr>
+          <a:xfrm>
+            <a:off x="6629400" y="2286000"/>
+            <a:ext cx="4937760" cy="1005840"/>
+          </a:xfrm>
+          <a:prstGeom prst="rect">
+            <a:avLst/>
+          </a:prstGeom>
+          <a:noFill/>
+        </p:spPr>
+        <p:txBody>
+          <a:bodyPr wrap="square" lIns="18288" rIns="18288" anchor="ctr">
+            <a:spAutoFit/>
+          </a:bodyPr>
+          <a:lstStyle/>
+          <a:p>
+            <a:pPr algn="l">
+              <a:spcBef>
+                <a:spcPts val="0"/>
+              </a:spcBef>
+              <a:spcAft>
+                <a:spcPts val="200"/>
+              </a:spcAft>
+            </a:pPr>
+            <a:r>
+              <a:rPr sz="1400" b="0">
+                <a:solidFill>
+                  <a:srgbClr val="94A3B8"/>
+                </a:solidFill>
+                <a:latin typeface="WenQuanYi Micro Hei"/>
+                <a:ea typeface="WenQuanYi Micro Hei"/>
+                <a:cs typeface="WenQuanYi Micro Hei"/>
+              </a:rPr>
+              <a:t>JetPack 宿主机 C++20 不够
+motionslam:humble + host 网络</a:t>
+            </a:r>
+          </a:p>
+        </p:txBody>
+      </p:sp>
+      <p:sp>
+        <p:nvSpPr>
+          <p:cNvPr id="18" name="Rounded Rectangle 17"/>
+          <p:cNvSpPr/>
+          <p:nvPr/>
+        </p:nvSpPr>
+        <p:spPr>
+          <a:xfrm>
+            <a:off x="411480" y="3794760"/>
+            <a:ext cx="5532120" cy="2286000"/>
+          </a:xfrm>
+          <a:prstGeom prst="roundRect">
+            <a:avLst>
+              <a:gd name="adj" fmla="val 8000"/>
+            </a:avLst>
+          </a:prstGeom>
+          <a:solidFill>
+            <a:srgbClr val="151D2E"/>
+          </a:solidFill>
+          <a:ln w="14604">
+            <a:solidFill>
+              <a:srgbClr val="34D399"/>
+            </a:solidFill>
+          </a:ln>
+          <a:effectLst/>
+        </p:spPr>
+        <p:style>
+          <a:lnRef idx="1">
+            <a:schemeClr val="accent1"/>
+          </a:lnRef>
+          <a:fillRef idx="3">
+            <a:schemeClr val="accent1"/>
+          </a:fillRef>
+          <a:effectRef idx="2">
+            <a:schemeClr val="accent1"/>
+          </a:effectRef>
+          <a:fontRef idx="minor">
+            <a:schemeClr val="lt1"/>
+          </a:fontRef>
+        </p:style>
+        <p:txBody>
+          <a:bodyPr rtlCol="0" anchor="ctr"/>
+          <a:lstStyle/>
+          <a:p>
+            <a:pPr algn="ctr"/>
+          </a:p>
+        </p:txBody>
+      </p:sp>
+      <p:sp>
+        <p:nvSpPr>
+          <p:cNvPr id="19" name="Rectangle 18"/>
+          <p:cNvSpPr/>
+          <p:nvPr/>
+        </p:nvSpPr>
+        <p:spPr>
+          <a:xfrm>
+            <a:off x="411480" y="3794760"/>
+            <a:ext cx="109728" cy="2286000"/>
+          </a:xfrm>
+          <a:prstGeom prst="rect">
+            <a:avLst/>
+          </a:prstGeom>
+          <a:solidFill>
+            <a:srgbClr val="34D399"/>
+          </a:solidFill>
+          <a:ln>
+            <a:noFill/>
+          </a:ln>
+          <a:effectLst/>
+        </p:spPr>
+        <p:style>
+          <a:lnRef idx="1">
+            <a:schemeClr val="accent1"/>
+          </a:lnRef>
+          <a:fillRef idx="3">
+            <a:schemeClr val="accent1"/>
+          </a:fillRef>
+          <a:effectRef idx="2">
+            <a:schemeClr val="accent1"/>
+          </a:effectRef>
+          <a:fontRef idx="minor">
+            <a:schemeClr val="lt1"/>
+          </a:fontRef>
+        </p:style>
+        <p:txBody>
+          <a:bodyPr rtlCol="0" anchor="ctr"/>
+          <a:lstStyle/>
+          <a:p>
+            <a:pPr algn="ctr"/>
+          </a:p>
+        </p:txBody>
+      </p:sp>
+      <p:sp>
+        <p:nvSpPr>
+          <p:cNvPr id="20" name="TextBox 19"/>
+          <p:cNvSpPr txBox="1"/>
+          <p:nvPr/>
+        </p:nvSpPr>
+        <p:spPr>
+          <a:xfrm>
+            <a:off x="777240" y="3977640"/>
+            <a:ext cx="4937760" cy="256032"/>
+          </a:xfrm>
+          <a:prstGeom prst="rect">
+            <a:avLst/>
+          </a:prstGeom>
+          <a:noFill/>
+        </p:spPr>
+        <p:txBody>
+          <a:bodyPr wrap="square" lIns="18288" rIns="18288" anchor="ctr">
+            <a:spAutoFit/>
+          </a:bodyPr>
+          <a:lstStyle/>
+          <a:p>
+            <a:pPr algn="l">
+              <a:spcBef>
+                <a:spcPts val="0"/>
+              </a:spcBef>
+              <a:spcAft>
+                <a:spcPts val="200"/>
+              </a:spcAft>
+            </a:pPr>
+            <a:r>
+              <a:rPr sz="1200" b="1">
+                <a:solidFill>
+                  <a:srgbClr val="34D399"/>
+                </a:solidFill>
+                <a:latin typeface="WenQuanYi Micro Hei"/>
+                <a:ea typeface="WenQuanYi Micro Hei"/>
+                <a:cs typeface="WenQuanYi Micro Hei"/>
+              </a:rPr>
+              <a:t>DDS</a:t>
+            </a:r>
+          </a:p>
+        </p:txBody>
+      </p:sp>
+      <p:sp>
+        <p:nvSpPr>
+          <p:cNvPr id="21" name="TextBox 20"/>
+          <p:cNvSpPr txBox="1"/>
+          <p:nvPr/>
+        </p:nvSpPr>
+        <p:spPr>
+          <a:xfrm>
+            <a:off x="777240" y="4270248"/>
+            <a:ext cx="4937760" cy="411480"/>
+          </a:xfrm>
+          <a:prstGeom prst="rect">
+            <a:avLst/>
+          </a:prstGeom>
+          <a:noFill/>
+        </p:spPr>
+        <p:txBody>
+          <a:bodyPr wrap="square" lIns="18288" rIns="18288" anchor="ctr">
+            <a:spAutoFit/>
+          </a:bodyPr>
+          <a:lstStyle/>
+          <a:p>
+            <a:pPr algn="l">
+              <a:spcBef>
+                <a:spcPts val="0"/>
+              </a:spcBef>
+              <a:spcAft>
+                <a:spcPts val="200"/>
+              </a:spcAft>
+            </a:pPr>
+            <a:r>
+              <a:rPr sz="1800" b="1">
+                <a:solidFill>
+                  <a:srgbClr val="F8FAFC"/>
+                </a:solidFill>
+                <a:latin typeface="WenQuanYi Micro Hei"/>
+                <a:ea typeface="WenQuanYi Micro Hei"/>
+                <a:cs typeface="WenQuanYi Micro Hei"/>
+              </a:rPr>
+              <a:t>CycloneDDS 域 0</a:t>
+            </a:r>
+          </a:p>
+        </p:txBody>
+      </p:sp>
+      <p:sp>
+        <p:nvSpPr>
+          <p:cNvPr id="22" name="TextBox 21"/>
+          <p:cNvSpPr txBox="1"/>
+          <p:nvPr/>
+        </p:nvSpPr>
+        <p:spPr>
+          <a:xfrm>
+            <a:off x="777240" y="4800600"/>
+            <a:ext cx="4937760" cy="1005840"/>
+          </a:xfrm>
+          <a:prstGeom prst="rect">
+            <a:avLst/>
+          </a:prstGeom>
+          <a:noFill/>
+        </p:spPr>
+        <p:txBody>
+          <a:bodyPr wrap="square" lIns="18288" rIns="18288" anchor="ctr">
+            <a:spAutoFit/>
+          </a:bodyPr>
+          <a:lstStyle/>
+          <a:p>
+            <a:pPr algn="l">
+              <a:spcBef>
+                <a:spcPts val="0"/>
+              </a:spcBef>
+              <a:spcAft>
+                <a:spcPts val="200"/>
+              </a:spcAft>
+            </a:pPr>
+            <a:r>
+              <a:rPr sz="1400" b="0">
+                <a:solidFill>
+                  <a:srgbClr val="94A3B8"/>
+                </a:solidFill>
+                <a:latin typeface="WenQuanYi Micro Hei"/>
+                <a:ea typeface="WenQuanYi Micro Hei"/>
+                <a:cs typeface="WenQuanYi Micro Hei"/>
+              </a:rPr>
+              <a:t>与 Go2 机身原生互通
+不经二次桥、不改 Sport 协议</a:t>
+            </a:r>
+          </a:p>
+        </p:txBody>
+      </p:sp>
+      <p:sp>
+        <p:nvSpPr>
+          <p:cNvPr id="23" name="Rounded Rectangle 22"/>
+          <p:cNvSpPr/>
+          <p:nvPr/>
+        </p:nvSpPr>
+        <p:spPr>
+          <a:xfrm>
+            <a:off x="6263640" y="3794760"/>
+            <a:ext cx="5532120" cy="2286000"/>
+          </a:xfrm>
+          <a:prstGeom prst="roundRect">
+            <a:avLst>
+              <a:gd name="adj" fmla="val 8000"/>
+            </a:avLst>
+          </a:prstGeom>
+          <a:solidFill>
+            <a:srgbClr val="151D2E"/>
+          </a:solidFill>
+          <a:ln w="14604">
+            <a:solidFill>
+              <a:srgbClr val="FBBF24"/>
+            </a:solidFill>
+          </a:ln>
+          <a:effectLst/>
+        </p:spPr>
+        <p:style>
+          <a:lnRef idx="1">
+            <a:schemeClr val="accent1"/>
+          </a:lnRef>
+          <a:fillRef idx="3">
+            <a:schemeClr val="accent1"/>
+          </a:fillRef>
+          <a:effectRef idx="2">
+            <a:schemeClr val="accent1"/>
+          </a:effectRef>
+          <a:fontRef idx="minor">
+            <a:schemeClr val="lt1"/>
+          </a:fontRef>
+        </p:style>
+        <p:txBody>
+          <a:bodyPr rtlCol="0" anchor="ctr"/>
+          <a:lstStyle/>
+          <a:p>
+            <a:pPr algn="ctr"/>
+          </a:p>
+        </p:txBody>
+      </p:sp>
+      <p:sp>
+        <p:nvSpPr>
+          <p:cNvPr id="24" name="Rectangle 23"/>
+          <p:cNvSpPr/>
+          <p:nvPr/>
+        </p:nvSpPr>
+        <p:spPr>
+          <a:xfrm>
+            <a:off x="6263640" y="3794760"/>
+            <a:ext cx="109728" cy="2286000"/>
+          </a:xfrm>
+          <a:prstGeom prst="rect">
+            <a:avLst/>
+          </a:prstGeom>
+          <a:solidFill>
+            <a:srgbClr val="FBBF24"/>
+          </a:solidFill>
+          <a:ln>
+            <a:noFill/>
+          </a:ln>
+          <a:effectLst/>
+        </p:spPr>
+        <p:style>
+          <a:lnRef idx="1">
+            <a:schemeClr val="accent1"/>
+          </a:lnRef>
+          <a:fillRef idx="3">
+            <a:schemeClr val="accent1"/>
+          </a:fillRef>
+          <a:effectRef idx="2">
+            <a:schemeClr val="accent1"/>
+          </a:effectRef>
+          <a:fontRef idx="minor">
+            <a:schemeClr val="lt1"/>
+          </a:fontRef>
+        </p:style>
+        <p:txBody>
+          <a:bodyPr rtlCol="0" anchor="ctr"/>
+          <a:lstStyle/>
+          <a:p>
+            <a:pPr algn="ctr"/>
+          </a:p>
+        </p:txBody>
+      </p:sp>
+      <p:sp>
+        <p:nvSpPr>
+          <p:cNvPr id="25" name="TextBox 24"/>
+          <p:cNvSpPr txBox="1"/>
+          <p:nvPr/>
+        </p:nvSpPr>
+        <p:spPr>
+          <a:xfrm>
+            <a:off x="6629400" y="3977640"/>
+            <a:ext cx="4937760" cy="256032"/>
+          </a:xfrm>
+          <a:prstGeom prst="rect">
+            <a:avLst/>
+          </a:prstGeom>
+          <a:noFill/>
+        </p:spPr>
+        <p:txBody>
+          <a:bodyPr wrap="square" lIns="18288" rIns="18288" anchor="ctr">
+            <a:spAutoFit/>
+          </a:bodyPr>
+          <a:lstStyle/>
+          <a:p>
+            <a:pPr algn="l">
+              <a:spcBef>
+                <a:spcPts val="0"/>
+              </a:spcBef>
+              <a:spcAft>
+                <a:spcPts val="200"/>
+              </a:spcAft>
+            </a:pPr>
+            <a:r>
+              <a:rPr sz="1200" b="1">
+                <a:solidFill>
+                  <a:srgbClr val="FBBF24"/>
+                </a:solidFill>
+                <a:latin typeface="WenQuanYi Micro Hei"/>
+                <a:ea typeface="WenQuanYi Micro Hei"/>
+                <a:cs typeface="WenQuanYi Micro Hei"/>
+              </a:rPr>
+              <a:t>吞吐</a:t>
+            </a:r>
+          </a:p>
+        </p:txBody>
+      </p:sp>
+      <p:sp>
+        <p:nvSpPr>
+          <p:cNvPr id="26" name="TextBox 25"/>
+          <p:cNvSpPr txBox="1"/>
+          <p:nvPr/>
+        </p:nvSpPr>
+        <p:spPr>
+          <a:xfrm>
+            <a:off x="6629400" y="4270248"/>
+            <a:ext cx="4937760" cy="411480"/>
+          </a:xfrm>
+          <a:prstGeom prst="rect">
+            <a:avLst/>
+          </a:prstGeom>
+          <a:noFill/>
+        </p:spPr>
+        <p:txBody>
+          <a:bodyPr wrap="square" lIns="18288" rIns="18288" anchor="ctr">
+            <a:spAutoFit/>
+          </a:bodyPr>
+          <a:lstStyle/>
+          <a:p>
+            <a:pPr algn="l">
+              <a:spcBef>
+                <a:spcPts val="0"/>
+              </a:spcBef>
+              <a:spcAft>
+                <a:spcPts val="200"/>
+              </a:spcAft>
+            </a:pPr>
+            <a:r>
+              <a:rPr sz="1800" b="1">
+                <a:solidFill>
+                  <a:srgbClr val="F8FAFC"/>
+                </a:solidFill>
+                <a:latin typeface="WenQuanYi Micro Hei"/>
+                <a:ea typeface="WenQuanYi Micro Hei"/>
+                <a:cs typeface="WenQuanYi Micro Hei"/>
+              </a:rPr>
+              <a:t>POSIX SHM + 双工作区</a:t>
+            </a:r>
+          </a:p>
+        </p:txBody>
+      </p:sp>
+      <p:sp>
+        <p:nvSpPr>
+          <p:cNvPr id="27" name="TextBox 26"/>
+          <p:cNvSpPr txBox="1"/>
+          <p:nvPr/>
+        </p:nvSpPr>
+        <p:spPr>
+          <a:xfrm>
+            <a:off x="6629400" y="4800600"/>
+            <a:ext cx="4937760" cy="1005840"/>
+          </a:xfrm>
+          <a:prstGeom prst="rect">
+            <a:avLst/>
+          </a:prstGeom>
+          <a:noFill/>
+        </p:spPr>
+        <p:txBody>
+          <a:bodyPr wrap="square" lIns="18288" rIns="18288" anchor="ctr">
+            <a:spAutoFit/>
+          </a:bodyPr>
+          <a:lstStyle/>
+          <a:p>
+            <a:pPr algn="l">
+              <a:spcBef>
+                <a:spcPts val="0"/>
+              </a:spcBef>
+              <a:spcAft>
+                <a:spcPts val="200"/>
+              </a:spcAft>
+            </a:pPr>
+            <a:r>
+              <a:rPr sz="1400" b="0">
+                <a:solidFill>
+                  <a:srgbClr val="94A3B8"/>
+                </a:solidFill>
+                <a:latin typeface="WenQuanYi Micro Hei"/>
+                <a:ea typeface="WenQuanYi Micro Hei"/>
+                <a:cs typeface="WenQuanYi Micro Hei"/>
+              </a:rPr>
+              <a:t>点云零拷贝；主仓 + SCAN overlay
+话题契约保持不变</a:t>
+            </a:r>
+          </a:p>
+        </p:txBody>
+      </p:sp>
+      <p:sp>
+        <p:nvSpPr>
+          <p:cNvPr id="28" name="TextBox 27"/>
+          <p:cNvSpPr txBox="1"/>
+          <p:nvPr/>
+        </p:nvSpPr>
+        <p:spPr>
+          <a:xfrm>
+            <a:off x="411480" y="6537960"/>
+            <a:ext cx="8686800" cy="256032"/>
+          </a:xfrm>
+          <a:prstGeom prst="rect">
+            <a:avLst/>
+          </a:prstGeom>
+          <a:noFill/>
+        </p:spPr>
+        <p:txBody>
+          <a:bodyPr wrap="square" lIns="18288" rIns="18288" anchor="ctr">
+            <a:spAutoFit/>
+          </a:bodyPr>
+          <a:lstStyle/>
+          <a:p>
+            <a:pPr algn="l">
+              <a:spcBef>
+                <a:spcPts val="0"/>
+              </a:spcBef>
+              <a:spcAft>
+                <a:spcPts val="200"/>
+              </a:spcAft>
+            </a:pPr>
+            <a:r>
+              <a:rPr sz="1000" b="0">
+                <a:solidFill>
+                  <a:srgbClr val="64748B"/>
+                </a:solidFill>
+                <a:latin typeface="WenQuanYi Micro Hei"/>
+                <a:ea typeface="WenQuanYi Micro Hei"/>
+                <a:cs typeface="WenQuanYi Micro Hei"/>
+              </a:rPr>
+              <a:t>曾欣宇  ·  资源受限场景下的具身导航</a:t>
+            </a:r>
+          </a:p>
+        </p:txBody>
+      </p:sp>
+      <p:sp>
+        <p:nvSpPr>
+          <p:cNvPr id="29" name="TextBox 28"/>
           <p:cNvSpPr txBox="1"/>
           <p:nvPr/>
         </p:nvSpPr>
@@ -4390,7 +5443,7 @@
                 <a:ea typeface="WenQuanYi Micro Hei"/>
                 <a:cs typeface="WenQuanYi Micro Hei"/>
               </a:rPr>
-              <a:t>11  /  CLOSED</a:t>
+              <a:t>11  /  TRANSFER</a:t>
             </a:r>
           </a:p>
         </p:txBody>
@@ -4434,7 +5487,7 @@
                 <a:ea typeface="WenQuanYi Micro Hei"/>
                 <a:cs typeface="WenQuanYi Micro Hei"/>
               </a:rPr>
-              <a:t>能力闭环全部通过</a:t>
+              <a:t>同一套部署能力，换过本体</a:t>
             </a:r>
           </a:p>
         </p:txBody>
@@ -4478,7 +5531,7 @@
                 <a:ea typeface="WenQuanYi Micro Hei"/>
                 <a:cs typeface="WenQuanYi Micro Hei"/>
               </a:rPr>
-              <a:t>板载技能 + 边端任务 + 长时稳定</a:t>
+              <a:t>每个项目：一个数字 + 一个坑</a:t>
             </a:r>
           </a:p>
         </p:txBody>
@@ -4491,8 +5544,8 @@
         </p:nvSpPr>
         <p:spPr>
           <a:xfrm>
-            <a:off x="411480" y="1234440"/>
-            <a:ext cx="11338560" cy="868680"/>
+            <a:off x="411480" y="1280160"/>
+            <a:ext cx="5532120" cy="2286000"/>
           </a:xfrm>
           <a:prstGeom prst="roundRect">
             <a:avLst>
@@ -4501,54 +5554,6 @@
           </a:prstGeom>
           <a:solidFill>
             <a:srgbClr val="151D2E"/>
-          </a:solidFill>
-          <a:ln w="14604">
-            <a:solidFill>
-              <a:srgbClr val="2A3A55"/>
-            </a:solidFill>
-          </a:ln>
-          <a:effectLst/>
-        </p:spPr>
-        <p:style>
-          <a:lnRef idx="1">
-            <a:schemeClr val="accent1"/>
-          </a:lnRef>
-          <a:fillRef idx="3">
-            <a:schemeClr val="accent1"/>
-          </a:fillRef>
-          <a:effectRef idx="2">
-            <a:schemeClr val="accent1"/>
-          </a:effectRef>
-          <a:fontRef idx="minor">
-            <a:schemeClr val="lt1"/>
-          </a:fontRef>
-        </p:style>
-        <p:txBody>
-          <a:bodyPr rtlCol="0" anchor="ctr"/>
-          <a:lstStyle/>
-          <a:p>
-            <a:pPr algn="ctr"/>
-          </a:p>
-        </p:txBody>
-      </p:sp>
-      <p:sp>
-        <p:nvSpPr>
-          <p:cNvPr id="9" name="Rounded Rectangle 8"/>
-          <p:cNvSpPr/>
-          <p:nvPr/>
-        </p:nvSpPr>
-        <p:spPr>
-          <a:xfrm>
-            <a:off x="594360" y="1435608"/>
-            <a:ext cx="1554480" cy="457200"/>
-          </a:xfrm>
-          <a:prstGeom prst="roundRect">
-            <a:avLst>
-              <a:gd name="adj" fmla="val 8000"/>
-            </a:avLst>
-          </a:prstGeom>
-          <a:solidFill>
-            <a:srgbClr val="1C273C"/>
           </a:solidFill>
           <a:ln w="14604">
             <a:solidFill>
@@ -4572,28 +5577,54 @@
           </a:fontRef>
         </p:style>
         <p:txBody>
-          <a:bodyPr rtlCol="0" anchor="ctr" wrap="square" lIns="73152" rIns="73152"/>
-          <a:lstStyle/>
-          <a:p>
-            <a:pPr algn="ctr">
-              <a:spcBef>
-                <a:spcPts val="0"/>
-              </a:spcBef>
-              <a:spcAft>
-                <a:spcPts val="200"/>
-              </a:spcAft>
-            </a:pPr>
-            <a:r>
-              <a:rPr sz="1200" b="1">
-                <a:solidFill>
-                  <a:srgbClr val="34D399"/>
-                </a:solidFill>
-                <a:latin typeface="WenQuanYi Micro Hei"/>
-                <a:ea typeface="WenQuanYi Micro Hei"/>
-                <a:cs typeface="WenQuanYi Micro Hei"/>
-              </a:rPr>
-              <a:t>SAFE-1</a:t>
-            </a:r>
+          <a:bodyPr rtlCol="0" anchor="ctr"/>
+          <a:lstStyle/>
+          <a:p>
+            <a:pPr algn="ctr"/>
+          </a:p>
+        </p:txBody>
+      </p:sp>
+      <p:sp>
+        <p:nvSpPr>
+          <p:cNvPr id="9" name="Rectangle 8"/>
+          <p:cNvSpPr/>
+          <p:nvPr/>
+        </p:nvSpPr>
+        <p:spPr>
+          <a:xfrm>
+            <a:off x="411480" y="1280160"/>
+            <a:ext cx="5532120" cy="73152"/>
+          </a:xfrm>
+          <a:prstGeom prst="rect">
+            <a:avLst/>
+          </a:prstGeom>
+          <a:solidFill>
+            <a:srgbClr val="34D399"/>
+          </a:solidFill>
+          <a:ln>
+            <a:noFill/>
+          </a:ln>
+          <a:effectLst/>
+        </p:spPr>
+        <p:style>
+          <a:lnRef idx="1">
+            <a:schemeClr val="accent1"/>
+          </a:lnRef>
+          <a:fillRef idx="3">
+            <a:schemeClr val="accent1"/>
+          </a:fillRef>
+          <a:effectRef idx="2">
+            <a:schemeClr val="accent1"/>
+          </a:effectRef>
+          <a:fontRef idx="minor">
+            <a:schemeClr val="lt1"/>
+          </a:fontRef>
+        </p:style>
+        <p:txBody>
+          <a:bodyPr rtlCol="0" anchor="ctr"/>
+          <a:lstStyle/>
+          <a:p>
+            <a:pPr algn="ctr"/>
           </a:p>
         </p:txBody>
       </p:sp>
@@ -4605,8 +5636,8 @@
         </p:nvSpPr>
         <p:spPr>
           <a:xfrm>
-            <a:off x="2331720" y="1344168"/>
-            <a:ext cx="4754880" cy="320040"/>
+            <a:off x="685800" y="1463039"/>
+            <a:ext cx="5029200" cy="320040"/>
           </a:xfrm>
           <a:prstGeom prst="rect">
             <a:avLst/>
@@ -4636,7 +5667,7 @@
                 <a:ea typeface="WenQuanYi Micro Hei"/>
                 <a:cs typeface="WenQuanYi Micro Hei"/>
               </a:rPr>
-              <a:t>ReturnHome 倒序返航</a:t>
+              <a:t>多机协同 SLAM</a:t>
             </a:r>
           </a:p>
         </p:txBody>
@@ -4649,8 +5680,8 @@
         </p:nvSpPr>
         <p:spPr>
           <a:xfrm>
-            <a:off x="2331720" y="1691640"/>
-            <a:ext cx="4754880" cy="292608"/>
+            <a:off x="685800" y="1828800"/>
+            <a:ext cx="5029200" cy="365760"/>
           </a:xfrm>
           <a:prstGeom prst="rect">
             <a:avLst/>
@@ -4672,15 +5703,15 @@
               </a:spcAft>
             </a:pPr>
             <a:r>
-              <a:rPr sz="1300" b="0">
-                <a:solidFill>
-                  <a:srgbClr val="94A3B8"/>
+              <a:rPr sz="2000" b="1">
+                <a:solidFill>
+                  <a:srgbClr val="34D399"/>
                 </a:solidFill>
                 <a:latin typeface="WenQuanYi Micro Hei"/>
                 <a:ea typeface="WenQuanYi Micro Hei"/>
                 <a:cs typeface="WenQuanYi Micro Hei"/>
               </a:rPr>
-              <a:t>断网 / 显式返航走面包屑</a:t>
+              <a:t>CPU −35% ~ 50%</a:t>
             </a:r>
           </a:p>
         </p:txBody>
@@ -4693,8 +5724,8 @@
         </p:nvSpPr>
         <p:spPr>
           <a:xfrm>
-            <a:off x="7315200" y="1490472"/>
-            <a:ext cx="4206240" cy="365760"/>
+            <a:off x="685800" y="2331720"/>
+            <a:ext cx="5029200" cy="960120"/>
           </a:xfrm>
           <a:prstGeom prst="rect">
             <a:avLst/>
@@ -4716,15 +5747,16 @@
               </a:spcAft>
             </a:pPr>
             <a:r>
-              <a:rPr sz="1500" b="1">
-                <a:solidFill>
-                  <a:srgbClr val="34D399"/>
+              <a:rPr sz="1400" b="0">
+                <a:solidFill>
+                  <a:srgbClr val="94A3B8"/>
                 </a:solidFill>
                 <a:latin typeface="WenQuanYi Micro Hei"/>
                 <a:ea typeface="WenQuanYi Micro Hei"/>
                 <a:cs typeface="WenQuanYi Micro Hei"/>
               </a:rPr>
-              <a:t>真机通过</a:t>
+              <a:t>坑：ROS Topic 序列化拷贝
+SHM 零拷贝 + DDS QoS</a:t>
             </a:r>
           </a:p>
         </p:txBody>
@@ -4737,8 +5769,8 @@
         </p:nvSpPr>
         <p:spPr>
           <a:xfrm>
-            <a:off x="411480" y="2194560"/>
-            <a:ext cx="11338560" cy="868680"/>
+            <a:off x="6263640" y="1280160"/>
+            <a:ext cx="5532120" cy="2286000"/>
           </a:xfrm>
           <a:prstGeom prst="roundRect">
             <a:avLst>
@@ -4750,7 +5782,7 @@
           </a:solidFill>
           <a:ln w="14604">
             <a:solidFill>
-              <a:srgbClr val="2A3A55"/>
+              <a:srgbClr val="FBBF24"/>
             </a:solidFill>
           </a:ln>
           <a:effectLst/>
@@ -4779,27 +5811,23 @@
       </p:sp>
       <p:sp>
         <p:nvSpPr>
-          <p:cNvPr id="14" name="Rounded Rectangle 13"/>
+          <p:cNvPr id="14" name="Rectangle 13"/>
           <p:cNvSpPr/>
           <p:nvPr/>
         </p:nvSpPr>
         <p:spPr>
           <a:xfrm>
-            <a:off x="594360" y="2395728"/>
-            <a:ext cx="1554480" cy="457200"/>
-          </a:xfrm>
-          <a:prstGeom prst="roundRect">
-            <a:avLst>
-              <a:gd name="adj" fmla="val 8000"/>
-            </a:avLst>
+            <a:off x="6263640" y="1280160"/>
+            <a:ext cx="5532120" cy="73152"/>
+          </a:xfrm>
+          <a:prstGeom prst="rect">
+            <a:avLst/>
           </a:prstGeom>
           <a:solidFill>
-            <a:srgbClr val="1C273C"/>
+            <a:srgbClr val="FBBF24"/>
           </a:solidFill>
-          <a:ln w="14604">
-            <a:solidFill>
-              <a:srgbClr val="34D399"/>
-            </a:solidFill>
+          <a:ln>
+            <a:noFill/>
           </a:ln>
           <a:effectLst/>
         </p:spPr>
@@ -4818,28 +5846,10 @@
           </a:fontRef>
         </p:style>
         <p:txBody>
-          <a:bodyPr rtlCol="0" anchor="ctr" wrap="square" lIns="73152" rIns="73152"/>
-          <a:lstStyle/>
-          <a:p>
-            <a:pPr algn="ctr">
-              <a:spcBef>
-                <a:spcPts val="0"/>
-              </a:spcBef>
-              <a:spcAft>
-                <a:spcPts val="200"/>
-              </a:spcAft>
-            </a:pPr>
-            <a:r>
-              <a:rPr sz="1200" b="1">
-                <a:solidFill>
-                  <a:srgbClr val="34D399"/>
-                </a:solidFill>
-                <a:latin typeface="WenQuanYi Micro Hei"/>
-                <a:ea typeface="WenQuanYi Micro Hei"/>
-                <a:cs typeface="WenQuanYi Micro Hei"/>
-              </a:rPr>
-              <a:t>SAFE-2</a:t>
-            </a:r>
+          <a:bodyPr rtlCol="0" anchor="ctr"/>
+          <a:lstStyle/>
+          <a:p>
+            <a:pPr algn="ctr"/>
           </a:p>
         </p:txBody>
       </p:sp>
@@ -4851,8 +5861,8 @@
         </p:nvSpPr>
         <p:spPr>
           <a:xfrm>
-            <a:off x="2331720" y="2304288"/>
-            <a:ext cx="4754880" cy="320040"/>
+            <a:off x="6537959" y="1463039"/>
+            <a:ext cx="5029200" cy="320040"/>
           </a:xfrm>
           <a:prstGeom prst="rect">
             <a:avLst/>
@@ -4882,7 +5892,7 @@
                 <a:ea typeface="WenQuanYi Micro Hei"/>
                 <a:cs typeface="WenQuanYi Micro Hei"/>
               </a:rPr>
-              <a:t>RecoverGlass 玻璃恢复</a:t>
+              <a:t>无 GPS 巡检航线</a:t>
             </a:r>
           </a:p>
         </p:txBody>
@@ -4895,8 +5905,8 @@
         </p:nvSpPr>
         <p:spPr>
           <a:xfrm>
-            <a:off x="2331720" y="2651760"/>
-            <a:ext cx="4754880" cy="292608"/>
+            <a:off x="6537959" y="1828800"/>
+            <a:ext cx="5029200" cy="365760"/>
           </a:xfrm>
           <a:prstGeom prst="rect">
             <a:avLst/>
@@ -4918,15 +5928,15 @@
               </a:spcAft>
             </a:pPr>
             <a:r>
-              <a:rPr sz="1300" b="0">
-                <a:solidFill>
-                  <a:srgbClr val="94A3B8"/>
+              <a:rPr sz="2000" b="1">
+                <a:solidFill>
+                  <a:srgbClr val="FBBF24"/>
                 </a:solidFill>
                 <a:latin typeface="WenQuanYi Micro Hei"/>
                 <a:ea typeface="WenQuanYi Micro Hei"/>
                 <a:cs typeface="WenQuanYi Micro Hei"/>
               </a:rPr>
-              <a:t>虚拟障碍并入度量地图后重规划</a:t>
+              <a:t>WGS84 ↔ ENU 钉死</a:t>
             </a:r>
           </a:p>
         </p:txBody>
@@ -4939,8 +5949,8 @@
         </p:nvSpPr>
         <p:spPr>
           <a:xfrm>
-            <a:off x="7315200" y="2450592"/>
-            <a:ext cx="4206240" cy="365760"/>
+            <a:off x="6537959" y="2331720"/>
+            <a:ext cx="5029200" cy="960120"/>
           </a:xfrm>
           <a:prstGeom prst="rect">
             <a:avLst/>
@@ -4962,15 +5972,16 @@
               </a:spcAft>
             </a:pPr>
             <a:r>
-              <a:rPr sz="1500" b="1">
-                <a:solidFill>
-                  <a:srgbClr val="34D399"/>
+              <a:rPr sz="1400" b="0">
+                <a:solidFill>
+                  <a:srgbClr val="94A3B8"/>
                 </a:solidFill>
                 <a:latin typeface="WenQuanYi Micro Hei"/>
                 <a:ea typeface="WenQuanYi Micro Hei"/>
                 <a:cs typeface="WenQuanYi Micro Hei"/>
               </a:rPr>
-              <a:t>真机通过</a:t>
+              <a:t>坑：任务 / 算法 / 飞控坐标漂移
+Mission Contract 统一语义</a:t>
             </a:r>
           </a:p>
         </p:txBody>
@@ -4983,8 +5994,8 @@
         </p:nvSpPr>
         <p:spPr>
           <a:xfrm>
-            <a:off x="411480" y="3154680"/>
-            <a:ext cx="11338560" cy="868680"/>
+            <a:off x="411480" y="3794760"/>
+            <a:ext cx="5532120" cy="2286000"/>
           </a:xfrm>
           <a:prstGeom prst="roundRect">
             <a:avLst>
@@ -4996,7 +6007,7 @@
           </a:solidFill>
           <a:ln w="14604">
             <a:solidFill>
-              <a:srgbClr val="2A3A55"/>
+              <a:srgbClr val="22D3EE"/>
             </a:solidFill>
           </a:ln>
           <a:effectLst/>
@@ -5025,27 +6036,23 @@
       </p:sp>
       <p:sp>
         <p:nvSpPr>
-          <p:cNvPr id="19" name="Rounded Rectangle 18"/>
+          <p:cNvPr id="19" name="Rectangle 18"/>
           <p:cNvSpPr/>
           <p:nvPr/>
         </p:nvSpPr>
         <p:spPr>
           <a:xfrm>
-            <a:off x="594360" y="3355848"/>
-            <a:ext cx="1554480" cy="457200"/>
-          </a:xfrm>
-          <a:prstGeom prst="roundRect">
-            <a:avLst>
-              <a:gd name="adj" fmla="val 8000"/>
-            </a:avLst>
+            <a:off x="411480" y="3794760"/>
+            <a:ext cx="5532120" cy="73152"/>
+          </a:xfrm>
+          <a:prstGeom prst="rect">
+            <a:avLst/>
           </a:prstGeom>
           <a:solidFill>
-            <a:srgbClr val="1C273C"/>
+            <a:srgbClr val="22D3EE"/>
           </a:solidFill>
-          <a:ln w="14604">
-            <a:solidFill>
-              <a:srgbClr val="34D399"/>
-            </a:solidFill>
+          <a:ln>
+            <a:noFill/>
           </a:ln>
           <a:effectLst/>
         </p:spPr>
@@ -5064,28 +6071,10 @@
           </a:fontRef>
         </p:style>
         <p:txBody>
-          <a:bodyPr rtlCol="0" anchor="ctr" wrap="square" lIns="73152" rIns="73152"/>
-          <a:lstStyle/>
-          <a:p>
-            <a:pPr algn="ctr">
-              <a:spcBef>
-                <a:spcPts val="0"/>
-              </a:spcBef>
-              <a:spcAft>
-                <a:spcPts val="200"/>
-              </a:spcAft>
-            </a:pPr>
-            <a:r>
-              <a:rPr sz="1200" b="1">
-                <a:solidFill>
-                  <a:srgbClr val="34D399"/>
-                </a:solidFill>
-                <a:latin typeface="WenQuanYi Micro Hei"/>
-                <a:ea typeface="WenQuanYi Micro Hei"/>
-                <a:cs typeface="WenQuanYi Micro Hei"/>
-              </a:rPr>
-              <a:t>EDGE-CL</a:t>
-            </a:r>
+          <a:bodyPr rtlCol="0" anchor="ctr"/>
+          <a:lstStyle/>
+          <a:p>
+            <a:pPr algn="ctr"/>
           </a:p>
         </p:txBody>
       </p:sp>
@@ -5097,8 +6086,8 @@
         </p:nvSpPr>
         <p:spPr>
           <a:xfrm>
-            <a:off x="2331720" y="3264408"/>
-            <a:ext cx="4754880" cy="320040"/>
+            <a:off x="685800" y="3977640"/>
+            <a:ext cx="5029200" cy="320040"/>
           </a:xfrm>
           <a:prstGeom prst="rect">
             <a:avLst/>
@@ -5128,7 +6117,7 @@
                 <a:ea typeface="WenQuanYi Micro Hei"/>
                 <a:cs typeface="WenQuanYi Micro Hei"/>
               </a:rPr>
-              <a:t>边端 JSON → Navigate</a:t>
+              <a:t>地铁清洁 · LIO-SAM</a:t>
             </a:r>
           </a:p>
         </p:txBody>
@@ -5141,8 +6130,8 @@
         </p:nvSpPr>
         <p:spPr>
           <a:xfrm>
-            <a:off x="2331720" y="3611880"/>
-            <a:ext cx="4754880" cy="292608"/>
+            <a:off x="685800" y="4343400"/>
+            <a:ext cx="5029200" cy="365760"/>
           </a:xfrm>
           <a:prstGeom prst="rect">
             <a:avLst/>
@@ -5164,15 +6153,15 @@
               </a:spcAft>
             </a:pPr>
             <a:r>
-              <a:rPr sz="1300" b="0">
-                <a:solidFill>
-                  <a:srgbClr val="94A3B8"/>
+              <a:rPr sz="2000" b="1">
+                <a:solidFill>
+                  <a:srgbClr val="22D3EE"/>
                 </a:solidFill>
                 <a:latin typeface="WenQuanYi Micro Hei"/>
                 <a:ea typeface="WenQuanYi Micro Hei"/>
                 <a:cs typeface="WenQuanYi Micro Hei"/>
               </a:rPr>
-              <a:t>物模型信封调用同一技能 ABI</a:t>
+              <a:t>map→odom→base</a:t>
             </a:r>
           </a:p>
         </p:txBody>
@@ -5185,8 +6174,8 @@
         </p:nvSpPr>
         <p:spPr>
           <a:xfrm>
-            <a:off x="7315200" y="3410712"/>
-            <a:ext cx="4206240" cy="365760"/>
+            <a:off x="685800" y="4846320"/>
+            <a:ext cx="5029200" cy="960120"/>
           </a:xfrm>
           <a:prstGeom prst="rect">
             <a:avLst/>
@@ -5208,15 +6197,16 @@
               </a:spcAft>
             </a:pPr>
             <a:r>
-              <a:rPr sz="1500" b="1">
-                <a:solidFill>
-                  <a:srgbClr val="34D399"/>
+              <a:rPr sz="1400" b="0">
+                <a:solidFill>
+                  <a:srgbClr val="94A3B8"/>
                 </a:solidFill>
                 <a:latin typeface="WenQuanYi Micro Hei"/>
                 <a:ea typeface="WenQuanYi Micro Hei"/>
                 <a:cs typeface="WenQuanYi Micro Hei"/>
               </a:rPr>
-              <a:t>到达闭环通过</a:t>
+              <a:t>坑：地图 / 任务 / 执行三套坐标
+感知契约接口先定义</a:t>
             </a:r>
           </a:p>
         </p:txBody>
@@ -5229,8 +6219,8 @@
         </p:nvSpPr>
         <p:spPr>
           <a:xfrm>
-            <a:off x="411480" y="4114800"/>
-            <a:ext cx="11338560" cy="868680"/>
+            <a:off x="6263640" y="3794760"/>
+            <a:ext cx="5532120" cy="2286000"/>
           </a:xfrm>
           <a:prstGeom prst="roundRect">
             <a:avLst>
@@ -5242,7 +6232,7 @@
           </a:solidFill>
           <a:ln w="14604">
             <a:solidFill>
-              <a:srgbClr val="2A3A55"/>
+              <a:srgbClr val="A78BFA"/>
             </a:solidFill>
           </a:ln>
           <a:effectLst/>
@@ -5271,27 +6261,23 @@
       </p:sp>
       <p:sp>
         <p:nvSpPr>
-          <p:cNvPr id="24" name="Rounded Rectangle 23"/>
+          <p:cNvPr id="24" name="Rectangle 23"/>
           <p:cNvSpPr/>
           <p:nvPr/>
         </p:nvSpPr>
         <p:spPr>
           <a:xfrm>
-            <a:off x="594360" y="4315968"/>
-            <a:ext cx="1554480" cy="457200"/>
-          </a:xfrm>
-          <a:prstGeom prst="roundRect">
-            <a:avLst>
-              <a:gd name="adj" fmla="val 8000"/>
-            </a:avLst>
+            <a:off x="6263640" y="3794760"/>
+            <a:ext cx="5532120" cy="73152"/>
+          </a:xfrm>
+          <a:prstGeom prst="rect">
+            <a:avLst/>
           </a:prstGeom>
           <a:solidFill>
-            <a:srgbClr val="1C273C"/>
+            <a:srgbClr val="A78BFA"/>
           </a:solidFill>
-          <a:ln w="14604">
-            <a:solidFill>
-              <a:srgbClr val="34D399"/>
-            </a:solidFill>
+          <a:ln>
+            <a:noFill/>
           </a:ln>
           <a:effectLst/>
         </p:spPr>
@@ -5310,28 +6296,10 @@
           </a:fontRef>
         </p:style>
         <p:txBody>
-          <a:bodyPr rtlCol="0" anchor="ctr" wrap="square" lIns="73152" rIns="73152"/>
-          <a:lstStyle/>
-          <a:p>
-            <a:pPr algn="ctr">
-              <a:spcBef>
-                <a:spcPts val="0"/>
-              </a:spcBef>
-              <a:spcAft>
-                <a:spcPts val="200"/>
-              </a:spcAft>
-            </a:pPr>
-            <a:r>
-              <a:rPr sz="1200" b="1">
-                <a:solidFill>
-                  <a:srgbClr val="34D399"/>
-                </a:solidFill>
-                <a:latin typeface="WenQuanYi Micro Hei"/>
-                <a:ea typeface="WenQuanYi Micro Hei"/>
-                <a:cs typeface="WenQuanYi Micro Hei"/>
-              </a:rPr>
-              <a:t>TOKEN</a:t>
-            </a:r>
+          <a:bodyPr rtlCol="0" anchor="ctr"/>
+          <a:lstStyle/>
+          <a:p>
+            <a:pPr algn="ctr"/>
           </a:p>
         </p:txBody>
       </p:sp>
@@ -5343,8 +6311,8 @@
         </p:nvSpPr>
         <p:spPr>
           <a:xfrm>
-            <a:off x="2331720" y="4224528"/>
-            <a:ext cx="4754880" cy="320040"/>
+            <a:off x="6537959" y="3977640"/>
+            <a:ext cx="5029200" cy="320040"/>
           </a:xfrm>
           <a:prstGeom prst="rect">
             <a:avLst/>
@@ -5374,7 +6342,7 @@
                 <a:ea typeface="WenQuanYi Micro Hei"/>
                 <a:cs typeface="WenQuanYi Micro Hei"/>
               </a:rPr>
-              <a:t>语义 Token / BEV</a:t>
+              <a:t>RK3588 巡航 AGV</a:t>
             </a:r>
           </a:p>
         </p:txBody>
@@ -5387,8 +6355,8 @@
         </p:nvSpPr>
         <p:spPr>
           <a:xfrm>
-            <a:off x="2331720" y="4572000"/>
-            <a:ext cx="4754880" cy="292608"/>
+            <a:off x="6537959" y="4343400"/>
+            <a:ext cx="5029200" cy="365760"/>
           </a:xfrm>
           <a:prstGeom prst="rect">
             <a:avLst/>
@@ -5410,15 +6378,15 @@
               </a:spcAft>
             </a:pPr>
             <a:r>
-              <a:rPr sz="1300" b="0">
-                <a:solidFill>
-                  <a:srgbClr val="94A3B8"/>
+              <a:rPr sz="2000" b="1">
+                <a:solidFill>
+                  <a:srgbClr val="A78BFA"/>
                 </a:solidFill>
                 <a:latin typeface="WenQuanYi Micro Hei"/>
                 <a:ea typeface="WenQuanYi Micro Hei"/>
                 <a:cs typeface="WenQuanYi Micro Hei"/>
               </a:rPr>
-              <a:t>RGB→BEV 配准 + Token 上行</a:t>
+              <a:t>INT8 端侧实时</a:t>
             </a:r>
           </a:p>
         </p:txBody>
@@ -5431,8 +6399,8 @@
         </p:nvSpPr>
         <p:spPr>
           <a:xfrm>
-            <a:off x="7315200" y="4370832"/>
-            <a:ext cx="4206240" cy="365760"/>
+            <a:off x="6537959" y="4846320"/>
+            <a:ext cx="5029200" cy="960120"/>
           </a:xfrm>
           <a:prstGeom prst="rect">
             <a:avLst/>
@@ -5454,143 +6422,30 @@
               </a:spcAft>
             </a:pPr>
             <a:r>
-              <a:rPr sz="1500" b="1">
-                <a:solidFill>
-                  <a:srgbClr val="34D399"/>
+              <a:rPr sz="1400" b="0">
+                <a:solidFill>
+                  <a:srgbClr val="94A3B8"/>
                 </a:solidFill>
                 <a:latin typeface="WenQuanYi Micro Hei"/>
                 <a:ea typeface="WenQuanYi Micro Hei"/>
                 <a:cs typeface="WenQuanYi Micro Hei"/>
               </a:rPr>
-              <a:t>round-trip 通过</a:t>
-            </a:r>
-          </a:p>
-        </p:txBody>
-      </p:sp>
-      <p:sp>
-        <p:nvSpPr>
-          <p:cNvPr id="28" name="Rounded Rectangle 27"/>
-          <p:cNvSpPr/>
-          <p:nvPr/>
-        </p:nvSpPr>
-        <p:spPr>
-          <a:xfrm>
-            <a:off x="411480" y="5074920"/>
-            <a:ext cx="11338560" cy="868680"/>
-          </a:xfrm>
-          <a:prstGeom prst="roundRect">
-            <a:avLst>
-              <a:gd name="adj" fmla="val 8000"/>
-            </a:avLst>
-          </a:prstGeom>
-          <a:solidFill>
-            <a:srgbClr val="151D2E"/>
-          </a:solidFill>
-          <a:ln w="14604">
-            <a:solidFill>
-              <a:srgbClr val="2A3A55"/>
-            </a:solidFill>
-          </a:ln>
-          <a:effectLst/>
-        </p:spPr>
-        <p:style>
-          <a:lnRef idx="1">
-            <a:schemeClr val="accent1"/>
-          </a:lnRef>
-          <a:fillRef idx="3">
-            <a:schemeClr val="accent1"/>
-          </a:fillRef>
-          <a:effectRef idx="2">
-            <a:schemeClr val="accent1"/>
-          </a:effectRef>
-          <a:fontRef idx="minor">
-            <a:schemeClr val="lt1"/>
-          </a:fontRef>
-        </p:style>
-        <p:txBody>
-          <a:bodyPr rtlCol="0" anchor="ctr"/>
-          <a:lstStyle/>
-          <a:p>
-            <a:pPr algn="ctr"/>
-          </a:p>
-        </p:txBody>
-      </p:sp>
-      <p:sp>
-        <p:nvSpPr>
-          <p:cNvPr id="29" name="Rounded Rectangle 28"/>
-          <p:cNvSpPr/>
-          <p:nvPr/>
-        </p:nvSpPr>
-        <p:spPr>
-          <a:xfrm>
-            <a:off x="594360" y="5276088"/>
-            <a:ext cx="1554480" cy="457200"/>
-          </a:xfrm>
-          <a:prstGeom prst="roundRect">
-            <a:avLst>
-              <a:gd name="adj" fmla="val 8000"/>
-            </a:avLst>
-          </a:prstGeom>
-          <a:solidFill>
-            <a:srgbClr val="1C273C"/>
-          </a:solidFill>
-          <a:ln w="14604">
-            <a:solidFill>
-              <a:srgbClr val="34D399"/>
-            </a:solidFill>
-          </a:ln>
-          <a:effectLst/>
-        </p:spPr>
-        <p:style>
-          <a:lnRef idx="1">
-            <a:schemeClr val="accent1"/>
-          </a:lnRef>
-          <a:fillRef idx="3">
-            <a:schemeClr val="accent1"/>
-          </a:fillRef>
-          <a:effectRef idx="2">
-            <a:schemeClr val="accent1"/>
-          </a:effectRef>
-          <a:fontRef idx="minor">
-            <a:schemeClr val="lt1"/>
-          </a:fontRef>
-        </p:style>
-        <p:txBody>
-          <a:bodyPr rtlCol="0" anchor="ctr" wrap="square" lIns="73152" rIns="73152"/>
-          <a:lstStyle/>
-          <a:p>
-            <a:pPr algn="ctr">
-              <a:spcBef>
-                <a:spcPts val="0"/>
-              </a:spcBef>
-              <a:spcAft>
-                <a:spcPts val="200"/>
-              </a:spcAft>
-            </a:pPr>
-            <a:r>
-              <a:rPr sz="1200" b="1">
-                <a:solidFill>
-                  <a:srgbClr val="34D399"/>
-                </a:solidFill>
-                <a:latin typeface="WenQuanYi Micro Hei"/>
-                <a:ea typeface="WenQuanYi Micro Hei"/>
-                <a:cs typeface="WenQuanYi Micro Hei"/>
-              </a:rPr>
-              <a:t>SOAK</a:t>
-            </a:r>
-          </a:p>
-        </p:txBody>
-      </p:sp>
-      <p:sp>
-        <p:nvSpPr>
-          <p:cNvPr id="30" name="TextBox 29"/>
+              <a:t>坑：感知与控制耦合
+NPU 推理与 STM32 物理解耦</a:t>
+            </a:r>
+          </a:p>
+        </p:txBody>
+      </p:sp>
+      <p:sp>
+        <p:nvSpPr>
+          <p:cNvPr id="28" name="TextBox 27"/>
           <p:cNvSpPr txBox="1"/>
           <p:nvPr/>
         </p:nvSpPr>
         <p:spPr>
           <a:xfrm>
-            <a:off x="2331720" y="5184648"/>
-            <a:ext cx="4754880" cy="320040"/>
+            <a:off x="411480" y="6537960"/>
+            <a:ext cx="8686800" cy="256032"/>
           </a:xfrm>
           <a:prstGeom prst="rect">
             <a:avLst/>
@@ -5612,154 +6467,22 @@
               </a:spcAft>
             </a:pPr>
             <a:r>
-              <a:rPr sz="1600" b="1">
-                <a:solidFill>
-                  <a:srgbClr val="F8FAFC"/>
+              <a:rPr sz="1000" b="0">
+                <a:solidFill>
+                  <a:srgbClr val="64748B"/>
                 </a:solidFill>
                 <a:latin typeface="WenQuanYi Micro Hei"/>
                 <a:ea typeface="WenQuanYi Micro Hei"/>
                 <a:cs typeface="WenQuanYi Micro Hei"/>
               </a:rPr>
-              <a:t>长航时与中距重复</a:t>
-            </a:r>
-          </a:p>
-        </p:txBody>
-      </p:sp>
-      <p:sp>
-        <p:nvSpPr>
-          <p:cNvPr id="31" name="TextBox 30"/>
-          <p:cNvSpPr txBox="1"/>
-          <p:nvPr/>
-        </p:nvSpPr>
-        <p:spPr>
-          <a:xfrm>
-            <a:off x="2331720" y="5532120"/>
-            <a:ext cx="4754880" cy="292608"/>
-          </a:xfrm>
-          <a:prstGeom prst="rect">
-            <a:avLst/>
-          </a:prstGeom>
-          <a:noFill/>
-        </p:spPr>
-        <p:txBody>
-          <a:bodyPr wrap="square" lIns="18288" rIns="18288" anchor="ctr">
-            <a:spAutoFit/>
-          </a:bodyPr>
-          <a:lstStyle/>
-          <a:p>
-            <a:pPr algn="l">
-              <a:spcBef>
-                <a:spcPts val="0"/>
-              </a:spcBef>
-              <a:spcAft>
-                <a:spcPts val="200"/>
-              </a:spcAft>
-            </a:pPr>
-            <a:r>
-              <a:rPr sz="1300" b="0">
-                <a:solidFill>
-                  <a:srgbClr val="94A3B8"/>
-                </a:solidFill>
-                <a:latin typeface="WenQuanYi Micro Hei"/>
-                <a:ea typeface="WenQuanYi Micro Hei"/>
-                <a:cs typeface="WenQuanYi Micro Hei"/>
-              </a:rPr>
-              <a:t>20 min+ 稳定  ·  50 m 十次 10/10</a:t>
-            </a:r>
-          </a:p>
-        </p:txBody>
-      </p:sp>
-      <p:sp>
-        <p:nvSpPr>
-          <p:cNvPr id="32" name="TextBox 31"/>
-          <p:cNvSpPr txBox="1"/>
-          <p:nvPr/>
-        </p:nvSpPr>
-        <p:spPr>
-          <a:xfrm>
-            <a:off x="7315200" y="5330952"/>
-            <a:ext cx="4206240" cy="365760"/>
-          </a:xfrm>
-          <a:prstGeom prst="rect">
-            <a:avLst/>
-          </a:prstGeom>
-          <a:noFill/>
-        </p:spPr>
-        <p:txBody>
-          <a:bodyPr wrap="square" lIns="18288" rIns="18288" anchor="ctr">
-            <a:spAutoFit/>
-          </a:bodyPr>
-          <a:lstStyle/>
-          <a:p>
-            <a:pPr algn="l">
-              <a:spcBef>
-                <a:spcPts val="0"/>
-              </a:spcBef>
-              <a:spcAft>
-                <a:spcPts val="200"/>
-              </a:spcAft>
-            </a:pPr>
-            <a:r>
-              <a:rPr sz="1500" b="1">
-                <a:solidFill>
-                  <a:srgbClr val="34D399"/>
-                </a:solidFill>
-                <a:latin typeface="WenQuanYi Micro Hei"/>
-                <a:ea typeface="WenQuanYi Micro Hei"/>
-                <a:cs typeface="WenQuanYi Micro Hei"/>
-              </a:rPr>
-              <a:t>误差 0.28 m  通过</a:t>
-            </a:r>
-          </a:p>
-        </p:txBody>
-      </p:sp>
-      <p:sp>
-        <p:nvSpPr>
-          <p:cNvPr id="33" name="TextBox 32"/>
-          <p:cNvSpPr txBox="1"/>
-          <p:nvPr/>
-        </p:nvSpPr>
-        <p:spPr>
-          <a:xfrm>
-            <a:off x="411480" y="6537960"/>
-            <a:ext cx="8229600" cy="256032"/>
-          </a:xfrm>
-          <a:prstGeom prst="rect">
-            <a:avLst/>
-          </a:prstGeom>
-          <a:noFill/>
-        </p:spPr>
-        <p:txBody>
-          <a:bodyPr wrap="square" lIns="18288" rIns="18288" anchor="ctr">
-            <a:spAutoFit/>
-          </a:bodyPr>
-          <a:lstStyle/>
-          <a:p>
-            <a:pPr algn="l">
-              <a:spcBef>
-                <a:spcPts val="0"/>
-              </a:spcBef>
-              <a:spcAft>
-                <a:spcPts val="200"/>
-              </a:spcAft>
-            </a:pPr>
-            <a:r>
-              <a:rPr sz="1000" b="0">
-                <a:solidFill>
-                  <a:srgbClr val="64748B"/>
-                </a:solidFill>
-                <a:latin typeface="WenQuanYi Micro Hei"/>
-                <a:ea typeface="WenQuanYi Micro Hei"/>
-                <a:cs typeface="WenQuanYi Micro Hei"/>
-              </a:rPr>
-              <a:t>曾欣宇  ·  空间导航算法部署  ·  对外沟通</a:t>
-            </a:r>
-          </a:p>
-        </p:txBody>
-      </p:sp>
-      <p:sp>
-        <p:nvSpPr>
-          <p:cNvPr id="34" name="TextBox 33"/>
+              <a:t>曾欣宇  ·  资源受限场景下的具身导航</a:t>
+            </a:r>
+          </a:p>
+        </p:txBody>
+      </p:sp>
+      <p:sp>
+        <p:nvSpPr>
+          <p:cNvPr id="29" name="TextBox 28"/>
           <p:cNvSpPr txBox="1"/>
           <p:nvPr/>
         </p:nvSpPr>
@@ -6034,7 +6757,7 @@
                 <a:ea typeface="WenQuanYi Micro Hei"/>
                 <a:cs typeface="WenQuanYi Micro Hei"/>
               </a:rPr>
-              <a:t>12  /  COMMIT</a:t>
+              <a:t>12  /  CLOSE</a:t>
             </a:r>
           </a:p>
         </p:txBody>
@@ -6234,7 +6957,7 @@
                 <a:ea typeface="WenQuanYi Micro Hei"/>
                 <a:cs typeface="WenQuanYi Micro Hei"/>
               </a:rPr>
-              <a:t>板载导航已闭环</a:t>
+              <a:t>资源受限上的板载导航</a:t>
             </a:r>
           </a:p>
         </p:txBody>
@@ -6278,7 +7001,7 @@
                 <a:ea typeface="WenQuanYi Micro Hei"/>
                 <a:cs typeface="WenQuanYi Micro Hei"/>
               </a:rPr>
-              <a:t>LIO → PCT 引导 → BT 授权 → SCAN 跟踪 → Sport；短程 / 中距 / 长时验收通过</a:t>
+              <a:t>单 LIO + 度量/符号分层；短程 / 中距 / 长时验收通过</a:t>
             </a:r>
           </a:p>
         </p:txBody>
@@ -6478,7 +7201,7 @@
                 <a:ea typeface="WenQuanYi Micro Hei"/>
                 <a:cs typeface="WenQuanYi Micro Hei"/>
               </a:rPr>
-              <a:t>物模型 JSON 调用 Navigate，禁止下发速度；EDGE-CL 与 Token 闭环通过</a:t>
+              <a:t>物模型 JSON 调用 Navigate；EDGE-CL 与 Token 闭环通过</a:t>
             </a:r>
           </a:p>
         </p:txBody>
@@ -6634,7 +7357,7 @@
                 <a:ea typeface="WenQuanYi Micro Hei"/>
                 <a:cs typeface="WenQuanYi Micro Hei"/>
               </a:rPr>
-              <a:t>安全技能可独立验收</a:t>
+              <a:t>同一套能力换本体</a:t>
             </a:r>
           </a:p>
         </p:txBody>
@@ -6678,7 +7401,7 @@
                 <a:ea typeface="WenQuanYi Micro Hei"/>
                 <a:cs typeface="WenQuanYi Micro Hei"/>
               </a:rPr>
-              <a:t>ReturnHome / RecoverGlass 真机通过；失败只停技能，不停度量内核</a:t>
+              <a:t>无人机巡检 · 地铁清洁 · 边缘板 · 四足；契约先钉死再换实现</a:t>
             </a:r>
           </a:p>
         </p:txBody>
@@ -6780,7 +7503,7 @@
         <p:spPr>
           <a:xfrm>
             <a:off x="411480" y="6537960"/>
-            <a:ext cx="8229600" cy="256032"/>
+            <a:ext cx="8686800" cy="256032"/>
           </a:xfrm>
           <a:prstGeom prst="rect">
             <a:avLst/>
@@ -6810,7 +7533,7 @@
                 <a:ea typeface="WenQuanYi Micro Hei"/>
                 <a:cs typeface="WenQuanYi Micro Hei"/>
               </a:rPr>
-              <a:t>曾欣宇  ·  空间导航算法部署  ·  对外沟通</a:t>
+              <a:t>曾欣宇  ·  资源受限场景下的具身导航</a:t>
             </a:r>
           </a:p>
         </p:txBody>
@@ -6965,30 +7688,50 @@
           </a:p>
         </p:txBody>
       </p:sp>
-      <p:pic>
-        <p:nvPicPr>
-          <p:cNvPr id="4" name="Picture 3" descr="fail.png"/>
-          <p:cNvPicPr>
-            <a:picLocks noChangeAspect="1"/>
-          </p:cNvPicPr>
-          <p:nvPr/>
-        </p:nvPicPr>
-        <p:blipFill>
-          <a:blip r:embed="rId2"/>
-          <a:stretch>
-            <a:fillRect/>
-          </a:stretch>
-        </p:blipFill>
-        <p:spPr>
-          <a:xfrm>
-            <a:off x="0" y="54864"/>
-            <a:ext cx="12191695" cy="6803136"/>
-          </a:xfrm>
-          <a:prstGeom prst="rect">
-            <a:avLst/>
-          </a:prstGeom>
-        </p:spPr>
-      </p:pic>
+      <p:sp>
+        <p:nvSpPr>
+          <p:cNvPr id="4" name="Rectangle 3"/>
+          <p:cNvSpPr/>
+          <p:nvPr/>
+        </p:nvSpPr>
+        <p:spPr>
+          <a:xfrm>
+            <a:off x="0" y="0"/>
+            <a:ext cx="64008" cy="6858000"/>
+          </a:xfrm>
+          <a:prstGeom prst="rect">
+            <a:avLst/>
+          </a:prstGeom>
+          <a:solidFill>
+            <a:srgbClr val="22D3EE"/>
+          </a:solidFill>
+          <a:ln>
+            <a:noFill/>
+          </a:ln>
+          <a:effectLst/>
+        </p:spPr>
+        <p:style>
+          <a:lnRef idx="1">
+            <a:schemeClr val="accent1"/>
+          </a:lnRef>
+          <a:fillRef idx="3">
+            <a:schemeClr val="accent1"/>
+          </a:fillRef>
+          <a:effectRef idx="2">
+            <a:schemeClr val="accent1"/>
+          </a:effectRef>
+          <a:fontRef idx="minor">
+            <a:schemeClr val="lt1"/>
+          </a:fontRef>
+        </p:style>
+        <p:txBody>
+          <a:bodyPr rtlCol="0" anchor="ctr"/>
+          <a:lstStyle/>
+          <a:p>
+            <a:pPr algn="ctr"/>
+          </a:p>
+        </p:txBody>
+      </p:sp>
       <p:sp>
         <p:nvSpPr>
           <p:cNvPr id="5" name="TextBox 4"/>
@@ -6997,8 +7740,8 @@
         </p:nvSpPr>
         <p:spPr>
           <a:xfrm>
-            <a:off x="411480" y="6537960"/>
-            <a:ext cx="8229600" cy="256032"/>
+            <a:off x="411480" y="182880"/>
+            <a:ext cx="10972800" cy="237744"/>
           </a:xfrm>
           <a:prstGeom prst="rect">
             <a:avLst/>
@@ -7020,15 +7763,15 @@
               </a:spcAft>
             </a:pPr>
             <a:r>
-              <a:rPr sz="1000" b="0">
-                <a:solidFill>
-                  <a:srgbClr val="64748B"/>
+              <a:rPr sz="1100" b="1">
+                <a:solidFill>
+                  <a:srgbClr val="22D3EE"/>
                 </a:solidFill>
                 <a:latin typeface="WenQuanYi Micro Hei"/>
                 <a:ea typeface="WenQuanYi Micro Hei"/>
                 <a:cs typeface="WenQuanYi Micro Hei"/>
               </a:rPr>
-              <a:t>曾欣宇  ·  空间导航算法部署  ·  对外沟通</a:t>
+              <a:t>02  /  PATH</a:t>
             </a:r>
           </a:p>
         </p:txBody>
@@ -7036,6 +7779,1660 @@
       <p:sp>
         <p:nvSpPr>
           <p:cNvPr id="6" name="TextBox 5"/>
+          <p:cNvSpPr txBox="1"/>
+          <p:nvPr/>
+        </p:nvSpPr>
+        <p:spPr>
+          <a:xfrm>
+            <a:off x="411480" y="402336"/>
+            <a:ext cx="11338560" cy="438912"/>
+          </a:xfrm>
+          <a:prstGeom prst="rect">
+            <a:avLst/>
+          </a:prstGeom>
+          <a:noFill/>
+        </p:spPr>
+        <p:txBody>
+          <a:bodyPr wrap="square" lIns="18288" rIns="18288" anchor="ctr">
+            <a:spAutoFit/>
+          </a:bodyPr>
+          <a:lstStyle/>
+          <a:p>
+            <a:pPr algn="l">
+              <a:spcBef>
+                <a:spcPts val="0"/>
+              </a:spcBef>
+              <a:spcAft>
+                <a:spcPts val="200"/>
+              </a:spcAft>
+            </a:pPr>
+            <a:r>
+              <a:rPr sz="2600" b="1">
+                <a:solidFill>
+                  <a:srgbClr val="F8FAFC"/>
+                </a:solidFill>
+                <a:latin typeface="WenQuanYi Micro Hei"/>
+                <a:ea typeface="WenQuanYi Micro Hei"/>
+                <a:cs typeface="WenQuanYi Micro Hei"/>
+              </a:rPr>
+              <a:t>经历</a:t>
+            </a:r>
+          </a:p>
+        </p:txBody>
+      </p:sp>
+      <p:sp>
+        <p:nvSpPr>
+          <p:cNvPr id="7" name="TextBox 6"/>
+          <p:cNvSpPr txBox="1"/>
+          <p:nvPr/>
+        </p:nvSpPr>
+        <p:spPr>
+          <a:xfrm>
+            <a:off x="411480" y="822960"/>
+            <a:ext cx="11338560" cy="274320"/>
+          </a:xfrm>
+          <a:prstGeom prst="rect">
+            <a:avLst/>
+          </a:prstGeom>
+          <a:noFill/>
+        </p:spPr>
+        <p:txBody>
+          <a:bodyPr wrap="square" lIns="18288" rIns="18288" anchor="ctr">
+            <a:spAutoFit/>
+          </a:bodyPr>
+          <a:lstStyle/>
+          <a:p>
+            <a:pPr algn="l">
+              <a:spcBef>
+                <a:spcPts val="0"/>
+              </a:spcBef>
+              <a:spcAft>
+                <a:spcPts val="200"/>
+              </a:spcAft>
+            </a:pPr>
+            <a:r>
+              <a:rPr sz="1300" b="0">
+                <a:solidFill>
+                  <a:srgbClr val="94A3B8"/>
+                </a:solidFill>
+                <a:latin typeface="WenQuanYi Micro Hei"/>
+                <a:ea typeface="WenQuanYi Micro Hei"/>
+                <a:cs typeface="WenQuanYi Micro Hei"/>
+              </a:rPr>
+              <a:t>复杂环境三维感知 · 导航决策 · 边缘协同 · 资源受限上机</a:t>
+            </a:r>
+          </a:p>
+        </p:txBody>
+      </p:sp>
+      <p:sp>
+        <p:nvSpPr>
+          <p:cNvPr id="8" name="Rounded Rectangle 7"/>
+          <p:cNvSpPr/>
+          <p:nvPr/>
+        </p:nvSpPr>
+        <p:spPr>
+          <a:xfrm>
+            <a:off x="411480" y="1234440"/>
+            <a:ext cx="11338560" cy="2148840"/>
+          </a:xfrm>
+          <a:prstGeom prst="roundRect">
+            <a:avLst>
+              <a:gd name="adj" fmla="val 8000"/>
+            </a:avLst>
+          </a:prstGeom>
+          <a:solidFill>
+            <a:srgbClr val="151D2E"/>
+          </a:solidFill>
+          <a:ln w="14604">
+            <a:solidFill>
+              <a:srgbClr val="2A3A55"/>
+            </a:solidFill>
+          </a:ln>
+          <a:effectLst/>
+        </p:spPr>
+        <p:style>
+          <a:lnRef idx="1">
+            <a:schemeClr val="accent1"/>
+          </a:lnRef>
+          <a:fillRef idx="3">
+            <a:schemeClr val="accent1"/>
+          </a:fillRef>
+          <a:effectRef idx="2">
+            <a:schemeClr val="accent1"/>
+          </a:effectRef>
+          <a:fontRef idx="minor">
+            <a:schemeClr val="lt1"/>
+          </a:fontRef>
+        </p:style>
+        <p:txBody>
+          <a:bodyPr rtlCol="0" anchor="ctr"/>
+          <a:lstStyle/>
+          <a:p>
+            <a:pPr algn="ctr"/>
+          </a:p>
+        </p:txBody>
+      </p:sp>
+      <p:sp>
+        <p:nvSpPr>
+          <p:cNvPr id="9" name="Rectangle 8"/>
+          <p:cNvSpPr/>
+          <p:nvPr/>
+        </p:nvSpPr>
+        <p:spPr>
+          <a:xfrm>
+            <a:off x="960120" y="2148840"/>
+            <a:ext cx="10241280" cy="36576"/>
+          </a:xfrm>
+          <a:prstGeom prst="rect">
+            <a:avLst/>
+          </a:prstGeom>
+          <a:solidFill>
+            <a:srgbClr val="2A3A55"/>
+          </a:solidFill>
+          <a:ln>
+            <a:noFill/>
+          </a:ln>
+          <a:effectLst/>
+        </p:spPr>
+        <p:style>
+          <a:lnRef idx="1">
+            <a:schemeClr val="accent1"/>
+          </a:lnRef>
+          <a:fillRef idx="3">
+            <a:schemeClr val="accent1"/>
+          </a:fillRef>
+          <a:effectRef idx="2">
+            <a:schemeClr val="accent1"/>
+          </a:effectRef>
+          <a:fontRef idx="minor">
+            <a:schemeClr val="lt1"/>
+          </a:fontRef>
+        </p:style>
+        <p:txBody>
+          <a:bodyPr rtlCol="0" anchor="ctr"/>
+          <a:lstStyle/>
+          <a:p>
+            <a:pPr algn="ctr"/>
+          </a:p>
+        </p:txBody>
+      </p:sp>
+      <p:sp>
+        <p:nvSpPr>
+          <p:cNvPr id="10" name="Rounded Rectangle 9"/>
+          <p:cNvSpPr/>
+          <p:nvPr/>
+        </p:nvSpPr>
+        <p:spPr>
+          <a:xfrm>
+            <a:off x="1051560" y="1417320"/>
+            <a:ext cx="384048" cy="384048"/>
+          </a:xfrm>
+          <a:prstGeom prst="roundRect">
+            <a:avLst>
+              <a:gd name="adj" fmla="val 8000"/>
+            </a:avLst>
+          </a:prstGeom>
+          <a:solidFill>
+            <a:srgbClr val="34D399"/>
+          </a:solidFill>
+          <a:ln>
+            <a:noFill/>
+          </a:ln>
+          <a:effectLst/>
+        </p:spPr>
+        <p:style>
+          <a:lnRef idx="1">
+            <a:schemeClr val="accent1"/>
+          </a:lnRef>
+          <a:fillRef idx="3">
+            <a:schemeClr val="accent1"/>
+          </a:fillRef>
+          <a:effectRef idx="2">
+            <a:schemeClr val="accent1"/>
+          </a:effectRef>
+          <a:fontRef idx="minor">
+            <a:schemeClr val="lt1"/>
+          </a:fontRef>
+        </p:style>
+        <p:txBody>
+          <a:bodyPr rtlCol="0" anchor="ctr"/>
+          <a:lstStyle/>
+          <a:p>
+            <a:pPr algn="ctr"/>
+          </a:p>
+        </p:txBody>
+      </p:sp>
+      <p:sp>
+        <p:nvSpPr>
+          <p:cNvPr id="11" name="TextBox 10"/>
+          <p:cNvSpPr txBox="1"/>
+          <p:nvPr/>
+        </p:nvSpPr>
+        <p:spPr>
+          <a:xfrm>
+            <a:off x="1554480" y="1389888"/>
+            <a:ext cx="2834640" cy="292608"/>
+          </a:xfrm>
+          <a:prstGeom prst="rect">
+            <a:avLst/>
+          </a:prstGeom>
+          <a:noFill/>
+        </p:spPr>
+        <p:txBody>
+          <a:bodyPr wrap="square" lIns="18288" rIns="18288" anchor="ctr">
+            <a:spAutoFit/>
+          </a:bodyPr>
+          <a:lstStyle/>
+          <a:p>
+            <a:pPr algn="l">
+              <a:spcBef>
+                <a:spcPts val="0"/>
+              </a:spcBef>
+              <a:spcAft>
+                <a:spcPts val="200"/>
+              </a:spcAft>
+            </a:pPr>
+            <a:r>
+              <a:rPr sz="1200" b="1">
+                <a:solidFill>
+                  <a:srgbClr val="34D399"/>
+                </a:solidFill>
+                <a:latin typeface="WenQuanYi Micro Hei"/>
+                <a:ea typeface="WenQuanYi Micro Hei"/>
+                <a:cs typeface="WenQuanYi Micro Hei"/>
+              </a:rPr>
+              <a:t>2023–25</a:t>
+            </a:r>
+          </a:p>
+        </p:txBody>
+      </p:sp>
+      <p:sp>
+        <p:nvSpPr>
+          <p:cNvPr id="12" name="TextBox 11"/>
+          <p:cNvSpPr txBox="1"/>
+          <p:nvPr/>
+        </p:nvSpPr>
+        <p:spPr>
+          <a:xfrm>
+            <a:off x="1554480" y="2286000"/>
+            <a:ext cx="3017520" cy="365760"/>
+          </a:xfrm>
+          <a:prstGeom prst="rect">
+            <a:avLst/>
+          </a:prstGeom>
+          <a:noFill/>
+        </p:spPr>
+        <p:txBody>
+          <a:bodyPr wrap="square" lIns="18288" rIns="18288" anchor="ctr">
+            <a:spAutoFit/>
+          </a:bodyPr>
+          <a:lstStyle/>
+          <a:p>
+            <a:pPr algn="l">
+              <a:spcBef>
+                <a:spcPts val="0"/>
+              </a:spcBef>
+              <a:spcAft>
+                <a:spcPts val="200"/>
+              </a:spcAft>
+            </a:pPr>
+            <a:r>
+              <a:rPr sz="1300" b="1">
+                <a:solidFill>
+                  <a:srgbClr val="F8FAFC"/>
+                </a:solidFill>
+                <a:latin typeface="WenQuanYi Micro Hei"/>
+                <a:ea typeface="WenQuanYi Micro Hei"/>
+                <a:cs typeface="WenQuanYi Micro Hei"/>
+              </a:rPr>
+              <a:t>浙江大学  ·  助理工程师</a:t>
+            </a:r>
+          </a:p>
+        </p:txBody>
+      </p:sp>
+      <p:sp>
+        <p:nvSpPr>
+          <p:cNvPr id="13" name="TextBox 12"/>
+          <p:cNvSpPr txBox="1"/>
+          <p:nvPr/>
+        </p:nvSpPr>
+        <p:spPr>
+          <a:xfrm>
+            <a:off x="1554480" y="2651760"/>
+            <a:ext cx="3017520" cy="502920"/>
+          </a:xfrm>
+          <a:prstGeom prst="rect">
+            <a:avLst/>
+          </a:prstGeom>
+          <a:noFill/>
+        </p:spPr>
+        <p:txBody>
+          <a:bodyPr wrap="square" lIns="18288" rIns="18288" anchor="ctr">
+            <a:spAutoFit/>
+          </a:bodyPr>
+          <a:lstStyle/>
+          <a:p>
+            <a:pPr algn="l">
+              <a:spcBef>
+                <a:spcPts val="0"/>
+              </a:spcBef>
+              <a:spcAft>
+                <a:spcPts val="200"/>
+              </a:spcAft>
+            </a:pPr>
+            <a:r>
+              <a:rPr sz="1200" b="0">
+                <a:solidFill>
+                  <a:srgbClr val="94A3B8"/>
+                </a:solidFill>
+                <a:latin typeface="WenQuanYi Micro Hei"/>
+                <a:ea typeface="WenQuanYi Micro Hei"/>
+                <a:cs typeface="WenQuanYi Micro Hei"/>
+              </a:rPr>
+              <a:t>地铁 LIO-SAM  ·  GD 视觉导航  ·  RK3588</a:t>
+            </a:r>
+          </a:p>
+        </p:txBody>
+      </p:sp>
+      <p:sp>
+        <p:nvSpPr>
+          <p:cNvPr id="14" name="Rounded Rectangle 13"/>
+          <p:cNvSpPr/>
+          <p:nvPr/>
+        </p:nvSpPr>
+        <p:spPr>
+          <a:xfrm>
+            <a:off x="4754880" y="1417320"/>
+            <a:ext cx="384048" cy="384048"/>
+          </a:xfrm>
+          <a:prstGeom prst="roundRect">
+            <a:avLst>
+              <a:gd name="adj" fmla="val 8000"/>
+            </a:avLst>
+          </a:prstGeom>
+          <a:solidFill>
+            <a:srgbClr val="FBBF24"/>
+          </a:solidFill>
+          <a:ln>
+            <a:noFill/>
+          </a:ln>
+          <a:effectLst/>
+        </p:spPr>
+        <p:style>
+          <a:lnRef idx="1">
+            <a:schemeClr val="accent1"/>
+          </a:lnRef>
+          <a:fillRef idx="3">
+            <a:schemeClr val="accent1"/>
+          </a:fillRef>
+          <a:effectRef idx="2">
+            <a:schemeClr val="accent1"/>
+          </a:effectRef>
+          <a:fontRef idx="minor">
+            <a:schemeClr val="lt1"/>
+          </a:fontRef>
+        </p:style>
+        <p:txBody>
+          <a:bodyPr rtlCol="0" anchor="ctr"/>
+          <a:lstStyle/>
+          <a:p>
+            <a:pPr algn="ctr"/>
+          </a:p>
+        </p:txBody>
+      </p:sp>
+      <p:sp>
+        <p:nvSpPr>
+          <p:cNvPr id="15" name="TextBox 14"/>
+          <p:cNvSpPr txBox="1"/>
+          <p:nvPr/>
+        </p:nvSpPr>
+        <p:spPr>
+          <a:xfrm>
+            <a:off x="5257800" y="1389888"/>
+            <a:ext cx="2834640" cy="292608"/>
+          </a:xfrm>
+          <a:prstGeom prst="rect">
+            <a:avLst/>
+          </a:prstGeom>
+          <a:noFill/>
+        </p:spPr>
+        <p:txBody>
+          <a:bodyPr wrap="square" lIns="18288" rIns="18288" anchor="ctr">
+            <a:spAutoFit/>
+          </a:bodyPr>
+          <a:lstStyle/>
+          <a:p>
+            <a:pPr algn="l">
+              <a:spcBef>
+                <a:spcPts val="0"/>
+              </a:spcBef>
+              <a:spcAft>
+                <a:spcPts val="200"/>
+              </a:spcAft>
+            </a:pPr>
+            <a:r>
+              <a:rPr sz="1200" b="1">
+                <a:solidFill>
+                  <a:srgbClr val="FBBF24"/>
+                </a:solidFill>
+                <a:latin typeface="WenQuanYi Micro Hei"/>
+                <a:ea typeface="WenQuanYi Micro Hei"/>
+                <a:cs typeface="WenQuanYi Micro Hei"/>
+              </a:rPr>
+              <a:t>2025–26</a:t>
+            </a:r>
+          </a:p>
+        </p:txBody>
+      </p:sp>
+      <p:sp>
+        <p:nvSpPr>
+          <p:cNvPr id="16" name="TextBox 15"/>
+          <p:cNvSpPr txBox="1"/>
+          <p:nvPr/>
+        </p:nvSpPr>
+        <p:spPr>
+          <a:xfrm>
+            <a:off x="5257800" y="2286000"/>
+            <a:ext cx="3017520" cy="365760"/>
+          </a:xfrm>
+          <a:prstGeom prst="rect">
+            <a:avLst/>
+          </a:prstGeom>
+          <a:noFill/>
+        </p:spPr>
+        <p:txBody>
+          <a:bodyPr wrap="square" lIns="18288" rIns="18288" anchor="ctr">
+            <a:spAutoFit/>
+          </a:bodyPr>
+          <a:lstStyle/>
+          <a:p>
+            <a:pPr algn="l">
+              <a:spcBef>
+                <a:spcPts val="0"/>
+              </a:spcBef>
+              <a:spcAft>
+                <a:spcPts val="200"/>
+              </a:spcAft>
+            </a:pPr>
+            <a:r>
+              <a:rPr sz="1300" b="1">
+                <a:solidFill>
+                  <a:srgbClr val="F8FAFC"/>
+                </a:solidFill>
+                <a:latin typeface="WenQuanYi Micro Hei"/>
+                <a:ea typeface="WenQuanYi Micro Hei"/>
+                <a:cs typeface="WenQuanYi Micro Hei"/>
+              </a:rPr>
+              <a:t>杭州旷行  ·  算法工程师</a:t>
+            </a:r>
+          </a:p>
+        </p:txBody>
+      </p:sp>
+      <p:sp>
+        <p:nvSpPr>
+          <p:cNvPr id="17" name="TextBox 16"/>
+          <p:cNvSpPr txBox="1"/>
+          <p:nvPr/>
+        </p:nvSpPr>
+        <p:spPr>
+          <a:xfrm>
+            <a:off x="5257800" y="2651760"/>
+            <a:ext cx="3017520" cy="502920"/>
+          </a:xfrm>
+          <a:prstGeom prst="rect">
+            <a:avLst/>
+          </a:prstGeom>
+          <a:noFill/>
+        </p:spPr>
+        <p:txBody>
+          <a:bodyPr wrap="square" lIns="18288" rIns="18288" anchor="ctr">
+            <a:spAutoFit/>
+          </a:bodyPr>
+          <a:lstStyle/>
+          <a:p>
+            <a:pPr algn="l">
+              <a:spcBef>
+                <a:spcPts val="0"/>
+              </a:spcBef>
+              <a:spcAft>
+                <a:spcPts val="200"/>
+              </a:spcAft>
+            </a:pPr>
+            <a:r>
+              <a:rPr sz="1200" b="0">
+                <a:solidFill>
+                  <a:srgbClr val="94A3B8"/>
+                </a:solidFill>
+                <a:latin typeface="WenQuanYi Micro Hei"/>
+                <a:ea typeface="WenQuanYi Micro Hei"/>
+                <a:cs typeface="WenQuanYi Micro Hei"/>
+              </a:rPr>
+              <a:t>无 GPS 巡检航线  ·  多机协同 SLAM</a:t>
+            </a:r>
+          </a:p>
+        </p:txBody>
+      </p:sp>
+      <p:sp>
+        <p:nvSpPr>
+          <p:cNvPr id="18" name="Rounded Rectangle 17"/>
+          <p:cNvSpPr/>
+          <p:nvPr/>
+        </p:nvSpPr>
+        <p:spPr>
+          <a:xfrm>
+            <a:off x="8458200" y="1417320"/>
+            <a:ext cx="384048" cy="384048"/>
+          </a:xfrm>
+          <a:prstGeom prst="roundRect">
+            <a:avLst>
+              <a:gd name="adj" fmla="val 8000"/>
+            </a:avLst>
+          </a:prstGeom>
+          <a:solidFill>
+            <a:srgbClr val="22D3EE"/>
+          </a:solidFill>
+          <a:ln>
+            <a:noFill/>
+          </a:ln>
+          <a:effectLst/>
+        </p:spPr>
+        <p:style>
+          <a:lnRef idx="1">
+            <a:schemeClr val="accent1"/>
+          </a:lnRef>
+          <a:fillRef idx="3">
+            <a:schemeClr val="accent1"/>
+          </a:fillRef>
+          <a:effectRef idx="2">
+            <a:schemeClr val="accent1"/>
+          </a:effectRef>
+          <a:fontRef idx="minor">
+            <a:schemeClr val="lt1"/>
+          </a:fontRef>
+        </p:style>
+        <p:txBody>
+          <a:bodyPr rtlCol="0" anchor="ctr"/>
+          <a:lstStyle/>
+          <a:p>
+            <a:pPr algn="ctr"/>
+          </a:p>
+        </p:txBody>
+      </p:sp>
+      <p:sp>
+        <p:nvSpPr>
+          <p:cNvPr id="19" name="TextBox 18"/>
+          <p:cNvSpPr txBox="1"/>
+          <p:nvPr/>
+        </p:nvSpPr>
+        <p:spPr>
+          <a:xfrm>
+            <a:off x="8961120" y="1389888"/>
+            <a:ext cx="2834640" cy="292608"/>
+          </a:xfrm>
+          <a:prstGeom prst="rect">
+            <a:avLst/>
+          </a:prstGeom>
+          <a:noFill/>
+        </p:spPr>
+        <p:txBody>
+          <a:bodyPr wrap="square" lIns="18288" rIns="18288" anchor="ctr">
+            <a:spAutoFit/>
+          </a:bodyPr>
+          <a:lstStyle/>
+          <a:p>
+            <a:pPr algn="l">
+              <a:spcBef>
+                <a:spcPts val="0"/>
+              </a:spcBef>
+              <a:spcAft>
+                <a:spcPts val="200"/>
+              </a:spcAft>
+            </a:pPr>
+            <a:r>
+              <a:rPr sz="1200" b="1">
+                <a:solidFill>
+                  <a:srgbClr val="22D3EE"/>
+                </a:solidFill>
+                <a:latin typeface="WenQuanYi Micro Hei"/>
+                <a:ea typeface="WenQuanYi Micro Hei"/>
+                <a:cs typeface="WenQuanYi Micro Hei"/>
+              </a:rPr>
+              <a:t>2026–</a:t>
+            </a:r>
+          </a:p>
+        </p:txBody>
+      </p:sp>
+      <p:sp>
+        <p:nvSpPr>
+          <p:cNvPr id="20" name="TextBox 19"/>
+          <p:cNvSpPr txBox="1"/>
+          <p:nvPr/>
+        </p:nvSpPr>
+        <p:spPr>
+          <a:xfrm>
+            <a:off x="8961120" y="2286000"/>
+            <a:ext cx="3017520" cy="365760"/>
+          </a:xfrm>
+          <a:prstGeom prst="rect">
+            <a:avLst/>
+          </a:prstGeom>
+          <a:noFill/>
+        </p:spPr>
+        <p:txBody>
+          <a:bodyPr wrap="square" lIns="18288" rIns="18288" anchor="ctr">
+            <a:spAutoFit/>
+          </a:bodyPr>
+          <a:lstStyle/>
+          <a:p>
+            <a:pPr algn="l">
+              <a:spcBef>
+                <a:spcPts val="0"/>
+              </a:spcBef>
+              <a:spcAft>
+                <a:spcPts val="200"/>
+              </a:spcAft>
+            </a:pPr>
+            <a:r>
+              <a:rPr sz="1300" b="1">
+                <a:solidFill>
+                  <a:srgbClr val="F8FAFC"/>
+                </a:solidFill>
+                <a:latin typeface="WenQuanYi Micro Hei"/>
+                <a:ea typeface="WenQuanYi Micro Hei"/>
+                <a:cs typeface="WenQuanYi Micro Hei"/>
+              </a:rPr>
+              <a:t>上海眸深  ·  SLAM 算法工程师</a:t>
+            </a:r>
+          </a:p>
+        </p:txBody>
+      </p:sp>
+      <p:sp>
+        <p:nvSpPr>
+          <p:cNvPr id="21" name="TextBox 20"/>
+          <p:cNvSpPr txBox="1"/>
+          <p:nvPr/>
+        </p:nvSpPr>
+        <p:spPr>
+          <a:xfrm>
+            <a:off x="8961120" y="2651760"/>
+            <a:ext cx="3017520" cy="502920"/>
+          </a:xfrm>
+          <a:prstGeom prst="rect">
+            <a:avLst/>
+          </a:prstGeom>
+          <a:noFill/>
+        </p:spPr>
+        <p:txBody>
+          <a:bodyPr wrap="square" lIns="18288" rIns="18288" anchor="ctr">
+            <a:spAutoFit/>
+          </a:bodyPr>
+          <a:lstStyle/>
+          <a:p>
+            <a:pPr algn="l">
+              <a:spcBef>
+                <a:spcPts val="0"/>
+              </a:spcBef>
+              <a:spcAft>
+                <a:spcPts val="200"/>
+              </a:spcAft>
+            </a:pPr>
+            <a:r>
+              <a:rPr sz="1200" b="0">
+                <a:solidFill>
+                  <a:srgbClr val="94A3B8"/>
+                </a:solidFill>
+                <a:latin typeface="WenQuanYi Micro Hei"/>
+                <a:ea typeface="WenQuanYi Micro Hei"/>
+                <a:cs typeface="WenQuanYi Micro Hei"/>
+              </a:rPr>
+              <a:t>Go2 板载导航  ·  ForkSpatialLink 边端协同</a:t>
+            </a:r>
+          </a:p>
+        </p:txBody>
+      </p:sp>
+      <p:sp>
+        <p:nvSpPr>
+          <p:cNvPr id="22" name="Rounded Rectangle 21"/>
+          <p:cNvSpPr/>
+          <p:nvPr/>
+        </p:nvSpPr>
+        <p:spPr>
+          <a:xfrm>
+            <a:off x="411480" y="3566160"/>
+            <a:ext cx="2743200" cy="2606040"/>
+          </a:xfrm>
+          <a:prstGeom prst="roundRect">
+            <a:avLst>
+              <a:gd name="adj" fmla="val 8000"/>
+            </a:avLst>
+          </a:prstGeom>
+          <a:solidFill>
+            <a:srgbClr val="151D2E"/>
+          </a:solidFill>
+          <a:ln w="14604">
+            <a:solidFill>
+              <a:srgbClr val="34D399"/>
+            </a:solidFill>
+          </a:ln>
+          <a:effectLst/>
+        </p:spPr>
+        <p:style>
+          <a:lnRef idx="1">
+            <a:schemeClr val="accent1"/>
+          </a:lnRef>
+          <a:fillRef idx="3">
+            <a:schemeClr val="accent1"/>
+          </a:fillRef>
+          <a:effectRef idx="2">
+            <a:schemeClr val="accent1"/>
+          </a:effectRef>
+          <a:fontRef idx="minor">
+            <a:schemeClr val="lt1"/>
+          </a:fontRef>
+        </p:style>
+        <p:txBody>
+          <a:bodyPr rtlCol="0" anchor="ctr"/>
+          <a:lstStyle/>
+          <a:p>
+            <a:pPr algn="ctr"/>
+          </a:p>
+        </p:txBody>
+      </p:sp>
+      <p:sp>
+        <p:nvSpPr>
+          <p:cNvPr id="23" name="Rectangle 22"/>
+          <p:cNvSpPr/>
+          <p:nvPr/>
+        </p:nvSpPr>
+        <p:spPr>
+          <a:xfrm>
+            <a:off x="411480" y="3566160"/>
+            <a:ext cx="2743200" cy="73152"/>
+          </a:xfrm>
+          <a:prstGeom prst="rect">
+            <a:avLst/>
+          </a:prstGeom>
+          <a:solidFill>
+            <a:srgbClr val="34D399"/>
+          </a:solidFill>
+          <a:ln>
+            <a:noFill/>
+          </a:ln>
+          <a:effectLst/>
+        </p:spPr>
+        <p:style>
+          <a:lnRef idx="1">
+            <a:schemeClr val="accent1"/>
+          </a:lnRef>
+          <a:fillRef idx="3">
+            <a:schemeClr val="accent1"/>
+          </a:fillRef>
+          <a:effectRef idx="2">
+            <a:schemeClr val="accent1"/>
+          </a:effectRef>
+          <a:fontRef idx="minor">
+            <a:schemeClr val="lt1"/>
+          </a:fontRef>
+        </p:style>
+        <p:txBody>
+          <a:bodyPr rtlCol="0" anchor="ctr"/>
+          <a:lstStyle/>
+          <a:p>
+            <a:pPr algn="ctr"/>
+          </a:p>
+        </p:txBody>
+      </p:sp>
+      <p:sp>
+        <p:nvSpPr>
+          <p:cNvPr id="24" name="TextBox 23"/>
+          <p:cNvSpPr txBox="1"/>
+          <p:nvPr/>
+        </p:nvSpPr>
+        <p:spPr>
+          <a:xfrm>
+            <a:off x="548640" y="3749039"/>
+            <a:ext cx="2468880" cy="502920"/>
+          </a:xfrm>
+          <a:prstGeom prst="rect">
+            <a:avLst/>
+          </a:prstGeom>
+          <a:noFill/>
+        </p:spPr>
+        <p:txBody>
+          <a:bodyPr wrap="square" lIns="18288" rIns="18288" anchor="ctr">
+            <a:spAutoFit/>
+          </a:bodyPr>
+          <a:lstStyle/>
+          <a:p>
+            <a:pPr algn="l">
+              <a:spcBef>
+                <a:spcPts val="0"/>
+              </a:spcBef>
+              <a:spcAft>
+                <a:spcPts val="200"/>
+              </a:spcAft>
+            </a:pPr>
+            <a:r>
+              <a:rPr sz="1500" b="1">
+                <a:solidFill>
+                  <a:srgbClr val="F8FAFC"/>
+                </a:solidFill>
+                <a:latin typeface="WenQuanYi Micro Hei"/>
+                <a:ea typeface="WenQuanYi Micro Hei"/>
+                <a:cs typeface="WenQuanYi Micro Hei"/>
+              </a:rPr>
+              <a:t>多机协同 SLAM</a:t>
+            </a:r>
+          </a:p>
+        </p:txBody>
+      </p:sp>
+      <p:sp>
+        <p:nvSpPr>
+          <p:cNvPr id="25" name="TextBox 24"/>
+          <p:cNvSpPr txBox="1"/>
+          <p:nvPr/>
+        </p:nvSpPr>
+        <p:spPr>
+          <a:xfrm>
+            <a:off x="548640" y="4251960"/>
+            <a:ext cx="2468880" cy="274320"/>
+          </a:xfrm>
+          <a:prstGeom prst="rect">
+            <a:avLst/>
+          </a:prstGeom>
+          <a:noFill/>
+        </p:spPr>
+        <p:txBody>
+          <a:bodyPr wrap="square" lIns="18288" rIns="18288" anchor="ctr">
+            <a:spAutoFit/>
+          </a:bodyPr>
+          <a:lstStyle/>
+          <a:p>
+            <a:pPr algn="l">
+              <a:spcBef>
+                <a:spcPts val="0"/>
+              </a:spcBef>
+              <a:spcAft>
+                <a:spcPts val="200"/>
+              </a:spcAft>
+            </a:pPr>
+            <a:r>
+              <a:rPr sz="1200" b="0">
+                <a:solidFill>
+                  <a:srgbClr val="34D399"/>
+                </a:solidFill>
+                <a:latin typeface="WenQuanYi Micro Hei"/>
+                <a:ea typeface="WenQuanYi Micro Hei"/>
+                <a:cs typeface="WenQuanYi Micro Hei"/>
+              </a:rPr>
+              <a:t>独立完成</a:t>
+            </a:r>
+          </a:p>
+        </p:txBody>
+      </p:sp>
+      <p:sp>
+        <p:nvSpPr>
+          <p:cNvPr id="26" name="TextBox 25"/>
+          <p:cNvSpPr txBox="1"/>
+          <p:nvPr/>
+        </p:nvSpPr>
+        <p:spPr>
+          <a:xfrm>
+            <a:off x="548640" y="4663440"/>
+            <a:ext cx="2468880" cy="1188720"/>
+          </a:xfrm>
+          <a:prstGeom prst="rect">
+            <a:avLst/>
+          </a:prstGeom>
+          <a:noFill/>
+        </p:spPr>
+        <p:txBody>
+          <a:bodyPr wrap="square" lIns="18288" rIns="18288" anchor="ctr">
+            <a:spAutoFit/>
+          </a:bodyPr>
+          <a:lstStyle/>
+          <a:p>
+            <a:pPr algn="l">
+              <a:spcBef>
+                <a:spcPts val="0"/>
+              </a:spcBef>
+              <a:spcAft>
+                <a:spcPts val="200"/>
+              </a:spcAft>
+            </a:pPr>
+            <a:r>
+              <a:rPr sz="1300" b="0">
+                <a:solidFill>
+                  <a:srgbClr val="94A3B8"/>
+                </a:solidFill>
+                <a:latin typeface="WenQuanYi Micro Hei"/>
+                <a:ea typeface="WenQuanYi Micro Hei"/>
+                <a:cs typeface="WenQuanYi Micro Hei"/>
+              </a:rPr>
+              <a:t>SHM 零拷贝  CPU −35%~50%</a:t>
+            </a:r>
+          </a:p>
+        </p:txBody>
+      </p:sp>
+      <p:sp>
+        <p:nvSpPr>
+          <p:cNvPr id="27" name="Rounded Rectangle 26"/>
+          <p:cNvSpPr/>
+          <p:nvPr/>
+        </p:nvSpPr>
+        <p:spPr>
+          <a:xfrm>
+            <a:off x="3337560" y="3566160"/>
+            <a:ext cx="2743200" cy="2606040"/>
+          </a:xfrm>
+          <a:prstGeom prst="roundRect">
+            <a:avLst>
+              <a:gd name="adj" fmla="val 8000"/>
+            </a:avLst>
+          </a:prstGeom>
+          <a:solidFill>
+            <a:srgbClr val="151D2E"/>
+          </a:solidFill>
+          <a:ln w="14604">
+            <a:solidFill>
+              <a:srgbClr val="FBBF24"/>
+            </a:solidFill>
+          </a:ln>
+          <a:effectLst/>
+        </p:spPr>
+        <p:style>
+          <a:lnRef idx="1">
+            <a:schemeClr val="accent1"/>
+          </a:lnRef>
+          <a:fillRef idx="3">
+            <a:schemeClr val="accent1"/>
+          </a:fillRef>
+          <a:effectRef idx="2">
+            <a:schemeClr val="accent1"/>
+          </a:effectRef>
+          <a:fontRef idx="minor">
+            <a:schemeClr val="lt1"/>
+          </a:fontRef>
+        </p:style>
+        <p:txBody>
+          <a:bodyPr rtlCol="0" anchor="ctr"/>
+          <a:lstStyle/>
+          <a:p>
+            <a:pPr algn="ctr"/>
+          </a:p>
+        </p:txBody>
+      </p:sp>
+      <p:sp>
+        <p:nvSpPr>
+          <p:cNvPr id="28" name="Rectangle 27"/>
+          <p:cNvSpPr/>
+          <p:nvPr/>
+        </p:nvSpPr>
+        <p:spPr>
+          <a:xfrm>
+            <a:off x="3337560" y="3566160"/>
+            <a:ext cx="2743200" cy="73152"/>
+          </a:xfrm>
+          <a:prstGeom prst="rect">
+            <a:avLst/>
+          </a:prstGeom>
+          <a:solidFill>
+            <a:srgbClr val="FBBF24"/>
+          </a:solidFill>
+          <a:ln>
+            <a:noFill/>
+          </a:ln>
+          <a:effectLst/>
+        </p:spPr>
+        <p:style>
+          <a:lnRef idx="1">
+            <a:schemeClr val="accent1"/>
+          </a:lnRef>
+          <a:fillRef idx="3">
+            <a:schemeClr val="accent1"/>
+          </a:fillRef>
+          <a:effectRef idx="2">
+            <a:schemeClr val="accent1"/>
+          </a:effectRef>
+          <a:fontRef idx="minor">
+            <a:schemeClr val="lt1"/>
+          </a:fontRef>
+        </p:style>
+        <p:txBody>
+          <a:bodyPr rtlCol="0" anchor="ctr"/>
+          <a:lstStyle/>
+          <a:p>
+            <a:pPr algn="ctr"/>
+          </a:p>
+        </p:txBody>
+      </p:sp>
+      <p:sp>
+        <p:nvSpPr>
+          <p:cNvPr id="29" name="TextBox 28"/>
+          <p:cNvSpPr txBox="1"/>
+          <p:nvPr/>
+        </p:nvSpPr>
+        <p:spPr>
+          <a:xfrm>
+            <a:off x="3474720" y="3749039"/>
+            <a:ext cx="2468880" cy="502920"/>
+          </a:xfrm>
+          <a:prstGeom prst="rect">
+            <a:avLst/>
+          </a:prstGeom>
+          <a:noFill/>
+        </p:spPr>
+        <p:txBody>
+          <a:bodyPr wrap="square" lIns="18288" rIns="18288" anchor="ctr">
+            <a:spAutoFit/>
+          </a:bodyPr>
+          <a:lstStyle/>
+          <a:p>
+            <a:pPr algn="l">
+              <a:spcBef>
+                <a:spcPts val="0"/>
+              </a:spcBef>
+              <a:spcAft>
+                <a:spcPts val="200"/>
+              </a:spcAft>
+            </a:pPr>
+            <a:r>
+              <a:rPr sz="1500" b="1">
+                <a:solidFill>
+                  <a:srgbClr val="F8FAFC"/>
+                </a:solidFill>
+                <a:latin typeface="WenQuanYi Micro Hei"/>
+                <a:ea typeface="WenQuanYi Micro Hei"/>
+                <a:cs typeface="WenQuanYi Micro Hei"/>
+              </a:rPr>
+              <a:t>无 GPS 巡检航线</a:t>
+            </a:r>
+          </a:p>
+        </p:txBody>
+      </p:sp>
+      <p:sp>
+        <p:nvSpPr>
+          <p:cNvPr id="30" name="TextBox 29"/>
+          <p:cNvSpPr txBox="1"/>
+          <p:nvPr/>
+        </p:nvSpPr>
+        <p:spPr>
+          <a:xfrm>
+            <a:off x="3474720" y="4251960"/>
+            <a:ext cx="2468880" cy="274320"/>
+          </a:xfrm>
+          <a:prstGeom prst="rect">
+            <a:avLst/>
+          </a:prstGeom>
+          <a:noFill/>
+        </p:spPr>
+        <p:txBody>
+          <a:bodyPr wrap="square" lIns="18288" rIns="18288" anchor="ctr">
+            <a:spAutoFit/>
+          </a:bodyPr>
+          <a:lstStyle/>
+          <a:p>
+            <a:pPr algn="l">
+              <a:spcBef>
+                <a:spcPts val="0"/>
+              </a:spcBef>
+              <a:spcAft>
+                <a:spcPts val="200"/>
+              </a:spcAft>
+            </a:pPr>
+            <a:r>
+              <a:rPr sz="1200" b="0">
+                <a:solidFill>
+                  <a:srgbClr val="FBBF24"/>
+                </a:solidFill>
+                <a:latin typeface="WenQuanYi Micro Hei"/>
+                <a:ea typeface="WenQuanYi Micro Hei"/>
+                <a:cs typeface="WenQuanYi Micro Hei"/>
+              </a:rPr>
+              <a:t>项目负责人</a:t>
+            </a:r>
+          </a:p>
+        </p:txBody>
+      </p:sp>
+      <p:sp>
+        <p:nvSpPr>
+          <p:cNvPr id="31" name="TextBox 30"/>
+          <p:cNvSpPr txBox="1"/>
+          <p:nvPr/>
+        </p:nvSpPr>
+        <p:spPr>
+          <a:xfrm>
+            <a:off x="3474720" y="4663440"/>
+            <a:ext cx="2468880" cy="1188720"/>
+          </a:xfrm>
+          <a:prstGeom prst="rect">
+            <a:avLst/>
+          </a:prstGeom>
+          <a:noFill/>
+        </p:spPr>
+        <p:txBody>
+          <a:bodyPr wrap="square" lIns="18288" rIns="18288" anchor="ctr">
+            <a:spAutoFit/>
+          </a:bodyPr>
+          <a:lstStyle/>
+          <a:p>
+            <a:pPr algn="l">
+              <a:spcBef>
+                <a:spcPts val="0"/>
+              </a:spcBef>
+              <a:spcAft>
+                <a:spcPts val="200"/>
+              </a:spcAft>
+            </a:pPr>
+            <a:r>
+              <a:rPr sz="1300" b="0">
+                <a:solidFill>
+                  <a:srgbClr val="94A3B8"/>
+                </a:solidFill>
+                <a:latin typeface="WenQuanYi Micro Hei"/>
+                <a:ea typeface="WenQuanYi Micro Hei"/>
+                <a:cs typeface="WenQuanYi Micro Hei"/>
+              </a:rPr>
+              <a:t>Mission Contract  ·  WGS84↔ENU</a:t>
+            </a:r>
+          </a:p>
+        </p:txBody>
+      </p:sp>
+      <p:sp>
+        <p:nvSpPr>
+          <p:cNvPr id="32" name="Rounded Rectangle 31"/>
+          <p:cNvSpPr/>
+          <p:nvPr/>
+        </p:nvSpPr>
+        <p:spPr>
+          <a:xfrm>
+            <a:off x="6263640" y="3566160"/>
+            <a:ext cx="2743200" cy="2606040"/>
+          </a:xfrm>
+          <a:prstGeom prst="roundRect">
+            <a:avLst>
+              <a:gd name="adj" fmla="val 8000"/>
+            </a:avLst>
+          </a:prstGeom>
+          <a:solidFill>
+            <a:srgbClr val="151D2E"/>
+          </a:solidFill>
+          <a:ln w="14604">
+            <a:solidFill>
+              <a:srgbClr val="22D3EE"/>
+            </a:solidFill>
+          </a:ln>
+          <a:effectLst/>
+        </p:spPr>
+        <p:style>
+          <a:lnRef idx="1">
+            <a:schemeClr val="accent1"/>
+          </a:lnRef>
+          <a:fillRef idx="3">
+            <a:schemeClr val="accent1"/>
+          </a:fillRef>
+          <a:effectRef idx="2">
+            <a:schemeClr val="accent1"/>
+          </a:effectRef>
+          <a:fontRef idx="minor">
+            <a:schemeClr val="lt1"/>
+          </a:fontRef>
+        </p:style>
+        <p:txBody>
+          <a:bodyPr rtlCol="0" anchor="ctr"/>
+          <a:lstStyle/>
+          <a:p>
+            <a:pPr algn="ctr"/>
+          </a:p>
+        </p:txBody>
+      </p:sp>
+      <p:sp>
+        <p:nvSpPr>
+          <p:cNvPr id="33" name="Rectangle 32"/>
+          <p:cNvSpPr/>
+          <p:nvPr/>
+        </p:nvSpPr>
+        <p:spPr>
+          <a:xfrm>
+            <a:off x="6263640" y="3566160"/>
+            <a:ext cx="2743200" cy="73152"/>
+          </a:xfrm>
+          <a:prstGeom prst="rect">
+            <a:avLst/>
+          </a:prstGeom>
+          <a:solidFill>
+            <a:srgbClr val="22D3EE"/>
+          </a:solidFill>
+          <a:ln>
+            <a:noFill/>
+          </a:ln>
+          <a:effectLst/>
+        </p:spPr>
+        <p:style>
+          <a:lnRef idx="1">
+            <a:schemeClr val="accent1"/>
+          </a:lnRef>
+          <a:fillRef idx="3">
+            <a:schemeClr val="accent1"/>
+          </a:fillRef>
+          <a:effectRef idx="2">
+            <a:schemeClr val="accent1"/>
+          </a:effectRef>
+          <a:fontRef idx="minor">
+            <a:schemeClr val="lt1"/>
+          </a:fontRef>
+        </p:style>
+        <p:txBody>
+          <a:bodyPr rtlCol="0" anchor="ctr"/>
+          <a:lstStyle/>
+          <a:p>
+            <a:pPr algn="ctr"/>
+          </a:p>
+        </p:txBody>
+      </p:sp>
+      <p:sp>
+        <p:nvSpPr>
+          <p:cNvPr id="34" name="TextBox 33"/>
+          <p:cNvSpPr txBox="1"/>
+          <p:nvPr/>
+        </p:nvSpPr>
+        <p:spPr>
+          <a:xfrm>
+            <a:off x="6400800" y="3749039"/>
+            <a:ext cx="2468880" cy="502920"/>
+          </a:xfrm>
+          <a:prstGeom prst="rect">
+            <a:avLst/>
+          </a:prstGeom>
+          <a:noFill/>
+        </p:spPr>
+        <p:txBody>
+          <a:bodyPr wrap="square" lIns="18288" rIns="18288" anchor="ctr">
+            <a:spAutoFit/>
+          </a:bodyPr>
+          <a:lstStyle/>
+          <a:p>
+            <a:pPr algn="l">
+              <a:spcBef>
+                <a:spcPts val="0"/>
+              </a:spcBef>
+              <a:spcAft>
+                <a:spcPts val="200"/>
+              </a:spcAft>
+            </a:pPr>
+            <a:r>
+              <a:rPr sz="1500" b="1">
+                <a:solidFill>
+                  <a:srgbClr val="F8FAFC"/>
+                </a:solidFill>
+                <a:latin typeface="WenQuanYi Micro Hei"/>
+                <a:ea typeface="WenQuanYi Micro Hei"/>
+                <a:cs typeface="WenQuanYi Micro Hei"/>
+              </a:rPr>
+              <a:t>地铁清洁机器人</a:t>
+            </a:r>
+          </a:p>
+        </p:txBody>
+      </p:sp>
+      <p:sp>
+        <p:nvSpPr>
+          <p:cNvPr id="35" name="TextBox 34"/>
+          <p:cNvSpPr txBox="1"/>
+          <p:nvPr/>
+        </p:nvSpPr>
+        <p:spPr>
+          <a:xfrm>
+            <a:off x="6400800" y="4251960"/>
+            <a:ext cx="2468880" cy="274320"/>
+          </a:xfrm>
+          <a:prstGeom prst="rect">
+            <a:avLst/>
+          </a:prstGeom>
+          <a:noFill/>
+        </p:spPr>
+        <p:txBody>
+          <a:bodyPr wrap="square" lIns="18288" rIns="18288" anchor="ctr">
+            <a:spAutoFit/>
+          </a:bodyPr>
+          <a:lstStyle/>
+          <a:p>
+            <a:pPr algn="l">
+              <a:spcBef>
+                <a:spcPts val="0"/>
+              </a:spcBef>
+              <a:spcAft>
+                <a:spcPts val="200"/>
+              </a:spcAft>
+            </a:pPr>
+            <a:r>
+              <a:rPr sz="1200" b="0">
+                <a:solidFill>
+                  <a:srgbClr val="22D3EE"/>
+                </a:solidFill>
+                <a:latin typeface="WenQuanYi Micro Hei"/>
+                <a:ea typeface="WenQuanYi Micro Hei"/>
+                <a:cs typeface="WenQuanYi Micro Hei"/>
+              </a:rPr>
+              <a:t>工程师</a:t>
+            </a:r>
+          </a:p>
+        </p:txBody>
+      </p:sp>
+      <p:sp>
+        <p:nvSpPr>
+          <p:cNvPr id="36" name="TextBox 35"/>
+          <p:cNvSpPr txBox="1"/>
+          <p:nvPr/>
+        </p:nvSpPr>
+        <p:spPr>
+          <a:xfrm>
+            <a:off x="6400800" y="4663440"/>
+            <a:ext cx="2468880" cy="1188720"/>
+          </a:xfrm>
+          <a:prstGeom prst="rect">
+            <a:avLst/>
+          </a:prstGeom>
+          <a:noFill/>
+        </p:spPr>
+        <p:txBody>
+          <a:bodyPr wrap="square" lIns="18288" rIns="18288" anchor="ctr">
+            <a:spAutoFit/>
+          </a:bodyPr>
+          <a:lstStyle/>
+          <a:p>
+            <a:pPr algn="l">
+              <a:spcBef>
+                <a:spcPts val="0"/>
+              </a:spcBef>
+              <a:spcAft>
+                <a:spcPts val="200"/>
+              </a:spcAft>
+            </a:pPr>
+            <a:r>
+              <a:rPr sz="1300" b="0">
+                <a:solidFill>
+                  <a:srgbClr val="94A3B8"/>
+                </a:solidFill>
+                <a:latin typeface="WenQuanYi Micro Hei"/>
+                <a:ea typeface="WenQuanYi Micro Hei"/>
+                <a:cs typeface="WenQuanYi Micro Hei"/>
+              </a:rPr>
+              <a:t>LIO-SAM  ·  7×24 长时</a:t>
+            </a:r>
+          </a:p>
+        </p:txBody>
+      </p:sp>
+      <p:sp>
+        <p:nvSpPr>
+          <p:cNvPr id="37" name="Rounded Rectangle 36"/>
+          <p:cNvSpPr/>
+          <p:nvPr/>
+        </p:nvSpPr>
+        <p:spPr>
+          <a:xfrm>
+            <a:off x="9189720" y="3566160"/>
+            <a:ext cx="2743200" cy="2606040"/>
+          </a:xfrm>
+          <a:prstGeom prst="roundRect">
+            <a:avLst>
+              <a:gd name="adj" fmla="val 8000"/>
+            </a:avLst>
+          </a:prstGeom>
+          <a:solidFill>
+            <a:srgbClr val="151D2E"/>
+          </a:solidFill>
+          <a:ln w="14604">
+            <a:solidFill>
+              <a:srgbClr val="A78BFA"/>
+            </a:solidFill>
+          </a:ln>
+          <a:effectLst/>
+        </p:spPr>
+        <p:style>
+          <a:lnRef idx="1">
+            <a:schemeClr val="accent1"/>
+          </a:lnRef>
+          <a:fillRef idx="3">
+            <a:schemeClr val="accent1"/>
+          </a:fillRef>
+          <a:effectRef idx="2">
+            <a:schemeClr val="accent1"/>
+          </a:effectRef>
+          <a:fontRef idx="minor">
+            <a:schemeClr val="lt1"/>
+          </a:fontRef>
+        </p:style>
+        <p:txBody>
+          <a:bodyPr rtlCol="0" anchor="ctr"/>
+          <a:lstStyle/>
+          <a:p>
+            <a:pPr algn="ctr"/>
+          </a:p>
+        </p:txBody>
+      </p:sp>
+      <p:sp>
+        <p:nvSpPr>
+          <p:cNvPr id="38" name="Rectangle 37"/>
+          <p:cNvSpPr/>
+          <p:nvPr/>
+        </p:nvSpPr>
+        <p:spPr>
+          <a:xfrm>
+            <a:off x="9189720" y="3566160"/>
+            <a:ext cx="2743200" cy="73152"/>
+          </a:xfrm>
+          <a:prstGeom prst="rect">
+            <a:avLst/>
+          </a:prstGeom>
+          <a:solidFill>
+            <a:srgbClr val="A78BFA"/>
+          </a:solidFill>
+          <a:ln>
+            <a:noFill/>
+          </a:ln>
+          <a:effectLst/>
+        </p:spPr>
+        <p:style>
+          <a:lnRef idx="1">
+            <a:schemeClr val="accent1"/>
+          </a:lnRef>
+          <a:fillRef idx="3">
+            <a:schemeClr val="accent1"/>
+          </a:fillRef>
+          <a:effectRef idx="2">
+            <a:schemeClr val="accent1"/>
+          </a:effectRef>
+          <a:fontRef idx="minor">
+            <a:schemeClr val="lt1"/>
+          </a:fontRef>
+        </p:style>
+        <p:txBody>
+          <a:bodyPr rtlCol="0" anchor="ctr"/>
+          <a:lstStyle/>
+          <a:p>
+            <a:pPr algn="ctr"/>
+          </a:p>
+        </p:txBody>
+      </p:sp>
+      <p:sp>
+        <p:nvSpPr>
+          <p:cNvPr id="39" name="TextBox 38"/>
+          <p:cNvSpPr txBox="1"/>
+          <p:nvPr/>
+        </p:nvSpPr>
+        <p:spPr>
+          <a:xfrm>
+            <a:off x="9326880" y="3749039"/>
+            <a:ext cx="2468880" cy="502920"/>
+          </a:xfrm>
+          <a:prstGeom prst="rect">
+            <a:avLst/>
+          </a:prstGeom>
+          <a:noFill/>
+        </p:spPr>
+        <p:txBody>
+          <a:bodyPr wrap="square" lIns="18288" rIns="18288" anchor="ctr">
+            <a:spAutoFit/>
+          </a:bodyPr>
+          <a:lstStyle/>
+          <a:p>
+            <a:pPr algn="l">
+              <a:spcBef>
+                <a:spcPts val="0"/>
+              </a:spcBef>
+              <a:spcAft>
+                <a:spcPts val="200"/>
+              </a:spcAft>
+            </a:pPr>
+            <a:r>
+              <a:rPr sz="1500" b="1">
+                <a:solidFill>
+                  <a:srgbClr val="F8FAFC"/>
+                </a:solidFill>
+                <a:latin typeface="WenQuanYi Micro Hei"/>
+                <a:ea typeface="WenQuanYi Micro Hei"/>
+                <a:cs typeface="WenQuanYi Micro Hei"/>
+              </a:rPr>
+              <a:t>RK3588 巡航 AGV</a:t>
+            </a:r>
+          </a:p>
+        </p:txBody>
+      </p:sp>
+      <p:sp>
+        <p:nvSpPr>
+          <p:cNvPr id="40" name="TextBox 39"/>
+          <p:cNvSpPr txBox="1"/>
+          <p:nvPr/>
+        </p:nvSpPr>
+        <p:spPr>
+          <a:xfrm>
+            <a:off x="9326880" y="4251960"/>
+            <a:ext cx="2468880" cy="274320"/>
+          </a:xfrm>
+          <a:prstGeom prst="rect">
+            <a:avLst/>
+          </a:prstGeom>
+          <a:noFill/>
+        </p:spPr>
+        <p:txBody>
+          <a:bodyPr wrap="square" lIns="18288" rIns="18288" anchor="ctr">
+            <a:spAutoFit/>
+          </a:bodyPr>
+          <a:lstStyle/>
+          <a:p>
+            <a:pPr algn="l">
+              <a:spcBef>
+                <a:spcPts val="0"/>
+              </a:spcBef>
+              <a:spcAft>
+                <a:spcPts val="200"/>
+              </a:spcAft>
+            </a:pPr>
+            <a:r>
+              <a:rPr sz="1200" b="0">
+                <a:solidFill>
+                  <a:srgbClr val="A78BFA"/>
+                </a:solidFill>
+                <a:latin typeface="WenQuanYi Micro Hei"/>
+                <a:ea typeface="WenQuanYi Micro Hei"/>
+                <a:cs typeface="WenQuanYi Micro Hei"/>
+              </a:rPr>
+              <a:t>工程师</a:t>
+            </a:r>
+          </a:p>
+        </p:txBody>
+      </p:sp>
+      <p:sp>
+        <p:nvSpPr>
+          <p:cNvPr id="41" name="TextBox 40"/>
+          <p:cNvSpPr txBox="1"/>
+          <p:nvPr/>
+        </p:nvSpPr>
+        <p:spPr>
+          <a:xfrm>
+            <a:off x="9326880" y="4663440"/>
+            <a:ext cx="2468880" cy="1188720"/>
+          </a:xfrm>
+          <a:prstGeom prst="rect">
+            <a:avLst/>
+          </a:prstGeom>
+          <a:noFill/>
+        </p:spPr>
+        <p:txBody>
+          <a:bodyPr wrap="square" lIns="18288" rIns="18288" anchor="ctr">
+            <a:spAutoFit/>
+          </a:bodyPr>
+          <a:lstStyle/>
+          <a:p>
+            <a:pPr algn="l">
+              <a:spcBef>
+                <a:spcPts val="0"/>
+              </a:spcBef>
+              <a:spcAft>
+                <a:spcPts val="200"/>
+              </a:spcAft>
+            </a:pPr>
+            <a:r>
+              <a:rPr sz="1300" b="0">
+                <a:solidFill>
+                  <a:srgbClr val="94A3B8"/>
+                </a:solidFill>
+                <a:latin typeface="WenQuanYi Micro Hei"/>
+                <a:ea typeface="WenQuanYi Micro Hei"/>
+                <a:cs typeface="WenQuanYi Micro Hei"/>
+              </a:rPr>
+              <a:t>YOLO→RKNN INT8  ·  感知控制解耦</a:t>
+            </a:r>
+          </a:p>
+        </p:txBody>
+      </p:sp>
+      <p:sp>
+        <p:nvSpPr>
+          <p:cNvPr id="42" name="TextBox 41"/>
+          <p:cNvSpPr txBox="1"/>
+          <p:nvPr/>
+        </p:nvSpPr>
+        <p:spPr>
+          <a:xfrm>
+            <a:off x="411480" y="6537960"/>
+            <a:ext cx="8686800" cy="256032"/>
+          </a:xfrm>
+          <a:prstGeom prst="rect">
+            <a:avLst/>
+          </a:prstGeom>
+          <a:noFill/>
+        </p:spPr>
+        <p:txBody>
+          <a:bodyPr wrap="square" lIns="18288" rIns="18288" anchor="ctr">
+            <a:spAutoFit/>
+          </a:bodyPr>
+          <a:lstStyle/>
+          <a:p>
+            <a:pPr algn="l">
+              <a:spcBef>
+                <a:spcPts val="0"/>
+              </a:spcBef>
+              <a:spcAft>
+                <a:spcPts val="200"/>
+              </a:spcAft>
+            </a:pPr>
+            <a:r>
+              <a:rPr sz="1000" b="0">
+                <a:solidFill>
+                  <a:srgbClr val="64748B"/>
+                </a:solidFill>
+                <a:latin typeface="WenQuanYi Micro Hei"/>
+                <a:ea typeface="WenQuanYi Micro Hei"/>
+                <a:cs typeface="WenQuanYi Micro Hei"/>
+              </a:rPr>
+              <a:t>曾欣宇  ·  资源受限场景下的具身导航</a:t>
+            </a:r>
+          </a:p>
+        </p:txBody>
+      </p:sp>
+      <p:sp>
+        <p:nvSpPr>
+          <p:cNvPr id="43" name="TextBox 42"/>
           <p:cNvSpPr txBox="1"/>
           <p:nvPr/>
         </p:nvSpPr>
@@ -7185,7 +9582,7 @@
       </p:sp>
       <p:pic>
         <p:nvPicPr>
-          <p:cNvPr id="4" name="Picture 3" descr="pipeline.png"/>
+          <p:cNvPr id="4" name="Picture 3" descr="j1.png"/>
           <p:cNvPicPr>
             <a:picLocks noChangeAspect="1"/>
           </p:cNvPicPr>
@@ -7216,7 +9613,7 @@
         <p:spPr>
           <a:xfrm>
             <a:off x="411480" y="6537960"/>
-            <a:ext cx="8229600" cy="256032"/>
+            <a:ext cx="8686800" cy="256032"/>
           </a:xfrm>
           <a:prstGeom prst="rect">
             <a:avLst/>
@@ -7246,7 +9643,7 @@
                 <a:ea typeface="WenQuanYi Micro Hei"/>
                 <a:cs typeface="WenQuanYi Micro Hei"/>
               </a:rPr>
-              <a:t>曾欣宇  ·  空间导航算法部署  ·  对外沟通</a:t>
+              <a:t>曾欣宇  ·  资源受限场景下的具身导航</a:t>
             </a:r>
           </a:p>
         </p:txBody>
@@ -7403,7 +9800,7 @@
       </p:sp>
       <p:pic>
         <p:nvPicPr>
-          <p:cNvPr id="4" name="Picture 3" descr="contrast.png"/>
+          <p:cNvPr id="4" name="Picture 3" descr="j2.png"/>
           <p:cNvPicPr>
             <a:picLocks noChangeAspect="1"/>
           </p:cNvPicPr>
@@ -7434,7 +9831,7 @@
         <p:spPr>
           <a:xfrm>
             <a:off x="411480" y="6537960"/>
-            <a:ext cx="8229600" cy="256032"/>
+            <a:ext cx="8686800" cy="256032"/>
           </a:xfrm>
           <a:prstGeom prst="rect">
             <a:avLst/>
@@ -7464,7 +9861,7 @@
                 <a:ea typeface="WenQuanYi Micro Hei"/>
                 <a:cs typeface="WenQuanYi Micro Hei"/>
               </a:rPr>
-              <a:t>曾欣宇  ·  空间导航算法部署  ·  对外沟通</a:t>
+              <a:t>曾欣宇  ·  资源受限场景下的具身导航</a:t>
             </a:r>
           </a:p>
         </p:txBody>
@@ -7621,7 +10018,7 @@
       </p:sp>
       <p:pic>
         <p:nvPicPr>
-          <p:cNvPr id="4" name="Picture 3" descr="reject.png"/>
+          <p:cNvPr id="4" name="Picture 3" descr="metrics.png"/>
           <p:cNvPicPr>
             <a:picLocks noChangeAspect="1"/>
           </p:cNvPicPr>
@@ -7652,7 +10049,7 @@
         <p:spPr>
           <a:xfrm>
             <a:off x="411480" y="6537960"/>
-            <a:ext cx="8229600" cy="256032"/>
+            <a:ext cx="8686800" cy="256032"/>
           </a:xfrm>
           <a:prstGeom prst="rect">
             <a:avLst/>
@@ -7682,7 +10079,7 @@
                 <a:ea typeface="WenQuanYi Micro Hei"/>
                 <a:cs typeface="WenQuanYi Micro Hei"/>
               </a:rPr>
-              <a:t>曾欣宇  ·  空间导航算法部署  ·  对外沟通</a:t>
+              <a:t>曾欣宇  ·  资源受限场景下的具身导航</a:t>
             </a:r>
           </a:p>
         </p:txBody>
@@ -7837,50 +10234,30 @@
           </a:p>
         </p:txBody>
       </p:sp>
-      <p:sp>
-        <p:nvSpPr>
-          <p:cNvPr id="4" name="Rectangle 3"/>
-          <p:cNvSpPr/>
-          <p:nvPr/>
-        </p:nvSpPr>
-        <p:spPr>
-          <a:xfrm>
-            <a:off x="0" y="0"/>
-            <a:ext cx="64008" cy="6858000"/>
-          </a:xfrm>
-          <a:prstGeom prst="rect">
-            <a:avLst/>
-          </a:prstGeom>
-          <a:solidFill>
-            <a:srgbClr val="22D3EE"/>
-          </a:solidFill>
-          <a:ln>
-            <a:noFill/>
-          </a:ln>
-          <a:effectLst/>
-        </p:spPr>
-        <p:style>
-          <a:lnRef idx="1">
-            <a:schemeClr val="accent1"/>
-          </a:lnRef>
-          <a:fillRef idx="3">
-            <a:schemeClr val="accent1"/>
-          </a:fillRef>
-          <a:effectRef idx="2">
-            <a:schemeClr val="accent1"/>
-          </a:effectRef>
-          <a:fontRef idx="minor">
-            <a:schemeClr val="lt1"/>
-          </a:fontRef>
-        </p:style>
-        <p:txBody>
-          <a:bodyPr rtlCol="0" anchor="ctr"/>
-          <a:lstStyle/>
-          <a:p>
-            <a:pPr algn="ctr"/>
-          </a:p>
-        </p:txBody>
-      </p:sp>
+      <p:pic>
+        <p:nvPicPr>
+          <p:cNvPr id="4" name="Picture 3" descr="pipeline.png"/>
+          <p:cNvPicPr>
+            <a:picLocks noChangeAspect="1"/>
+          </p:cNvPicPr>
+          <p:nvPr/>
+        </p:nvPicPr>
+        <p:blipFill>
+          <a:blip r:embed="rId2"/>
+          <a:stretch>
+            <a:fillRect/>
+          </a:stretch>
+        </p:blipFill>
+        <p:spPr>
+          <a:xfrm>
+            <a:off x="0" y="54864"/>
+            <a:ext cx="12191695" cy="6803136"/>
+          </a:xfrm>
+          <a:prstGeom prst="rect">
+            <a:avLst/>
+          </a:prstGeom>
+        </p:spPr>
+      </p:pic>
       <p:sp>
         <p:nvSpPr>
           <p:cNvPr id="5" name="TextBox 4"/>
@@ -7889,8 +10266,8 @@
         </p:nvSpPr>
         <p:spPr>
           <a:xfrm>
-            <a:off x="411480" y="182880"/>
-            <a:ext cx="10972800" cy="237744"/>
+            <a:off x="411480" y="6537960"/>
+            <a:ext cx="8686800" cy="256032"/>
           </a:xfrm>
           <a:prstGeom prst="rect">
             <a:avLst/>
@@ -7912,15 +10289,15 @@
               </a:spcAft>
             </a:pPr>
             <a:r>
-              <a:rPr sz="1100" b="1">
-                <a:solidFill>
-                  <a:srgbClr val="22D3EE"/>
+              <a:rPr sz="1000" b="0">
+                <a:solidFill>
+                  <a:srgbClr val="64748B"/>
                 </a:solidFill>
                 <a:latin typeface="WenQuanYi Micro Hei"/>
                 <a:ea typeface="WenQuanYi Micro Hei"/>
                 <a:cs typeface="WenQuanYi Micro Hei"/>
               </a:rPr>
-              <a:t>06  /  BRING-UP</a:t>
+              <a:t>曾欣宇  ·  资源受限场景下的具身导航</a:t>
             </a:r>
           </a:p>
         </p:txBody>
@@ -7928,1038 +10305,6 @@
       <p:sp>
         <p:nvSpPr>
           <p:cNvPr id="6" name="TextBox 5"/>
-          <p:cNvSpPr txBox="1"/>
-          <p:nvPr/>
-        </p:nvSpPr>
-        <p:spPr>
-          <a:xfrm>
-            <a:off x="411480" y="402336"/>
-            <a:ext cx="11338560" cy="438912"/>
-          </a:xfrm>
-          <a:prstGeom prst="rect">
-            <a:avLst/>
-          </a:prstGeom>
-          <a:noFill/>
-        </p:spPr>
-        <p:txBody>
-          <a:bodyPr wrap="square" lIns="18288" rIns="18288" anchor="ctr">
-            <a:spAutoFit/>
-          </a:bodyPr>
-          <a:lstStyle/>
-          <a:p>
-            <a:pPr algn="l">
-              <a:spcBef>
-                <a:spcPts val="0"/>
-              </a:spcBef>
-              <a:spcAft>
-                <a:spcPts val="200"/>
-              </a:spcAft>
-            </a:pPr>
-            <a:r>
-              <a:rPr sz="2600" b="1">
-                <a:solidFill>
-                  <a:srgbClr val="F8FAFC"/>
-                </a:solidFill>
-                <a:latin typeface="WenQuanYi Micro Hei"/>
-                <a:ea typeface="WenQuanYi Micro Hei"/>
-                <a:cs typeface="WenQuanYi Micro Hei"/>
-              </a:rPr>
-              <a:t>上机要先打通的四件事</a:t>
-            </a:r>
-          </a:p>
-        </p:txBody>
-      </p:sp>
-      <p:sp>
-        <p:nvSpPr>
-          <p:cNvPr id="7" name="TextBox 6"/>
-          <p:cNvSpPr txBox="1"/>
-          <p:nvPr/>
-        </p:nvSpPr>
-        <p:spPr>
-          <a:xfrm>
-            <a:off x="411480" y="822960"/>
-            <a:ext cx="11338560" cy="274320"/>
-          </a:xfrm>
-          <a:prstGeom prst="rect">
-            <a:avLst/>
-          </a:prstGeom>
-          <a:noFill/>
-        </p:spPr>
-        <p:txBody>
-          <a:bodyPr wrap="square" lIns="18288" rIns="18288" anchor="ctr">
-            <a:spAutoFit/>
-          </a:bodyPr>
-          <a:lstStyle/>
-          <a:p>
-            <a:pPr algn="l">
-              <a:spcBef>
-                <a:spcPts val="0"/>
-              </a:spcBef>
-              <a:spcAft>
-                <a:spcPts val="200"/>
-              </a:spcAft>
-            </a:pPr>
-            <a:r>
-              <a:rPr sz="1300" b="0">
-                <a:solidFill>
-                  <a:srgbClr val="94A3B8"/>
-                </a:solidFill>
-                <a:latin typeface="WenQuanYi Micro Hei"/>
-                <a:ea typeface="WenQuanYi Micro Hei"/>
-                <a:cs typeface="WenQuanYi Micro Hei"/>
-              </a:rPr>
-              <a:t>容器只是其中一件</a:t>
-            </a:r>
-          </a:p>
-        </p:txBody>
-      </p:sp>
-      <p:sp>
-        <p:nvSpPr>
-          <p:cNvPr id="8" name="Rounded Rectangle 7"/>
-          <p:cNvSpPr/>
-          <p:nvPr/>
-        </p:nvSpPr>
-        <p:spPr>
-          <a:xfrm>
-            <a:off x="411480" y="1280160"/>
-            <a:ext cx="5532120" cy="2286000"/>
-          </a:xfrm>
-          <a:prstGeom prst="roundRect">
-            <a:avLst>
-              <a:gd name="adj" fmla="val 8000"/>
-            </a:avLst>
-          </a:prstGeom>
-          <a:solidFill>
-            <a:srgbClr val="151D2E"/>
-          </a:solidFill>
-          <a:ln w="14604">
-            <a:solidFill>
-              <a:srgbClr val="FB7185"/>
-            </a:solidFill>
-          </a:ln>
-          <a:effectLst/>
-        </p:spPr>
-        <p:style>
-          <a:lnRef idx="1">
-            <a:schemeClr val="accent1"/>
-          </a:lnRef>
-          <a:fillRef idx="3">
-            <a:schemeClr val="accent1"/>
-          </a:fillRef>
-          <a:effectRef idx="2">
-            <a:schemeClr val="accent1"/>
-          </a:effectRef>
-          <a:fontRef idx="minor">
-            <a:schemeClr val="lt1"/>
-          </a:fontRef>
-        </p:style>
-        <p:txBody>
-          <a:bodyPr rtlCol="0" anchor="ctr"/>
-          <a:lstStyle/>
-          <a:p>
-            <a:pPr algn="ctr"/>
-          </a:p>
-        </p:txBody>
-      </p:sp>
-      <p:sp>
-        <p:nvSpPr>
-          <p:cNvPr id="9" name="Rectangle 8"/>
-          <p:cNvSpPr/>
-          <p:nvPr/>
-        </p:nvSpPr>
-        <p:spPr>
-          <a:xfrm>
-            <a:off x="411480" y="1280160"/>
-            <a:ext cx="109728" cy="2286000"/>
-          </a:xfrm>
-          <a:prstGeom prst="rect">
-            <a:avLst/>
-          </a:prstGeom>
-          <a:solidFill>
-            <a:srgbClr val="FB7185"/>
-          </a:solidFill>
-          <a:ln>
-            <a:noFill/>
-          </a:ln>
-          <a:effectLst/>
-        </p:spPr>
-        <p:style>
-          <a:lnRef idx="1">
-            <a:schemeClr val="accent1"/>
-          </a:lnRef>
-          <a:fillRef idx="3">
-            <a:schemeClr val="accent1"/>
-          </a:fillRef>
-          <a:effectRef idx="2">
-            <a:schemeClr val="accent1"/>
-          </a:effectRef>
-          <a:fontRef idx="minor">
-            <a:schemeClr val="lt1"/>
-          </a:fontRef>
-        </p:style>
-        <p:txBody>
-          <a:bodyPr rtlCol="0" anchor="ctr"/>
-          <a:lstStyle/>
-          <a:p>
-            <a:pPr algn="ctr"/>
-          </a:p>
-        </p:txBody>
-      </p:sp>
-      <p:sp>
-        <p:nvSpPr>
-          <p:cNvPr id="10" name="TextBox 9"/>
-          <p:cNvSpPr txBox="1"/>
-          <p:nvPr/>
-        </p:nvSpPr>
-        <p:spPr>
-          <a:xfrm>
-            <a:off x="777240" y="1463039"/>
-            <a:ext cx="4937760" cy="256032"/>
-          </a:xfrm>
-          <a:prstGeom prst="rect">
-            <a:avLst/>
-          </a:prstGeom>
-          <a:noFill/>
-        </p:spPr>
-        <p:txBody>
-          <a:bodyPr wrap="square" lIns="18288" rIns="18288" anchor="ctr">
-            <a:spAutoFit/>
-          </a:bodyPr>
-          <a:lstStyle/>
-          <a:p>
-            <a:pPr algn="l">
-              <a:spcBef>
-                <a:spcPts val="0"/>
-              </a:spcBef>
-              <a:spcAft>
-                <a:spcPts val="200"/>
-              </a:spcAft>
-            </a:pPr>
-            <a:r>
-              <a:rPr sz="1200" b="1">
-                <a:solidFill>
-                  <a:srgbClr val="FB7185"/>
-                </a:solidFill>
-                <a:latin typeface="WenQuanYi Micro Hei"/>
-                <a:ea typeface="WenQuanYi Micro Hei"/>
-                <a:cs typeface="WenQuanYi Micro Hei"/>
-              </a:rPr>
-              <a:t>雷达</a:t>
-            </a:r>
-          </a:p>
-        </p:txBody>
-      </p:sp>
-      <p:sp>
-        <p:nvSpPr>
-          <p:cNvPr id="11" name="TextBox 10"/>
-          <p:cNvSpPr txBox="1"/>
-          <p:nvPr/>
-        </p:nvSpPr>
-        <p:spPr>
-          <a:xfrm>
-            <a:off x="777240" y="1755648"/>
-            <a:ext cx="4937760" cy="411480"/>
-          </a:xfrm>
-          <a:prstGeom prst="rect">
-            <a:avLst/>
-          </a:prstGeom>
-          <a:noFill/>
-        </p:spPr>
-        <p:txBody>
-          <a:bodyPr wrap="square" lIns="18288" rIns="18288" anchor="ctr">
-            <a:spAutoFit/>
-          </a:bodyPr>
-          <a:lstStyle/>
-          <a:p>
-            <a:pPr algn="l">
-              <a:spcBef>
-                <a:spcPts val="0"/>
-              </a:spcBef>
-              <a:spcAft>
-                <a:spcPts val="200"/>
-              </a:spcAft>
-            </a:pPr>
-            <a:r>
-              <a:rPr sz="1800" b="1">
-                <a:solidFill>
-                  <a:srgbClr val="F8FAFC"/>
-                </a:solidFill>
-                <a:latin typeface="WenQuanYi Micro Hei"/>
-                <a:ea typeface="WenQuanYi Micro Hei"/>
-                <a:cs typeface="WenQuanYi Micro Hei"/>
-              </a:rPr>
-              <a:t>先停官方 SLAM</a:t>
-            </a:r>
-          </a:p>
-        </p:txBody>
-      </p:sp>
-      <p:sp>
-        <p:nvSpPr>
-          <p:cNvPr id="12" name="TextBox 11"/>
-          <p:cNvSpPr txBox="1"/>
-          <p:nvPr/>
-        </p:nvSpPr>
-        <p:spPr>
-          <a:xfrm>
-            <a:off x="777240" y="2286000"/>
-            <a:ext cx="4937760" cy="1005840"/>
-          </a:xfrm>
-          <a:prstGeom prst="rect">
-            <a:avLst/>
-          </a:prstGeom>
-          <a:noFill/>
-        </p:spPr>
-        <p:txBody>
-          <a:bodyPr wrap="square" lIns="18288" rIns="18288" anchor="ctr">
-            <a:spAutoFit/>
-          </a:bodyPr>
-          <a:lstStyle/>
-          <a:p>
-            <a:pPr algn="l">
-              <a:spcBef>
-                <a:spcPts val="0"/>
-              </a:spcBef>
-              <a:spcAft>
-                <a:spcPts val="200"/>
-              </a:spcAft>
-            </a:pPr>
-            <a:r>
-              <a:rPr sz="1400" b="0">
-                <a:solidFill>
-                  <a:srgbClr val="94A3B8"/>
-                </a:solidFill>
-                <a:latin typeface="WenQuanYi Micro Hei"/>
-                <a:ea typeface="WenQuanYi Micro Hei"/>
-                <a:cs typeface="WenQuanYi Micro Hei"/>
-              </a:rPr>
-              <a:t>unitree_slam 占 Mid-360
-自研栈前必须释放</a:t>
-            </a:r>
-          </a:p>
-        </p:txBody>
-      </p:sp>
-      <p:sp>
-        <p:nvSpPr>
-          <p:cNvPr id="13" name="Rounded Rectangle 12"/>
-          <p:cNvSpPr/>
-          <p:nvPr/>
-        </p:nvSpPr>
-        <p:spPr>
-          <a:xfrm>
-            <a:off x="6263640" y="1280160"/>
-            <a:ext cx="5532120" cy="2286000"/>
-          </a:xfrm>
-          <a:prstGeom prst="roundRect">
-            <a:avLst>
-              <a:gd name="adj" fmla="val 8000"/>
-            </a:avLst>
-          </a:prstGeom>
-          <a:solidFill>
-            <a:srgbClr val="151D2E"/>
-          </a:solidFill>
-          <a:ln w="14604">
-            <a:solidFill>
-              <a:srgbClr val="22D3EE"/>
-            </a:solidFill>
-          </a:ln>
-          <a:effectLst/>
-        </p:spPr>
-        <p:style>
-          <a:lnRef idx="1">
-            <a:schemeClr val="accent1"/>
-          </a:lnRef>
-          <a:fillRef idx="3">
-            <a:schemeClr val="accent1"/>
-          </a:fillRef>
-          <a:effectRef idx="2">
-            <a:schemeClr val="accent1"/>
-          </a:effectRef>
-          <a:fontRef idx="minor">
-            <a:schemeClr val="lt1"/>
-          </a:fontRef>
-        </p:style>
-        <p:txBody>
-          <a:bodyPr rtlCol="0" anchor="ctr"/>
-          <a:lstStyle/>
-          <a:p>
-            <a:pPr algn="ctr"/>
-          </a:p>
-        </p:txBody>
-      </p:sp>
-      <p:sp>
-        <p:nvSpPr>
-          <p:cNvPr id="14" name="Rectangle 13"/>
-          <p:cNvSpPr/>
-          <p:nvPr/>
-        </p:nvSpPr>
-        <p:spPr>
-          <a:xfrm>
-            <a:off x="6263640" y="1280160"/>
-            <a:ext cx="109728" cy="2286000"/>
-          </a:xfrm>
-          <a:prstGeom prst="rect">
-            <a:avLst/>
-          </a:prstGeom>
-          <a:solidFill>
-            <a:srgbClr val="22D3EE"/>
-          </a:solidFill>
-          <a:ln>
-            <a:noFill/>
-          </a:ln>
-          <a:effectLst/>
-        </p:spPr>
-        <p:style>
-          <a:lnRef idx="1">
-            <a:schemeClr val="accent1"/>
-          </a:lnRef>
-          <a:fillRef idx="3">
-            <a:schemeClr val="accent1"/>
-          </a:fillRef>
-          <a:effectRef idx="2">
-            <a:schemeClr val="accent1"/>
-          </a:effectRef>
-          <a:fontRef idx="minor">
-            <a:schemeClr val="lt1"/>
-          </a:fontRef>
-        </p:style>
-        <p:txBody>
-          <a:bodyPr rtlCol="0" anchor="ctr"/>
-          <a:lstStyle/>
-          <a:p>
-            <a:pPr algn="ctr"/>
-          </a:p>
-        </p:txBody>
-      </p:sp>
-      <p:sp>
-        <p:nvSpPr>
-          <p:cNvPr id="15" name="TextBox 14"/>
-          <p:cNvSpPr txBox="1"/>
-          <p:nvPr/>
-        </p:nvSpPr>
-        <p:spPr>
-          <a:xfrm>
-            <a:off x="6629400" y="1463039"/>
-            <a:ext cx="4937760" cy="256032"/>
-          </a:xfrm>
-          <a:prstGeom prst="rect">
-            <a:avLst/>
-          </a:prstGeom>
-          <a:noFill/>
-        </p:spPr>
-        <p:txBody>
-          <a:bodyPr wrap="square" lIns="18288" rIns="18288" anchor="ctr">
-            <a:spAutoFit/>
-          </a:bodyPr>
-          <a:lstStyle/>
-          <a:p>
-            <a:pPr algn="l">
-              <a:spcBef>
-                <a:spcPts val="0"/>
-              </a:spcBef>
-              <a:spcAft>
-                <a:spcPts val="200"/>
-              </a:spcAft>
-            </a:pPr>
-            <a:r>
-              <a:rPr sz="1200" b="1">
-                <a:solidFill>
-                  <a:srgbClr val="22D3EE"/>
-                </a:solidFill>
-                <a:latin typeface="WenQuanYi Micro Hei"/>
-                <a:ea typeface="WenQuanYi Micro Hei"/>
-                <a:cs typeface="WenQuanYi Micro Hei"/>
-              </a:rPr>
-              <a:t>容器</a:t>
-            </a:r>
-          </a:p>
-        </p:txBody>
-      </p:sp>
-      <p:sp>
-        <p:nvSpPr>
-          <p:cNvPr id="16" name="TextBox 15"/>
-          <p:cNvSpPr txBox="1"/>
-          <p:nvPr/>
-        </p:nvSpPr>
-        <p:spPr>
-          <a:xfrm>
-            <a:off x="6629400" y="1755648"/>
-            <a:ext cx="4937760" cy="411480"/>
-          </a:xfrm>
-          <a:prstGeom prst="rect">
-            <a:avLst/>
-          </a:prstGeom>
-          <a:noFill/>
-        </p:spPr>
-        <p:txBody>
-          <a:bodyPr wrap="square" lIns="18288" rIns="18288" anchor="ctr">
-            <a:spAutoFit/>
-          </a:bodyPr>
-          <a:lstStyle/>
-          <a:p>
-            <a:pPr algn="l">
-              <a:spcBef>
-                <a:spcPts val="0"/>
-              </a:spcBef>
-              <a:spcAft>
-                <a:spcPts val="200"/>
-              </a:spcAft>
-            </a:pPr>
-            <a:r>
-              <a:rPr sz="1800" b="1">
-                <a:solidFill>
-                  <a:srgbClr val="F8FAFC"/>
-                </a:solidFill>
-                <a:latin typeface="WenQuanYi Micro Hei"/>
-                <a:ea typeface="WenQuanYi Micro Hei"/>
-                <a:cs typeface="WenQuanYi Micro Hei"/>
-              </a:rPr>
-              <a:t>Humble 里跑，不在宿主机编</a:t>
-            </a:r>
-          </a:p>
-        </p:txBody>
-      </p:sp>
-      <p:sp>
-        <p:nvSpPr>
-          <p:cNvPr id="17" name="TextBox 16"/>
-          <p:cNvSpPr txBox="1"/>
-          <p:nvPr/>
-        </p:nvSpPr>
-        <p:spPr>
-          <a:xfrm>
-            <a:off x="6629400" y="2286000"/>
-            <a:ext cx="4937760" cy="1005840"/>
-          </a:xfrm>
-          <a:prstGeom prst="rect">
-            <a:avLst/>
-          </a:prstGeom>
-          <a:noFill/>
-        </p:spPr>
-        <p:txBody>
-          <a:bodyPr wrap="square" lIns="18288" rIns="18288" anchor="ctr">
-            <a:spAutoFit/>
-          </a:bodyPr>
-          <a:lstStyle/>
-          <a:p>
-            <a:pPr algn="l">
-              <a:spcBef>
-                <a:spcPts val="0"/>
-              </a:spcBef>
-              <a:spcAft>
-                <a:spcPts val="200"/>
-              </a:spcAft>
-            </a:pPr>
-            <a:r>
-              <a:rPr sz="1400" b="0">
-                <a:solidFill>
-                  <a:srgbClr val="94A3B8"/>
-                </a:solidFill>
-                <a:latin typeface="WenQuanYi Micro Hei"/>
-                <a:ea typeface="WenQuanYi Micro Hei"/>
-                <a:cs typeface="WenQuanYi Micro Hei"/>
-              </a:rPr>
-              <a:t>JetPack 宿主机 C++20 不够
-motionslam:humble + host 网络</a:t>
-            </a:r>
-          </a:p>
-        </p:txBody>
-      </p:sp>
-      <p:sp>
-        <p:nvSpPr>
-          <p:cNvPr id="18" name="Rounded Rectangle 17"/>
-          <p:cNvSpPr/>
-          <p:nvPr/>
-        </p:nvSpPr>
-        <p:spPr>
-          <a:xfrm>
-            <a:off x="411480" y="3794760"/>
-            <a:ext cx="5532120" cy="2286000"/>
-          </a:xfrm>
-          <a:prstGeom prst="roundRect">
-            <a:avLst>
-              <a:gd name="adj" fmla="val 8000"/>
-            </a:avLst>
-          </a:prstGeom>
-          <a:solidFill>
-            <a:srgbClr val="151D2E"/>
-          </a:solidFill>
-          <a:ln w="14604">
-            <a:solidFill>
-              <a:srgbClr val="34D399"/>
-            </a:solidFill>
-          </a:ln>
-          <a:effectLst/>
-        </p:spPr>
-        <p:style>
-          <a:lnRef idx="1">
-            <a:schemeClr val="accent1"/>
-          </a:lnRef>
-          <a:fillRef idx="3">
-            <a:schemeClr val="accent1"/>
-          </a:fillRef>
-          <a:effectRef idx="2">
-            <a:schemeClr val="accent1"/>
-          </a:effectRef>
-          <a:fontRef idx="minor">
-            <a:schemeClr val="lt1"/>
-          </a:fontRef>
-        </p:style>
-        <p:txBody>
-          <a:bodyPr rtlCol="0" anchor="ctr"/>
-          <a:lstStyle/>
-          <a:p>
-            <a:pPr algn="ctr"/>
-          </a:p>
-        </p:txBody>
-      </p:sp>
-      <p:sp>
-        <p:nvSpPr>
-          <p:cNvPr id="19" name="Rectangle 18"/>
-          <p:cNvSpPr/>
-          <p:nvPr/>
-        </p:nvSpPr>
-        <p:spPr>
-          <a:xfrm>
-            <a:off x="411480" y="3794760"/>
-            <a:ext cx="109728" cy="2286000"/>
-          </a:xfrm>
-          <a:prstGeom prst="rect">
-            <a:avLst/>
-          </a:prstGeom>
-          <a:solidFill>
-            <a:srgbClr val="34D399"/>
-          </a:solidFill>
-          <a:ln>
-            <a:noFill/>
-          </a:ln>
-          <a:effectLst/>
-        </p:spPr>
-        <p:style>
-          <a:lnRef idx="1">
-            <a:schemeClr val="accent1"/>
-          </a:lnRef>
-          <a:fillRef idx="3">
-            <a:schemeClr val="accent1"/>
-          </a:fillRef>
-          <a:effectRef idx="2">
-            <a:schemeClr val="accent1"/>
-          </a:effectRef>
-          <a:fontRef idx="minor">
-            <a:schemeClr val="lt1"/>
-          </a:fontRef>
-        </p:style>
-        <p:txBody>
-          <a:bodyPr rtlCol="0" anchor="ctr"/>
-          <a:lstStyle/>
-          <a:p>
-            <a:pPr algn="ctr"/>
-          </a:p>
-        </p:txBody>
-      </p:sp>
-      <p:sp>
-        <p:nvSpPr>
-          <p:cNvPr id="20" name="TextBox 19"/>
-          <p:cNvSpPr txBox="1"/>
-          <p:nvPr/>
-        </p:nvSpPr>
-        <p:spPr>
-          <a:xfrm>
-            <a:off x="777240" y="3977640"/>
-            <a:ext cx="4937760" cy="256032"/>
-          </a:xfrm>
-          <a:prstGeom prst="rect">
-            <a:avLst/>
-          </a:prstGeom>
-          <a:noFill/>
-        </p:spPr>
-        <p:txBody>
-          <a:bodyPr wrap="square" lIns="18288" rIns="18288" anchor="ctr">
-            <a:spAutoFit/>
-          </a:bodyPr>
-          <a:lstStyle/>
-          <a:p>
-            <a:pPr algn="l">
-              <a:spcBef>
-                <a:spcPts val="0"/>
-              </a:spcBef>
-              <a:spcAft>
-                <a:spcPts val="200"/>
-              </a:spcAft>
-            </a:pPr>
-            <a:r>
-              <a:rPr sz="1200" b="1">
-                <a:solidFill>
-                  <a:srgbClr val="34D399"/>
-                </a:solidFill>
-                <a:latin typeface="WenQuanYi Micro Hei"/>
-                <a:ea typeface="WenQuanYi Micro Hei"/>
-                <a:cs typeface="WenQuanYi Micro Hei"/>
-              </a:rPr>
-              <a:t>DDS</a:t>
-            </a:r>
-          </a:p>
-        </p:txBody>
-      </p:sp>
-      <p:sp>
-        <p:nvSpPr>
-          <p:cNvPr id="21" name="TextBox 20"/>
-          <p:cNvSpPr txBox="1"/>
-          <p:nvPr/>
-        </p:nvSpPr>
-        <p:spPr>
-          <a:xfrm>
-            <a:off x="777240" y="4270248"/>
-            <a:ext cx="4937760" cy="411480"/>
-          </a:xfrm>
-          <a:prstGeom prst="rect">
-            <a:avLst/>
-          </a:prstGeom>
-          <a:noFill/>
-        </p:spPr>
-        <p:txBody>
-          <a:bodyPr wrap="square" lIns="18288" rIns="18288" anchor="ctr">
-            <a:spAutoFit/>
-          </a:bodyPr>
-          <a:lstStyle/>
-          <a:p>
-            <a:pPr algn="l">
-              <a:spcBef>
-                <a:spcPts val="0"/>
-              </a:spcBef>
-              <a:spcAft>
-                <a:spcPts val="200"/>
-              </a:spcAft>
-            </a:pPr>
-            <a:r>
-              <a:rPr sz="1800" b="1">
-                <a:solidFill>
-                  <a:srgbClr val="F8FAFC"/>
-                </a:solidFill>
-                <a:latin typeface="WenQuanYi Micro Hei"/>
-                <a:ea typeface="WenQuanYi Micro Hei"/>
-                <a:cs typeface="WenQuanYi Micro Hei"/>
-              </a:rPr>
-              <a:t>CycloneDDS 域 0</a:t>
-            </a:r>
-          </a:p>
-        </p:txBody>
-      </p:sp>
-      <p:sp>
-        <p:nvSpPr>
-          <p:cNvPr id="22" name="TextBox 21"/>
-          <p:cNvSpPr txBox="1"/>
-          <p:nvPr/>
-        </p:nvSpPr>
-        <p:spPr>
-          <a:xfrm>
-            <a:off x="777240" y="4800600"/>
-            <a:ext cx="4937760" cy="1005840"/>
-          </a:xfrm>
-          <a:prstGeom prst="rect">
-            <a:avLst/>
-          </a:prstGeom>
-          <a:noFill/>
-        </p:spPr>
-        <p:txBody>
-          <a:bodyPr wrap="square" lIns="18288" rIns="18288" anchor="ctr">
-            <a:spAutoFit/>
-          </a:bodyPr>
-          <a:lstStyle/>
-          <a:p>
-            <a:pPr algn="l">
-              <a:spcBef>
-                <a:spcPts val="0"/>
-              </a:spcBef>
-              <a:spcAft>
-                <a:spcPts val="200"/>
-              </a:spcAft>
-            </a:pPr>
-            <a:r>
-              <a:rPr sz="1400" b="0">
-                <a:solidFill>
-                  <a:srgbClr val="94A3B8"/>
-                </a:solidFill>
-                <a:latin typeface="WenQuanYi Micro Hei"/>
-                <a:ea typeface="WenQuanYi Micro Hei"/>
-                <a:cs typeface="WenQuanYi Micro Hei"/>
-              </a:rPr>
-              <a:t>与 Go2 机身原生互通
-不经二次桥、不改 Sport 协议</a:t>
-            </a:r>
-          </a:p>
-        </p:txBody>
-      </p:sp>
-      <p:sp>
-        <p:nvSpPr>
-          <p:cNvPr id="23" name="Rounded Rectangle 22"/>
-          <p:cNvSpPr/>
-          <p:nvPr/>
-        </p:nvSpPr>
-        <p:spPr>
-          <a:xfrm>
-            <a:off x="6263640" y="3794760"/>
-            <a:ext cx="5532120" cy="2286000"/>
-          </a:xfrm>
-          <a:prstGeom prst="roundRect">
-            <a:avLst>
-              <a:gd name="adj" fmla="val 8000"/>
-            </a:avLst>
-          </a:prstGeom>
-          <a:solidFill>
-            <a:srgbClr val="151D2E"/>
-          </a:solidFill>
-          <a:ln w="14604">
-            <a:solidFill>
-              <a:srgbClr val="FBBF24"/>
-            </a:solidFill>
-          </a:ln>
-          <a:effectLst/>
-        </p:spPr>
-        <p:style>
-          <a:lnRef idx="1">
-            <a:schemeClr val="accent1"/>
-          </a:lnRef>
-          <a:fillRef idx="3">
-            <a:schemeClr val="accent1"/>
-          </a:fillRef>
-          <a:effectRef idx="2">
-            <a:schemeClr val="accent1"/>
-          </a:effectRef>
-          <a:fontRef idx="minor">
-            <a:schemeClr val="lt1"/>
-          </a:fontRef>
-        </p:style>
-        <p:txBody>
-          <a:bodyPr rtlCol="0" anchor="ctr"/>
-          <a:lstStyle/>
-          <a:p>
-            <a:pPr algn="ctr"/>
-          </a:p>
-        </p:txBody>
-      </p:sp>
-      <p:sp>
-        <p:nvSpPr>
-          <p:cNvPr id="24" name="Rectangle 23"/>
-          <p:cNvSpPr/>
-          <p:nvPr/>
-        </p:nvSpPr>
-        <p:spPr>
-          <a:xfrm>
-            <a:off x="6263640" y="3794760"/>
-            <a:ext cx="109728" cy="2286000"/>
-          </a:xfrm>
-          <a:prstGeom prst="rect">
-            <a:avLst/>
-          </a:prstGeom>
-          <a:solidFill>
-            <a:srgbClr val="FBBF24"/>
-          </a:solidFill>
-          <a:ln>
-            <a:noFill/>
-          </a:ln>
-          <a:effectLst/>
-        </p:spPr>
-        <p:style>
-          <a:lnRef idx="1">
-            <a:schemeClr val="accent1"/>
-          </a:lnRef>
-          <a:fillRef idx="3">
-            <a:schemeClr val="accent1"/>
-          </a:fillRef>
-          <a:effectRef idx="2">
-            <a:schemeClr val="accent1"/>
-          </a:effectRef>
-          <a:fontRef idx="minor">
-            <a:schemeClr val="lt1"/>
-          </a:fontRef>
-        </p:style>
-        <p:txBody>
-          <a:bodyPr rtlCol="0" anchor="ctr"/>
-          <a:lstStyle/>
-          <a:p>
-            <a:pPr algn="ctr"/>
-          </a:p>
-        </p:txBody>
-      </p:sp>
-      <p:sp>
-        <p:nvSpPr>
-          <p:cNvPr id="25" name="TextBox 24"/>
-          <p:cNvSpPr txBox="1"/>
-          <p:nvPr/>
-        </p:nvSpPr>
-        <p:spPr>
-          <a:xfrm>
-            <a:off x="6629400" y="3977640"/>
-            <a:ext cx="4937760" cy="256032"/>
-          </a:xfrm>
-          <a:prstGeom prst="rect">
-            <a:avLst/>
-          </a:prstGeom>
-          <a:noFill/>
-        </p:spPr>
-        <p:txBody>
-          <a:bodyPr wrap="square" lIns="18288" rIns="18288" anchor="ctr">
-            <a:spAutoFit/>
-          </a:bodyPr>
-          <a:lstStyle/>
-          <a:p>
-            <a:pPr algn="l">
-              <a:spcBef>
-                <a:spcPts val="0"/>
-              </a:spcBef>
-              <a:spcAft>
-                <a:spcPts val="200"/>
-              </a:spcAft>
-            </a:pPr>
-            <a:r>
-              <a:rPr sz="1200" b="1">
-                <a:solidFill>
-                  <a:srgbClr val="FBBF24"/>
-                </a:solidFill>
-                <a:latin typeface="WenQuanYi Micro Hei"/>
-                <a:ea typeface="WenQuanYi Micro Hei"/>
-                <a:cs typeface="WenQuanYi Micro Hei"/>
-              </a:rPr>
-              <a:t>吞吐</a:t>
-            </a:r>
-          </a:p>
-        </p:txBody>
-      </p:sp>
-      <p:sp>
-        <p:nvSpPr>
-          <p:cNvPr id="26" name="TextBox 25"/>
-          <p:cNvSpPr txBox="1"/>
-          <p:nvPr/>
-        </p:nvSpPr>
-        <p:spPr>
-          <a:xfrm>
-            <a:off x="6629400" y="4270248"/>
-            <a:ext cx="4937760" cy="411480"/>
-          </a:xfrm>
-          <a:prstGeom prst="rect">
-            <a:avLst/>
-          </a:prstGeom>
-          <a:noFill/>
-        </p:spPr>
-        <p:txBody>
-          <a:bodyPr wrap="square" lIns="18288" rIns="18288" anchor="ctr">
-            <a:spAutoFit/>
-          </a:bodyPr>
-          <a:lstStyle/>
-          <a:p>
-            <a:pPr algn="l">
-              <a:spcBef>
-                <a:spcPts val="0"/>
-              </a:spcBef>
-              <a:spcAft>
-                <a:spcPts val="200"/>
-              </a:spcAft>
-            </a:pPr>
-            <a:r>
-              <a:rPr sz="1800" b="1">
-                <a:solidFill>
-                  <a:srgbClr val="F8FAFC"/>
-                </a:solidFill>
-                <a:latin typeface="WenQuanYi Micro Hei"/>
-                <a:ea typeface="WenQuanYi Micro Hei"/>
-                <a:cs typeface="WenQuanYi Micro Hei"/>
-              </a:rPr>
-              <a:t>POSIX SHM + 双工作区</a:t>
-            </a:r>
-          </a:p>
-        </p:txBody>
-      </p:sp>
-      <p:sp>
-        <p:nvSpPr>
-          <p:cNvPr id="27" name="TextBox 26"/>
-          <p:cNvSpPr txBox="1"/>
-          <p:nvPr/>
-        </p:nvSpPr>
-        <p:spPr>
-          <a:xfrm>
-            <a:off x="6629400" y="4800600"/>
-            <a:ext cx="4937760" cy="1005840"/>
-          </a:xfrm>
-          <a:prstGeom prst="rect">
-            <a:avLst/>
-          </a:prstGeom>
-          <a:noFill/>
-        </p:spPr>
-        <p:txBody>
-          <a:bodyPr wrap="square" lIns="18288" rIns="18288" anchor="ctr">
-            <a:spAutoFit/>
-          </a:bodyPr>
-          <a:lstStyle/>
-          <a:p>
-            <a:pPr algn="l">
-              <a:spcBef>
-                <a:spcPts val="0"/>
-              </a:spcBef>
-              <a:spcAft>
-                <a:spcPts val="200"/>
-              </a:spcAft>
-            </a:pPr>
-            <a:r>
-              <a:rPr sz="1400" b="0">
-                <a:solidFill>
-                  <a:srgbClr val="94A3B8"/>
-                </a:solidFill>
-                <a:latin typeface="WenQuanYi Micro Hei"/>
-                <a:ea typeface="WenQuanYi Micro Hei"/>
-                <a:cs typeface="WenQuanYi Micro Hei"/>
-              </a:rPr>
-              <a:t>点云零拷贝；主仓 + SCAN overlay
-话题契约保持不变</a:t>
-            </a:r>
-          </a:p>
-        </p:txBody>
-      </p:sp>
-      <p:sp>
-        <p:nvSpPr>
-          <p:cNvPr id="28" name="TextBox 27"/>
-          <p:cNvSpPr txBox="1"/>
-          <p:nvPr/>
-        </p:nvSpPr>
-        <p:spPr>
-          <a:xfrm>
-            <a:off x="411480" y="6537960"/>
-            <a:ext cx="8229600" cy="256032"/>
-          </a:xfrm>
-          <a:prstGeom prst="rect">
-            <a:avLst/>
-          </a:prstGeom>
-          <a:noFill/>
-        </p:spPr>
-        <p:txBody>
-          <a:bodyPr wrap="square" lIns="18288" rIns="18288" anchor="ctr">
-            <a:spAutoFit/>
-          </a:bodyPr>
-          <a:lstStyle/>
-          <a:p>
-            <a:pPr algn="l">
-              <a:spcBef>
-                <a:spcPts val="0"/>
-              </a:spcBef>
-              <a:spcAft>
-                <a:spcPts val="200"/>
-              </a:spcAft>
-            </a:pPr>
-            <a:r>
-              <a:rPr sz="1000" b="0">
-                <a:solidFill>
-                  <a:srgbClr val="64748B"/>
-                </a:solidFill>
-                <a:latin typeface="WenQuanYi Micro Hei"/>
-                <a:ea typeface="WenQuanYi Micro Hei"/>
-                <a:cs typeface="WenQuanYi Micro Hei"/>
-              </a:rPr>
-              <a:t>曾欣宇  ·  空间导航算法部署  ·  对外沟通</a:t>
-            </a:r>
-          </a:p>
-        </p:txBody>
-      </p:sp>
-      <p:sp>
-        <p:nvSpPr>
-          <p:cNvPr id="29" name="TextBox 28"/>
           <p:cNvSpPr txBox="1"/>
           <p:nvPr/>
         </p:nvSpPr>
@@ -9109,7 +10454,7 @@
       </p:sp>
       <p:pic>
         <p:nvPicPr>
-          <p:cNvPr id="4" name="Picture 3" descr="field.png"/>
+          <p:cNvPr id="4" name="Picture 3" descr="contrast.png"/>
           <p:cNvPicPr>
             <a:picLocks noChangeAspect="1"/>
           </p:cNvPicPr>
@@ -9140,7 +10485,7 @@
         <p:spPr>
           <a:xfrm>
             <a:off x="411480" y="6537960"/>
-            <a:ext cx="8229600" cy="256032"/>
+            <a:ext cx="8686800" cy="256032"/>
           </a:xfrm>
           <a:prstGeom prst="rect">
             <a:avLst/>
@@ -9170,7 +10515,7 @@
                 <a:ea typeface="WenQuanYi Micro Hei"/>
                 <a:cs typeface="WenQuanYi Micro Hei"/>
               </a:rPr>
-              <a:t>曾欣宇  ·  空间导航算法部署  ·  对外沟通</a:t>
+              <a:t>曾欣宇  ·  资源受限场景下的具身导航</a:t>
             </a:r>
           </a:p>
         </p:txBody>
@@ -9327,7 +10672,7 @@
       </p:sp>
       <p:pic>
         <p:nvPicPr>
-          <p:cNvPr id="4" name="Picture 3" descr="debug.png"/>
+          <p:cNvPr id="4" name="Picture 3" descr="fail.png"/>
           <p:cNvPicPr>
             <a:picLocks noChangeAspect="1"/>
           </p:cNvPicPr>
@@ -9358,7 +10703,7 @@
         <p:spPr>
           <a:xfrm>
             <a:off x="411480" y="6537960"/>
-            <a:ext cx="8229600" cy="256032"/>
+            <a:ext cx="8686800" cy="256032"/>
           </a:xfrm>
           <a:prstGeom prst="rect">
             <a:avLst/>
@@ -9388,7 +10733,7 @@
                 <a:ea typeface="WenQuanYi Micro Hei"/>
                 <a:cs typeface="WenQuanYi Micro Hei"/>
               </a:rPr>
-              <a:t>曾欣宇  ·  空间导航算法部署  ·  对外沟通</a:t>
+              <a:t>曾欣宇  ·  资源受限场景下的具身导航</a:t>
             </a:r>
           </a:p>
         </p:txBody>
@@ -9543,50 +10888,30 @@
           </a:p>
         </p:txBody>
       </p:sp>
-      <p:sp>
-        <p:nvSpPr>
-          <p:cNvPr id="4" name="Rectangle 3"/>
-          <p:cNvSpPr/>
-          <p:nvPr/>
-        </p:nvSpPr>
-        <p:spPr>
-          <a:xfrm>
-            <a:off x="0" y="0"/>
-            <a:ext cx="64008" cy="6858000"/>
-          </a:xfrm>
-          <a:prstGeom prst="rect">
-            <a:avLst/>
-          </a:prstGeom>
-          <a:solidFill>
-            <a:srgbClr val="22D3EE"/>
-          </a:solidFill>
-          <a:ln>
-            <a:noFill/>
-          </a:ln>
-          <a:effectLst/>
-        </p:spPr>
-        <p:style>
-          <a:lnRef idx="1">
-            <a:schemeClr val="accent1"/>
-          </a:lnRef>
-          <a:fillRef idx="3">
-            <a:schemeClr val="accent1"/>
-          </a:fillRef>
-          <a:effectRef idx="2">
-            <a:schemeClr val="accent1"/>
-          </a:effectRef>
-          <a:fontRef idx="minor">
-            <a:schemeClr val="lt1"/>
-          </a:fontRef>
-        </p:style>
-        <p:txBody>
-          <a:bodyPr rtlCol="0" anchor="ctr"/>
-          <a:lstStyle/>
-          <a:p>
-            <a:pPr algn="ctr"/>
-          </a:p>
-        </p:txBody>
-      </p:sp>
+      <p:pic>
+        <p:nvPicPr>
+          <p:cNvPr id="4" name="Picture 3" descr="reject.png"/>
+          <p:cNvPicPr>
+            <a:picLocks noChangeAspect="1"/>
+          </p:cNvPicPr>
+          <p:nvPr/>
+        </p:nvPicPr>
+        <p:blipFill>
+          <a:blip r:embed="rId2"/>
+          <a:stretch>
+            <a:fillRect/>
+          </a:stretch>
+        </p:blipFill>
+        <p:spPr>
+          <a:xfrm>
+            <a:off x="0" y="54864"/>
+            <a:ext cx="12191695" cy="6803136"/>
+          </a:xfrm>
+          <a:prstGeom prst="rect">
+            <a:avLst/>
+          </a:prstGeom>
+        </p:spPr>
+      </p:pic>
       <p:sp>
         <p:nvSpPr>
           <p:cNvPr id="5" name="TextBox 4"/>
@@ -9595,8 +10920,8 @@
         </p:nvSpPr>
         <p:spPr>
           <a:xfrm>
-            <a:off x="411480" y="182880"/>
-            <a:ext cx="10972800" cy="237744"/>
+            <a:off x="411480" y="6537960"/>
+            <a:ext cx="8686800" cy="256032"/>
           </a:xfrm>
           <a:prstGeom prst="rect">
             <a:avLst/>
@@ -9618,15 +10943,15 @@
               </a:spcAft>
             </a:pPr>
             <a:r>
-              <a:rPr sz="1100" b="1">
-                <a:solidFill>
-                  <a:srgbClr val="22D3EE"/>
+              <a:rPr sz="1000" b="0">
+                <a:solidFill>
+                  <a:srgbClr val="64748B"/>
                 </a:solidFill>
                 <a:latin typeface="WenQuanYi Micro Hei"/>
                 <a:ea typeface="WenQuanYi Micro Hei"/>
                 <a:cs typeface="WenQuanYi Micro Hei"/>
               </a:rPr>
-              <a:t>09  /  TRANSFER</a:t>
+              <a:t>曾欣宇  ·  资源受限场景下的具身导航</a:t>
             </a:r>
           </a:p>
         </p:txBody>
@@ -9634,1038 +10959,6 @@
       <p:sp>
         <p:nvSpPr>
           <p:cNvPr id="6" name="TextBox 5"/>
-          <p:cNvSpPr txBox="1"/>
-          <p:nvPr/>
-        </p:nvSpPr>
-        <p:spPr>
-          <a:xfrm>
-            <a:off x="411480" y="402336"/>
-            <a:ext cx="11338560" cy="438912"/>
-          </a:xfrm>
-          <a:prstGeom prst="rect">
-            <a:avLst/>
-          </a:prstGeom>
-          <a:noFill/>
-        </p:spPr>
-        <p:txBody>
-          <a:bodyPr wrap="square" lIns="18288" rIns="18288" anchor="ctr">
-            <a:spAutoFit/>
-          </a:bodyPr>
-          <a:lstStyle/>
-          <a:p>
-            <a:pPr algn="l">
-              <a:spcBef>
-                <a:spcPts val="0"/>
-              </a:spcBef>
-              <a:spcAft>
-                <a:spcPts val="200"/>
-              </a:spcAft>
-            </a:pPr>
-            <a:r>
-              <a:rPr sz="2600" b="1">
-                <a:solidFill>
-                  <a:srgbClr val="F8FAFC"/>
-                </a:solidFill>
-                <a:latin typeface="WenQuanYi Micro Hei"/>
-                <a:ea typeface="WenQuanYi Micro Hei"/>
-                <a:cs typeface="WenQuanYi Micro Hei"/>
-              </a:rPr>
-              <a:t>同一套部署能力，换过本体</a:t>
-            </a:r>
-          </a:p>
-        </p:txBody>
-      </p:sp>
-      <p:sp>
-        <p:nvSpPr>
-          <p:cNvPr id="7" name="TextBox 6"/>
-          <p:cNvSpPr txBox="1"/>
-          <p:nvPr/>
-        </p:nvSpPr>
-        <p:spPr>
-          <a:xfrm>
-            <a:off x="411480" y="822960"/>
-            <a:ext cx="11338560" cy="274320"/>
-          </a:xfrm>
-          <a:prstGeom prst="rect">
-            <a:avLst/>
-          </a:prstGeom>
-          <a:noFill/>
-        </p:spPr>
-        <p:txBody>
-          <a:bodyPr wrap="square" lIns="18288" rIns="18288" anchor="ctr">
-            <a:spAutoFit/>
-          </a:bodyPr>
-          <a:lstStyle/>
-          <a:p>
-            <a:pPr algn="l">
-              <a:spcBef>
-                <a:spcPts val="0"/>
-              </a:spcBef>
-              <a:spcAft>
-                <a:spcPts val="200"/>
-              </a:spcAft>
-            </a:pPr>
-            <a:r>
-              <a:rPr sz="1300" b="0">
-                <a:solidFill>
-                  <a:srgbClr val="94A3B8"/>
-                </a:solidFill>
-                <a:latin typeface="WenQuanYi Micro Hei"/>
-                <a:ea typeface="WenQuanYi Micro Hei"/>
-                <a:cs typeface="WenQuanYi Micro Hei"/>
-              </a:rPr>
-              <a:t>每个项目只记 一个数字 + 一个坑</a:t>
-            </a:r>
-          </a:p>
-        </p:txBody>
-      </p:sp>
-      <p:sp>
-        <p:nvSpPr>
-          <p:cNvPr id="8" name="Rounded Rectangle 7"/>
-          <p:cNvSpPr/>
-          <p:nvPr/>
-        </p:nvSpPr>
-        <p:spPr>
-          <a:xfrm>
-            <a:off x="411480" y="1280160"/>
-            <a:ext cx="5532120" cy="2286000"/>
-          </a:xfrm>
-          <a:prstGeom prst="roundRect">
-            <a:avLst>
-              <a:gd name="adj" fmla="val 8000"/>
-            </a:avLst>
-          </a:prstGeom>
-          <a:solidFill>
-            <a:srgbClr val="151D2E"/>
-          </a:solidFill>
-          <a:ln w="14604">
-            <a:solidFill>
-              <a:srgbClr val="34D399"/>
-            </a:solidFill>
-          </a:ln>
-          <a:effectLst/>
-        </p:spPr>
-        <p:style>
-          <a:lnRef idx="1">
-            <a:schemeClr val="accent1"/>
-          </a:lnRef>
-          <a:fillRef idx="3">
-            <a:schemeClr val="accent1"/>
-          </a:fillRef>
-          <a:effectRef idx="2">
-            <a:schemeClr val="accent1"/>
-          </a:effectRef>
-          <a:fontRef idx="minor">
-            <a:schemeClr val="lt1"/>
-          </a:fontRef>
-        </p:style>
-        <p:txBody>
-          <a:bodyPr rtlCol="0" anchor="ctr"/>
-          <a:lstStyle/>
-          <a:p>
-            <a:pPr algn="ctr"/>
-          </a:p>
-        </p:txBody>
-      </p:sp>
-      <p:sp>
-        <p:nvSpPr>
-          <p:cNvPr id="9" name="Rectangle 8"/>
-          <p:cNvSpPr/>
-          <p:nvPr/>
-        </p:nvSpPr>
-        <p:spPr>
-          <a:xfrm>
-            <a:off x="411480" y="1280160"/>
-            <a:ext cx="5532120" cy="73152"/>
-          </a:xfrm>
-          <a:prstGeom prst="rect">
-            <a:avLst/>
-          </a:prstGeom>
-          <a:solidFill>
-            <a:srgbClr val="34D399"/>
-          </a:solidFill>
-          <a:ln>
-            <a:noFill/>
-          </a:ln>
-          <a:effectLst/>
-        </p:spPr>
-        <p:style>
-          <a:lnRef idx="1">
-            <a:schemeClr val="accent1"/>
-          </a:lnRef>
-          <a:fillRef idx="3">
-            <a:schemeClr val="accent1"/>
-          </a:fillRef>
-          <a:effectRef idx="2">
-            <a:schemeClr val="accent1"/>
-          </a:effectRef>
-          <a:fontRef idx="minor">
-            <a:schemeClr val="lt1"/>
-          </a:fontRef>
-        </p:style>
-        <p:txBody>
-          <a:bodyPr rtlCol="0" anchor="ctr"/>
-          <a:lstStyle/>
-          <a:p>
-            <a:pPr algn="ctr"/>
-          </a:p>
-        </p:txBody>
-      </p:sp>
-      <p:sp>
-        <p:nvSpPr>
-          <p:cNvPr id="10" name="TextBox 9"/>
-          <p:cNvSpPr txBox="1"/>
-          <p:nvPr/>
-        </p:nvSpPr>
-        <p:spPr>
-          <a:xfrm>
-            <a:off x="685800" y="1463039"/>
-            <a:ext cx="5029200" cy="320040"/>
-          </a:xfrm>
-          <a:prstGeom prst="rect">
-            <a:avLst/>
-          </a:prstGeom>
-          <a:noFill/>
-        </p:spPr>
-        <p:txBody>
-          <a:bodyPr wrap="square" lIns="18288" rIns="18288" anchor="ctr">
-            <a:spAutoFit/>
-          </a:bodyPr>
-          <a:lstStyle/>
-          <a:p>
-            <a:pPr algn="l">
-              <a:spcBef>
-                <a:spcPts val="0"/>
-              </a:spcBef>
-              <a:spcAft>
-                <a:spcPts val="200"/>
-              </a:spcAft>
-            </a:pPr>
-            <a:r>
-              <a:rPr sz="1600" b="1">
-                <a:solidFill>
-                  <a:srgbClr val="F8FAFC"/>
-                </a:solidFill>
-                <a:latin typeface="WenQuanYi Micro Hei"/>
-                <a:ea typeface="WenQuanYi Micro Hei"/>
-                <a:cs typeface="WenQuanYi Micro Hei"/>
-              </a:rPr>
-              <a:t>多机协同 SLAM</a:t>
-            </a:r>
-          </a:p>
-        </p:txBody>
-      </p:sp>
-      <p:sp>
-        <p:nvSpPr>
-          <p:cNvPr id="11" name="TextBox 10"/>
-          <p:cNvSpPr txBox="1"/>
-          <p:nvPr/>
-        </p:nvSpPr>
-        <p:spPr>
-          <a:xfrm>
-            <a:off x="685800" y="1828800"/>
-            <a:ext cx="5029200" cy="365760"/>
-          </a:xfrm>
-          <a:prstGeom prst="rect">
-            <a:avLst/>
-          </a:prstGeom>
-          <a:noFill/>
-        </p:spPr>
-        <p:txBody>
-          <a:bodyPr wrap="square" lIns="18288" rIns="18288" anchor="ctr">
-            <a:spAutoFit/>
-          </a:bodyPr>
-          <a:lstStyle/>
-          <a:p>
-            <a:pPr algn="l">
-              <a:spcBef>
-                <a:spcPts val="0"/>
-              </a:spcBef>
-              <a:spcAft>
-                <a:spcPts val="200"/>
-              </a:spcAft>
-            </a:pPr>
-            <a:r>
-              <a:rPr sz="2000" b="1">
-                <a:solidFill>
-                  <a:srgbClr val="34D399"/>
-                </a:solidFill>
-                <a:latin typeface="WenQuanYi Micro Hei"/>
-                <a:ea typeface="WenQuanYi Micro Hei"/>
-                <a:cs typeface="WenQuanYi Micro Hei"/>
-              </a:rPr>
-              <a:t>CPU −35% ~ 50%</a:t>
-            </a:r>
-          </a:p>
-        </p:txBody>
-      </p:sp>
-      <p:sp>
-        <p:nvSpPr>
-          <p:cNvPr id="12" name="TextBox 11"/>
-          <p:cNvSpPr txBox="1"/>
-          <p:nvPr/>
-        </p:nvSpPr>
-        <p:spPr>
-          <a:xfrm>
-            <a:off x="685800" y="2331720"/>
-            <a:ext cx="5029200" cy="960120"/>
-          </a:xfrm>
-          <a:prstGeom prst="rect">
-            <a:avLst/>
-          </a:prstGeom>
-          <a:noFill/>
-        </p:spPr>
-        <p:txBody>
-          <a:bodyPr wrap="square" lIns="18288" rIns="18288" anchor="ctr">
-            <a:spAutoFit/>
-          </a:bodyPr>
-          <a:lstStyle/>
-          <a:p>
-            <a:pPr algn="l">
-              <a:spcBef>
-                <a:spcPts val="0"/>
-              </a:spcBef>
-              <a:spcAft>
-                <a:spcPts val="200"/>
-              </a:spcAft>
-            </a:pPr>
-            <a:r>
-              <a:rPr sz="1400" b="0">
-                <a:solidFill>
-                  <a:srgbClr val="94A3B8"/>
-                </a:solidFill>
-                <a:latin typeface="WenQuanYi Micro Hei"/>
-                <a:ea typeface="WenQuanYi Micro Hei"/>
-                <a:cs typeface="WenQuanYi Micro Hei"/>
-              </a:rPr>
-              <a:t>坑：ROS Topic 序列化拷贝
-SHM 零拷贝 + DDS QoS</a:t>
-            </a:r>
-          </a:p>
-        </p:txBody>
-      </p:sp>
-      <p:sp>
-        <p:nvSpPr>
-          <p:cNvPr id="13" name="Rounded Rectangle 12"/>
-          <p:cNvSpPr/>
-          <p:nvPr/>
-        </p:nvSpPr>
-        <p:spPr>
-          <a:xfrm>
-            <a:off x="6263640" y="1280160"/>
-            <a:ext cx="5532120" cy="2286000"/>
-          </a:xfrm>
-          <a:prstGeom prst="roundRect">
-            <a:avLst>
-              <a:gd name="adj" fmla="val 8000"/>
-            </a:avLst>
-          </a:prstGeom>
-          <a:solidFill>
-            <a:srgbClr val="151D2E"/>
-          </a:solidFill>
-          <a:ln w="14604">
-            <a:solidFill>
-              <a:srgbClr val="FBBF24"/>
-            </a:solidFill>
-          </a:ln>
-          <a:effectLst/>
-        </p:spPr>
-        <p:style>
-          <a:lnRef idx="1">
-            <a:schemeClr val="accent1"/>
-          </a:lnRef>
-          <a:fillRef idx="3">
-            <a:schemeClr val="accent1"/>
-          </a:fillRef>
-          <a:effectRef idx="2">
-            <a:schemeClr val="accent1"/>
-          </a:effectRef>
-          <a:fontRef idx="minor">
-            <a:schemeClr val="lt1"/>
-          </a:fontRef>
-        </p:style>
-        <p:txBody>
-          <a:bodyPr rtlCol="0" anchor="ctr"/>
-          <a:lstStyle/>
-          <a:p>
-            <a:pPr algn="ctr"/>
-          </a:p>
-        </p:txBody>
-      </p:sp>
-      <p:sp>
-        <p:nvSpPr>
-          <p:cNvPr id="14" name="Rectangle 13"/>
-          <p:cNvSpPr/>
-          <p:nvPr/>
-        </p:nvSpPr>
-        <p:spPr>
-          <a:xfrm>
-            <a:off x="6263640" y="1280160"/>
-            <a:ext cx="5532120" cy="73152"/>
-          </a:xfrm>
-          <a:prstGeom prst="rect">
-            <a:avLst/>
-          </a:prstGeom>
-          <a:solidFill>
-            <a:srgbClr val="FBBF24"/>
-          </a:solidFill>
-          <a:ln>
-            <a:noFill/>
-          </a:ln>
-          <a:effectLst/>
-        </p:spPr>
-        <p:style>
-          <a:lnRef idx="1">
-            <a:schemeClr val="accent1"/>
-          </a:lnRef>
-          <a:fillRef idx="3">
-            <a:schemeClr val="accent1"/>
-          </a:fillRef>
-          <a:effectRef idx="2">
-            <a:schemeClr val="accent1"/>
-          </a:effectRef>
-          <a:fontRef idx="minor">
-            <a:schemeClr val="lt1"/>
-          </a:fontRef>
-        </p:style>
-        <p:txBody>
-          <a:bodyPr rtlCol="0" anchor="ctr"/>
-          <a:lstStyle/>
-          <a:p>
-            <a:pPr algn="ctr"/>
-          </a:p>
-        </p:txBody>
-      </p:sp>
-      <p:sp>
-        <p:nvSpPr>
-          <p:cNvPr id="15" name="TextBox 14"/>
-          <p:cNvSpPr txBox="1"/>
-          <p:nvPr/>
-        </p:nvSpPr>
-        <p:spPr>
-          <a:xfrm>
-            <a:off x="6537959" y="1463039"/>
-            <a:ext cx="5029200" cy="320040"/>
-          </a:xfrm>
-          <a:prstGeom prst="rect">
-            <a:avLst/>
-          </a:prstGeom>
-          <a:noFill/>
-        </p:spPr>
-        <p:txBody>
-          <a:bodyPr wrap="square" lIns="18288" rIns="18288" anchor="ctr">
-            <a:spAutoFit/>
-          </a:bodyPr>
-          <a:lstStyle/>
-          <a:p>
-            <a:pPr algn="l">
-              <a:spcBef>
-                <a:spcPts val="0"/>
-              </a:spcBef>
-              <a:spcAft>
-                <a:spcPts val="200"/>
-              </a:spcAft>
-            </a:pPr>
-            <a:r>
-              <a:rPr sz="1600" b="1">
-                <a:solidFill>
-                  <a:srgbClr val="F8FAFC"/>
-                </a:solidFill>
-                <a:latin typeface="WenQuanYi Micro Hei"/>
-                <a:ea typeface="WenQuanYi Micro Hei"/>
-                <a:cs typeface="WenQuanYi Micro Hei"/>
-              </a:rPr>
-              <a:t>无 GPS 巡检航线</a:t>
-            </a:r>
-          </a:p>
-        </p:txBody>
-      </p:sp>
-      <p:sp>
-        <p:nvSpPr>
-          <p:cNvPr id="16" name="TextBox 15"/>
-          <p:cNvSpPr txBox="1"/>
-          <p:nvPr/>
-        </p:nvSpPr>
-        <p:spPr>
-          <a:xfrm>
-            <a:off x="6537959" y="1828800"/>
-            <a:ext cx="5029200" cy="365760"/>
-          </a:xfrm>
-          <a:prstGeom prst="rect">
-            <a:avLst/>
-          </a:prstGeom>
-          <a:noFill/>
-        </p:spPr>
-        <p:txBody>
-          <a:bodyPr wrap="square" lIns="18288" rIns="18288" anchor="ctr">
-            <a:spAutoFit/>
-          </a:bodyPr>
-          <a:lstStyle/>
-          <a:p>
-            <a:pPr algn="l">
-              <a:spcBef>
-                <a:spcPts val="0"/>
-              </a:spcBef>
-              <a:spcAft>
-                <a:spcPts val="200"/>
-              </a:spcAft>
-            </a:pPr>
-            <a:r>
-              <a:rPr sz="2000" b="1">
-                <a:solidFill>
-                  <a:srgbClr val="FBBF24"/>
-                </a:solidFill>
-                <a:latin typeface="WenQuanYi Micro Hei"/>
-                <a:ea typeface="WenQuanYi Micro Hei"/>
-                <a:cs typeface="WenQuanYi Micro Hei"/>
-              </a:rPr>
-              <a:t>WGS84 ↔ ENU 钉死</a:t>
-            </a:r>
-          </a:p>
-        </p:txBody>
-      </p:sp>
-      <p:sp>
-        <p:nvSpPr>
-          <p:cNvPr id="17" name="TextBox 16"/>
-          <p:cNvSpPr txBox="1"/>
-          <p:nvPr/>
-        </p:nvSpPr>
-        <p:spPr>
-          <a:xfrm>
-            <a:off x="6537959" y="2331720"/>
-            <a:ext cx="5029200" cy="960120"/>
-          </a:xfrm>
-          <a:prstGeom prst="rect">
-            <a:avLst/>
-          </a:prstGeom>
-          <a:noFill/>
-        </p:spPr>
-        <p:txBody>
-          <a:bodyPr wrap="square" lIns="18288" rIns="18288" anchor="ctr">
-            <a:spAutoFit/>
-          </a:bodyPr>
-          <a:lstStyle/>
-          <a:p>
-            <a:pPr algn="l">
-              <a:spcBef>
-                <a:spcPts val="0"/>
-              </a:spcBef>
-              <a:spcAft>
-                <a:spcPts val="200"/>
-              </a:spcAft>
-            </a:pPr>
-            <a:r>
-              <a:rPr sz="1400" b="0">
-                <a:solidFill>
-                  <a:srgbClr val="94A3B8"/>
-                </a:solidFill>
-                <a:latin typeface="WenQuanYi Micro Hei"/>
-                <a:ea typeface="WenQuanYi Micro Hei"/>
-                <a:cs typeface="WenQuanYi Micro Hei"/>
-              </a:rPr>
-              <a:t>坑：任务 / 算法 / 飞控坐标漂移
-Mission Contract 统一语义</a:t>
-            </a:r>
-          </a:p>
-        </p:txBody>
-      </p:sp>
-      <p:sp>
-        <p:nvSpPr>
-          <p:cNvPr id="18" name="Rounded Rectangle 17"/>
-          <p:cNvSpPr/>
-          <p:nvPr/>
-        </p:nvSpPr>
-        <p:spPr>
-          <a:xfrm>
-            <a:off x="411480" y="3794760"/>
-            <a:ext cx="5532120" cy="2286000"/>
-          </a:xfrm>
-          <a:prstGeom prst="roundRect">
-            <a:avLst>
-              <a:gd name="adj" fmla="val 8000"/>
-            </a:avLst>
-          </a:prstGeom>
-          <a:solidFill>
-            <a:srgbClr val="151D2E"/>
-          </a:solidFill>
-          <a:ln w="14604">
-            <a:solidFill>
-              <a:srgbClr val="22D3EE"/>
-            </a:solidFill>
-          </a:ln>
-          <a:effectLst/>
-        </p:spPr>
-        <p:style>
-          <a:lnRef idx="1">
-            <a:schemeClr val="accent1"/>
-          </a:lnRef>
-          <a:fillRef idx="3">
-            <a:schemeClr val="accent1"/>
-          </a:fillRef>
-          <a:effectRef idx="2">
-            <a:schemeClr val="accent1"/>
-          </a:effectRef>
-          <a:fontRef idx="minor">
-            <a:schemeClr val="lt1"/>
-          </a:fontRef>
-        </p:style>
-        <p:txBody>
-          <a:bodyPr rtlCol="0" anchor="ctr"/>
-          <a:lstStyle/>
-          <a:p>
-            <a:pPr algn="ctr"/>
-          </a:p>
-        </p:txBody>
-      </p:sp>
-      <p:sp>
-        <p:nvSpPr>
-          <p:cNvPr id="19" name="Rectangle 18"/>
-          <p:cNvSpPr/>
-          <p:nvPr/>
-        </p:nvSpPr>
-        <p:spPr>
-          <a:xfrm>
-            <a:off x="411480" y="3794760"/>
-            <a:ext cx="5532120" cy="73152"/>
-          </a:xfrm>
-          <a:prstGeom prst="rect">
-            <a:avLst/>
-          </a:prstGeom>
-          <a:solidFill>
-            <a:srgbClr val="22D3EE"/>
-          </a:solidFill>
-          <a:ln>
-            <a:noFill/>
-          </a:ln>
-          <a:effectLst/>
-        </p:spPr>
-        <p:style>
-          <a:lnRef idx="1">
-            <a:schemeClr val="accent1"/>
-          </a:lnRef>
-          <a:fillRef idx="3">
-            <a:schemeClr val="accent1"/>
-          </a:fillRef>
-          <a:effectRef idx="2">
-            <a:schemeClr val="accent1"/>
-          </a:effectRef>
-          <a:fontRef idx="minor">
-            <a:schemeClr val="lt1"/>
-          </a:fontRef>
-        </p:style>
-        <p:txBody>
-          <a:bodyPr rtlCol="0" anchor="ctr"/>
-          <a:lstStyle/>
-          <a:p>
-            <a:pPr algn="ctr"/>
-          </a:p>
-        </p:txBody>
-      </p:sp>
-      <p:sp>
-        <p:nvSpPr>
-          <p:cNvPr id="20" name="TextBox 19"/>
-          <p:cNvSpPr txBox="1"/>
-          <p:nvPr/>
-        </p:nvSpPr>
-        <p:spPr>
-          <a:xfrm>
-            <a:off x="685800" y="3977640"/>
-            <a:ext cx="5029200" cy="320040"/>
-          </a:xfrm>
-          <a:prstGeom prst="rect">
-            <a:avLst/>
-          </a:prstGeom>
-          <a:noFill/>
-        </p:spPr>
-        <p:txBody>
-          <a:bodyPr wrap="square" lIns="18288" rIns="18288" anchor="ctr">
-            <a:spAutoFit/>
-          </a:bodyPr>
-          <a:lstStyle/>
-          <a:p>
-            <a:pPr algn="l">
-              <a:spcBef>
-                <a:spcPts val="0"/>
-              </a:spcBef>
-              <a:spcAft>
-                <a:spcPts val="200"/>
-              </a:spcAft>
-            </a:pPr>
-            <a:r>
-              <a:rPr sz="1600" b="1">
-                <a:solidFill>
-                  <a:srgbClr val="F8FAFC"/>
-                </a:solidFill>
-                <a:latin typeface="WenQuanYi Micro Hei"/>
-                <a:ea typeface="WenQuanYi Micro Hei"/>
-                <a:cs typeface="WenQuanYi Micro Hei"/>
-              </a:rPr>
-              <a:t>地铁清洁 · LIO-SAM</a:t>
-            </a:r>
-          </a:p>
-        </p:txBody>
-      </p:sp>
-      <p:sp>
-        <p:nvSpPr>
-          <p:cNvPr id="21" name="TextBox 20"/>
-          <p:cNvSpPr txBox="1"/>
-          <p:nvPr/>
-        </p:nvSpPr>
-        <p:spPr>
-          <a:xfrm>
-            <a:off x="685800" y="4343400"/>
-            <a:ext cx="5029200" cy="365760"/>
-          </a:xfrm>
-          <a:prstGeom prst="rect">
-            <a:avLst/>
-          </a:prstGeom>
-          <a:noFill/>
-        </p:spPr>
-        <p:txBody>
-          <a:bodyPr wrap="square" lIns="18288" rIns="18288" anchor="ctr">
-            <a:spAutoFit/>
-          </a:bodyPr>
-          <a:lstStyle/>
-          <a:p>
-            <a:pPr algn="l">
-              <a:spcBef>
-                <a:spcPts val="0"/>
-              </a:spcBef>
-              <a:spcAft>
-                <a:spcPts val="200"/>
-              </a:spcAft>
-            </a:pPr>
-            <a:r>
-              <a:rPr sz="2000" b="1">
-                <a:solidFill>
-                  <a:srgbClr val="22D3EE"/>
-                </a:solidFill>
-                <a:latin typeface="WenQuanYi Micro Hei"/>
-                <a:ea typeface="WenQuanYi Micro Hei"/>
-                <a:cs typeface="WenQuanYi Micro Hei"/>
-              </a:rPr>
-              <a:t>map→odom→base</a:t>
-            </a:r>
-          </a:p>
-        </p:txBody>
-      </p:sp>
-      <p:sp>
-        <p:nvSpPr>
-          <p:cNvPr id="22" name="TextBox 21"/>
-          <p:cNvSpPr txBox="1"/>
-          <p:nvPr/>
-        </p:nvSpPr>
-        <p:spPr>
-          <a:xfrm>
-            <a:off x="685800" y="4846320"/>
-            <a:ext cx="5029200" cy="960120"/>
-          </a:xfrm>
-          <a:prstGeom prst="rect">
-            <a:avLst/>
-          </a:prstGeom>
-          <a:noFill/>
-        </p:spPr>
-        <p:txBody>
-          <a:bodyPr wrap="square" lIns="18288" rIns="18288" anchor="ctr">
-            <a:spAutoFit/>
-          </a:bodyPr>
-          <a:lstStyle/>
-          <a:p>
-            <a:pPr algn="l">
-              <a:spcBef>
-                <a:spcPts val="0"/>
-              </a:spcBef>
-              <a:spcAft>
-                <a:spcPts val="200"/>
-              </a:spcAft>
-            </a:pPr>
-            <a:r>
-              <a:rPr sz="1400" b="0">
-                <a:solidFill>
-                  <a:srgbClr val="94A3B8"/>
-                </a:solidFill>
-                <a:latin typeface="WenQuanYi Micro Hei"/>
-                <a:ea typeface="WenQuanYi Micro Hei"/>
-                <a:cs typeface="WenQuanYi Micro Hei"/>
-              </a:rPr>
-              <a:t>坑：地图 / 任务 / 执行三套坐标
-感知契约接口先定义</a:t>
-            </a:r>
-          </a:p>
-        </p:txBody>
-      </p:sp>
-      <p:sp>
-        <p:nvSpPr>
-          <p:cNvPr id="23" name="Rounded Rectangle 22"/>
-          <p:cNvSpPr/>
-          <p:nvPr/>
-        </p:nvSpPr>
-        <p:spPr>
-          <a:xfrm>
-            <a:off x="6263640" y="3794760"/>
-            <a:ext cx="5532120" cy="2286000"/>
-          </a:xfrm>
-          <a:prstGeom prst="roundRect">
-            <a:avLst>
-              <a:gd name="adj" fmla="val 8000"/>
-            </a:avLst>
-          </a:prstGeom>
-          <a:solidFill>
-            <a:srgbClr val="151D2E"/>
-          </a:solidFill>
-          <a:ln w="14604">
-            <a:solidFill>
-              <a:srgbClr val="A78BFA"/>
-            </a:solidFill>
-          </a:ln>
-          <a:effectLst/>
-        </p:spPr>
-        <p:style>
-          <a:lnRef idx="1">
-            <a:schemeClr val="accent1"/>
-          </a:lnRef>
-          <a:fillRef idx="3">
-            <a:schemeClr val="accent1"/>
-          </a:fillRef>
-          <a:effectRef idx="2">
-            <a:schemeClr val="accent1"/>
-          </a:effectRef>
-          <a:fontRef idx="minor">
-            <a:schemeClr val="lt1"/>
-          </a:fontRef>
-        </p:style>
-        <p:txBody>
-          <a:bodyPr rtlCol="0" anchor="ctr"/>
-          <a:lstStyle/>
-          <a:p>
-            <a:pPr algn="ctr"/>
-          </a:p>
-        </p:txBody>
-      </p:sp>
-      <p:sp>
-        <p:nvSpPr>
-          <p:cNvPr id="24" name="Rectangle 23"/>
-          <p:cNvSpPr/>
-          <p:nvPr/>
-        </p:nvSpPr>
-        <p:spPr>
-          <a:xfrm>
-            <a:off x="6263640" y="3794760"/>
-            <a:ext cx="5532120" cy="73152"/>
-          </a:xfrm>
-          <a:prstGeom prst="rect">
-            <a:avLst/>
-          </a:prstGeom>
-          <a:solidFill>
-            <a:srgbClr val="A78BFA"/>
-          </a:solidFill>
-          <a:ln>
-            <a:noFill/>
-          </a:ln>
-          <a:effectLst/>
-        </p:spPr>
-        <p:style>
-          <a:lnRef idx="1">
-            <a:schemeClr val="accent1"/>
-          </a:lnRef>
-          <a:fillRef idx="3">
-            <a:schemeClr val="accent1"/>
-          </a:fillRef>
-          <a:effectRef idx="2">
-            <a:schemeClr val="accent1"/>
-          </a:effectRef>
-          <a:fontRef idx="minor">
-            <a:schemeClr val="lt1"/>
-          </a:fontRef>
-        </p:style>
-        <p:txBody>
-          <a:bodyPr rtlCol="0" anchor="ctr"/>
-          <a:lstStyle/>
-          <a:p>
-            <a:pPr algn="ctr"/>
-          </a:p>
-        </p:txBody>
-      </p:sp>
-      <p:sp>
-        <p:nvSpPr>
-          <p:cNvPr id="25" name="TextBox 24"/>
-          <p:cNvSpPr txBox="1"/>
-          <p:nvPr/>
-        </p:nvSpPr>
-        <p:spPr>
-          <a:xfrm>
-            <a:off x="6537959" y="3977640"/>
-            <a:ext cx="5029200" cy="320040"/>
-          </a:xfrm>
-          <a:prstGeom prst="rect">
-            <a:avLst/>
-          </a:prstGeom>
-          <a:noFill/>
-        </p:spPr>
-        <p:txBody>
-          <a:bodyPr wrap="square" lIns="18288" rIns="18288" anchor="ctr">
-            <a:spAutoFit/>
-          </a:bodyPr>
-          <a:lstStyle/>
-          <a:p>
-            <a:pPr algn="l">
-              <a:spcBef>
-                <a:spcPts val="0"/>
-              </a:spcBef>
-              <a:spcAft>
-                <a:spcPts val="200"/>
-              </a:spcAft>
-            </a:pPr>
-            <a:r>
-              <a:rPr sz="1600" b="1">
-                <a:solidFill>
-                  <a:srgbClr val="F8FAFC"/>
-                </a:solidFill>
-                <a:latin typeface="WenQuanYi Micro Hei"/>
-                <a:ea typeface="WenQuanYi Micro Hei"/>
-                <a:cs typeface="WenQuanYi Micro Hei"/>
-              </a:rPr>
-              <a:t>RK3588 巡航 AGV</a:t>
-            </a:r>
-          </a:p>
-        </p:txBody>
-      </p:sp>
-      <p:sp>
-        <p:nvSpPr>
-          <p:cNvPr id="26" name="TextBox 25"/>
-          <p:cNvSpPr txBox="1"/>
-          <p:nvPr/>
-        </p:nvSpPr>
-        <p:spPr>
-          <a:xfrm>
-            <a:off x="6537959" y="4343400"/>
-            <a:ext cx="5029200" cy="365760"/>
-          </a:xfrm>
-          <a:prstGeom prst="rect">
-            <a:avLst/>
-          </a:prstGeom>
-          <a:noFill/>
-        </p:spPr>
-        <p:txBody>
-          <a:bodyPr wrap="square" lIns="18288" rIns="18288" anchor="ctr">
-            <a:spAutoFit/>
-          </a:bodyPr>
-          <a:lstStyle/>
-          <a:p>
-            <a:pPr algn="l">
-              <a:spcBef>
-                <a:spcPts val="0"/>
-              </a:spcBef>
-              <a:spcAft>
-                <a:spcPts val="200"/>
-              </a:spcAft>
-            </a:pPr>
-            <a:r>
-              <a:rPr sz="2000" b="1">
-                <a:solidFill>
-                  <a:srgbClr val="A78BFA"/>
-                </a:solidFill>
-                <a:latin typeface="WenQuanYi Micro Hei"/>
-                <a:ea typeface="WenQuanYi Micro Hei"/>
-                <a:cs typeface="WenQuanYi Micro Hei"/>
-              </a:rPr>
-              <a:t>INT8 端侧实时</a:t>
-            </a:r>
-          </a:p>
-        </p:txBody>
-      </p:sp>
-      <p:sp>
-        <p:nvSpPr>
-          <p:cNvPr id="27" name="TextBox 26"/>
-          <p:cNvSpPr txBox="1"/>
-          <p:nvPr/>
-        </p:nvSpPr>
-        <p:spPr>
-          <a:xfrm>
-            <a:off x="6537959" y="4846320"/>
-            <a:ext cx="5029200" cy="960120"/>
-          </a:xfrm>
-          <a:prstGeom prst="rect">
-            <a:avLst/>
-          </a:prstGeom>
-          <a:noFill/>
-        </p:spPr>
-        <p:txBody>
-          <a:bodyPr wrap="square" lIns="18288" rIns="18288" anchor="ctr">
-            <a:spAutoFit/>
-          </a:bodyPr>
-          <a:lstStyle/>
-          <a:p>
-            <a:pPr algn="l">
-              <a:spcBef>
-                <a:spcPts val="0"/>
-              </a:spcBef>
-              <a:spcAft>
-                <a:spcPts val="200"/>
-              </a:spcAft>
-            </a:pPr>
-            <a:r>
-              <a:rPr sz="1400" b="0">
-                <a:solidFill>
-                  <a:srgbClr val="94A3B8"/>
-                </a:solidFill>
-                <a:latin typeface="WenQuanYi Micro Hei"/>
-                <a:ea typeface="WenQuanYi Micro Hei"/>
-                <a:cs typeface="WenQuanYi Micro Hei"/>
-              </a:rPr>
-              <a:t>坑：感知与控制耦合
-NPU 推理与 STM32 物理解耦</a:t>
-            </a:r>
-          </a:p>
-        </p:txBody>
-      </p:sp>
-      <p:sp>
-        <p:nvSpPr>
-          <p:cNvPr id="28" name="TextBox 27"/>
-          <p:cNvSpPr txBox="1"/>
-          <p:nvPr/>
-        </p:nvSpPr>
-        <p:spPr>
-          <a:xfrm>
-            <a:off x="411480" y="6537960"/>
-            <a:ext cx="8229600" cy="256032"/>
-          </a:xfrm>
-          <a:prstGeom prst="rect">
-            <a:avLst/>
-          </a:prstGeom>
-          <a:noFill/>
-        </p:spPr>
-        <p:txBody>
-          <a:bodyPr wrap="square" lIns="18288" rIns="18288" anchor="ctr">
-            <a:spAutoFit/>
-          </a:bodyPr>
-          <a:lstStyle/>
-          <a:p>
-            <a:pPr algn="l">
-              <a:spcBef>
-                <a:spcPts val="0"/>
-              </a:spcBef>
-              <a:spcAft>
-                <a:spcPts val="200"/>
-              </a:spcAft>
-            </a:pPr>
-            <a:r>
-              <a:rPr sz="1000" b="0">
-                <a:solidFill>
-                  <a:srgbClr val="64748B"/>
-                </a:solidFill>
-                <a:latin typeface="WenQuanYi Micro Hei"/>
-                <a:ea typeface="WenQuanYi Micro Hei"/>
-                <a:cs typeface="WenQuanYi Micro Hei"/>
-              </a:rPr>
-              <a:t>曾欣宇  ·  空间导航算法部署  ·  对外沟通</a:t>
-            </a:r>
-          </a:p>
-        </p:txBody>
-      </p:sp>
-      <p:sp>
-        <p:nvSpPr>
-          <p:cNvPr id="29" name="TextBox 28"/>
           <p:cNvSpPr txBox="1"/>
           <p:nvPr/>
         </p:nvSpPr>
